--- a/산출물/통합반/이론_오프라인/05회차/통합반_오프라인_05회차.pptx
+++ b/산출물/통합반/이론_오프라인/05회차/통합반_오프라인_05회차.pptx
@@ -634,7 +634,7 @@
           </a:p>
           <a:p>
             <a:r>
-              <a:t>[다음] 실행 고리: 요청 해석에서 종료까지</a:t>
+              <a:t>[다음] 실행 고리</a:t>
             </a:r>
           </a:p>
         </p:txBody>
@@ -734,7 +734,7 @@
           </a:p>
           <a:p>
             <a:r>
-              <a:t>[다음] 실제 기록 ②: 관찰한 결과가 다음 호출의 입력이 된다</a:t>
+              <a:t>[다음] 실제 기록 ②</a:t>
             </a:r>
           </a:p>
         </p:txBody>
@@ -829,7 +829,7 @@
           </a:p>
           <a:p>
             <a:r>
-              <a:t>[다음] 실제 기록 ④: 종료</a:t>
+              <a:t>[다음] 실제 기록 ④</a:t>
             </a:r>
           </a:p>
         </p:txBody>
@@ -934,7 +934,7 @@
           </a:p>
           <a:p>
             <a:r>
-              <a:t>[다음] 쿨러 사건의 업무 산출물: 추천안에 담긴 것</a:t>
+              <a:t>[다음] 쿨러 사건의 업무 산출물</a:t>
             </a:r>
           </a:p>
         </p:txBody>
@@ -1229,7 +1229,7 @@
           </a:p>
           <a:p>
             <a:r>
-              <a:t>[다음] 지식 그래프에서 읽는 것: 원인 후보와 조치 방법</a:t>
+              <a:t>[다음] 지식 그래프에서 읽는 것</a:t>
             </a:r>
           </a:p>
         </p:txBody>
@@ -1429,7 +1429,7 @@
           </a:p>
           <a:p>
             <a:r>
-              <a:t>[다음] 신선도: 관측된 값이 얼마나 오래됐는가</a:t>
+              <a:t>[다음] 신선도</a:t>
             </a:r>
           </a:p>
         </p:txBody>
@@ -1909,7 +1909,7 @@
           </a:p>
           <a:p>
             <a:r>
-              <a:t>[다음] 근거의 세 가지 상태: SUPPORTED · UNKNOWN · UNSUPPORTED</a:t>
+              <a:t>[다음] 근거의 세 가지 상태</a:t>
             </a:r>
           </a:p>
         </p:txBody>
@@ -2009,7 +2009,7 @@
           </a:p>
           <a:p>
             <a:r>
-              <a:t>[다음] 보류의 형식: 상태 · 이유 · 증거</a:t>
+              <a:t>[다음] 보류의 형식</a:t>
             </a:r>
           </a:p>
         </p:txBody>
@@ -2214,7 +2214,7 @@
           </a:p>
           <a:p>
             <a:r>
-              <a:t>[다음] 권한 제한: 허용 목록 밖의 도구</a:t>
+              <a:t>[다음] 권한 제한</a:t>
             </a:r>
           </a:p>
         </p:txBody>
@@ -2319,7 +2319,7 @@
           </a:p>
           <a:p>
             <a:r>
-              <a:t>[다음] 기준이 지지한 원인과 가설: 판정의 범위</a:t>
+              <a:t>[다음] 기준이 지지한 원인과 가설</a:t>
             </a:r>
           </a:p>
         </p:txBody>
@@ -2699,7 +2699,7 @@
           </a:p>
           <a:p>
             <a:r>
-              <a:t>[다음] 경보에서 승인까지: 에이전트가 맡은 구간</a:t>
+              <a:t>[다음] 경보에서 승인까지</a:t>
             </a:r>
           </a:p>
         </p:txBody>
@@ -2914,7 +2914,7 @@
           </a:p>
           <a:p>
             <a:r>
-              <a:t>[다음] 에이전트의 세 요소: 모델 · 도구 · 실행 고리</a:t>
+              <a:t>[다음] 에이전트의 세 요소</a:t>
             </a:r>
           </a:p>
         </p:txBody>
@@ -3019,7 +3019,7 @@
           </a:p>
           <a:p>
             <a:r>
-              <a:t>[다음] 에이전트를 정의하는 항목: 목표 · 도구 · 업무 지침</a:t>
+              <a:t>[다음] 에이전트를 정의하는 항목</a:t>
             </a:r>
           </a:p>
         </p:txBody>
@@ -7137,7 +7137,7 @@
       </p:sp>
       <p:pic>
         <p:nvPicPr>
-          <p:cNvPr id="6" name="삽화:실행고리.svg" descr="illust_5095740286626443731_1793113376.png"/>
+          <p:cNvPr id="6" name="삽화:실행고리.svg" descr="illust_5462182364650228371_1793113376.png"/>
           <p:cNvPicPr>
             <a:picLocks noChangeAspect="1"/>
           </p:cNvPicPr>
@@ -13868,7 +13868,7 @@
       </p:sp>
       <p:pic>
         <p:nvPicPr>
-          <p:cNvPr id="6" name="삽화:신선도.svg" descr="illust_240879024293030627_1793113376.png"/>
+          <p:cNvPr id="6" name="삽화:신선도.svg" descr="illust_311691370201162502_1793113376.png"/>
           <p:cNvPicPr>
             <a:picLocks noChangeAspect="1"/>
           </p:cNvPicPr>
@@ -16546,7 +16546,7 @@
       </p:sp>
       <p:pic>
         <p:nvPicPr>
-          <p:cNvPr id="6" name="삽화:멈춤조건.svg" descr="illust_118349084604468282_1793113376.png"/>
+          <p:cNvPr id="6" name="삽화:멈춤조건.svg" descr="illust_457820399975135422_1793113376.png"/>
           <p:cNvPicPr>
             <a:picLocks noChangeAspect="1"/>
           </p:cNvPicPr>
@@ -23486,7 +23486,7 @@
       </p:sp>
       <p:pic>
         <p:nvPicPr>
-          <p:cNvPr id="6" name="삽화:경보에서승인까지.svg" descr="illust_1354071584127139376_1793113376.png"/>
+          <p:cNvPr id="6" name="삽화:경보에서승인까지.svg" descr="illust_296614431074477941_1793113376.png"/>
           <p:cNvPicPr>
             <a:picLocks noChangeAspect="1"/>
           </p:cNvPicPr>
@@ -24914,7 +24914,7 @@
       </p:sp>
       <p:pic>
         <p:nvPicPr>
-          <p:cNvPr id="6" name="삽화:세요소.svg" descr="illust_8501878801782209863_1793113376.png"/>
+          <p:cNvPr id="6" name="삽화:세요소.svg" descr="illust_528013563658796988_1793113376.png"/>
           <p:cNvPicPr>
             <a:picLocks noChangeAspect="1"/>
           </p:cNvPicPr>

--- a/산출물/통합반/이론_오프라인/05회차/통합반_오프라인_05회차.pptx
+++ b/산출물/통합반/이론_오프라인/05회차/통합반_오프라인_05회차.pptx
@@ -33,6 +33,12 @@
     <p:sldId id="281" r:id="rId33"/>
     <p:sldId id="282" r:id="rId34"/>
     <p:sldId id="283" r:id="rId35"/>
+    <p:sldId id="284" r:id="rId36"/>
+    <p:sldId id="285" r:id="rId37"/>
+    <p:sldId id="286" r:id="rId38"/>
+    <p:sldId id="287" r:id="rId39"/>
+    <p:sldId id="288" r:id="rId40"/>
+    <p:sldId id="289" r:id="rId41"/>
   </p:sldIdLst>
   <p:sldSz cx="12191695" cy="6858000" type="screen4x3"/>
   <p:notesSz cx="6858000" cy="9144000"/>
@@ -534,12 +540,12 @@
           </a:p>
           <a:p>
             <a:r>
-              <a:t>· 네 회차 동안 만든 설비 모델 · 판단 규칙 · 문서 지식 → 오늘부터 그 지식을 읽고 일하는 쪽</a:t>
-            </a:r>
-          </a:p>
-          <a:p>
-            <a:r>
-              <a:t>· 네 교시: 이론 50분 → 원인 · 점검 에이전트 → 품질 접수 에이전트 → 센서 시각화와 결과 검증</a:t>
+              <a:t>· 앞에서 만든 설비 모델 · 판단 규칙 · 문서 지식 → 오늘부터 그 지식을 읽고 일하는 쪽</a:t>
+            </a:r>
+          </a:p>
+          <a:p>
+            <a:r>
+              <a:t>· 오늘의 흐름: 이론 → 원인 · 점검 에이전트 → 품질 접수 에이전트 → 센서 시각화와 결과 검증</a:t>
             </a:r>
           </a:p>
           <a:p>
@@ -629,7 +635,7 @@
           </a:p>
           <a:p>
             <a:r>
-              <a:t>· 2교시 원인 · 점검 에이전트가 이 고리를 그대로 만든다</a:t>
+              <a:t>· 실습의 원인 · 점검 에이전트가 이 고리를 그대로 만든다</a:t>
             </a:r>
           </a:p>
           <a:p>
@@ -1114,12 +1120,12 @@
           </a:p>
           <a:p>
             <a:r>
-              <a:t>· 물음: 지난 네 회차에 만든 지식은 에이전트에게 무엇을 주고, 무엇은 주지 못하나</a:t>
-            </a:r>
-          </a:p>
-          <a:p>
-            <a:r>
-              <a:t>· 4교시 센서 시각화에서 관측 시각과 조회 기간을 함께 표시하는 까닭</a:t>
+              <a:t>· 물음: 앞에서 만든 지식은 에이전트에게 무엇을 주고, 무엇은 주지 못하나</a:t>
+            </a:r>
+          </a:p>
+          <a:p>
+            <a:r>
+              <a:t>· 센서 시각화에서 관측 시각과 조회 기간을 함께 표시하는 까닭</a:t>
             </a:r>
           </a:p>
           <a:p>
@@ -1619,7 +1625,7 @@
           </a:p>
           <a:p>
             <a:r>
-              <a:t>· 4 멈춤 조건: 끝까지 하는 것보다 멈추는 것이 맞는 때 → 2 · 3교시에 만드는 에이전트가 이 조건을 지키는지 4교시에 검토</a:t>
+              <a:t>· 4 멈춤 조건: 끝까지 하는 것보다 멈추는 것이 맞는 때 → 실습에서 만드는 에이전트가 이 조건을 지키는지 마지막에 검토</a:t>
             </a:r>
           </a:p>
           <a:p>
@@ -1704,7 +1710,7 @@
           </a:p>
           <a:p>
             <a:r>
-              <a:t>· 2 · 3교시 에이전트가 미확인을 가설로, 빠진 정보를 조사 요청으로 남기는지 4교시에 검토</a:t>
+              <a:t>· 실습의 에이전트가 미확인을 가설로, 빠진 정보를 조사 요청으로 남기는지 결과 검증에서 확인</a:t>
             </a:r>
           </a:p>
           <a:p>
@@ -2424,7 +2430,7 @@
           </a:p>
           <a:p>
             <a:r>
-              <a:t>[다음] 오늘의 실습과 남길 결과</a:t>
+              <a:t>[다음] 쿨러 사건의 94초를 다시 읽기</a:t>
             </a:r>
           </a:p>
         </p:txBody>
@@ -2494,32 +2500,142 @@
           <a:lstStyle/>
           <a:p>
             <a:r>
-              <a:t>[짚을 곳] 표 세 줄: 교시 → 실습 → 남길 결과, 강조한 4교시</a:t>
-            </a:r>
-          </a:p>
-          <a:p>
-            <a:r>
-              <a:t>· 2교시: 포털 에이전트의 목표 · 도구 · 근거를 확인한 뒤, VS Code에서 설비 · 센서 · 고장 · SOP 관계와 센서 입력을 읽어 원인 후보 · 증거 · 다음 점검 순서를 내는 에이전트. 확인 안 된 원인은 가설로</a:t>
-            </a:r>
-          </a:p>
-          <a:p>
-            <a:r>
-              <a:t>· 3교시: 같은 실행 구조로 품질 접수 메시지와 분류 기준 → 유형 · 추가 확인 · 담당 부서 · 대응 초안. 표현이 다른 접수, 정보가 빠진 접수에서 단정 대신 조사 요청을 남기나</a:t>
-            </a:r>
-          </a:p>
-          <a:p>
-            <a:r>
-              <a:t>· 4교시: 센서 CSV의 시간 · 온도 · 압력 변화를 그려 이상 구간을 찾고 관련 태그 · 조회 기간과 함께, 세 결과에서 근거와 미확인이 갈리는지</a:t>
-            </a:r>
-          </a:p>
-          <a:p>
-            <a:r>
-              <a:t>· 진행은 실습마다 핸즈온 가이드를 따른다. 다음 회차에 반복 작업의 지침을 스킬로 만들고 파일 · Git · 시간 도구를 조합한다</a:t>
-            </a:r>
-          </a:p>
-          <a:p>
-            <a:r>
-              <a:t>[다음] 실습으로</a:t>
+              <a:t>[짚을 곳] 표 다섯 줄: 왼쪽 장면 → 가운데 가를 것(물음) → 오른쪽 근거, 강조한 넷째 줄</a:t>
+            </a:r>
+          </a:p>
+          <a:p>
+            <a:r>
+              <a:t>· 생각할 시간(약 20초): 가운데 물음에 먼저 답한 뒤 오른쪽과 대조</a:t>
+            </a:r>
+          </a:p>
+          <a:p>
+            <a:r>
+              <a:t>· 대안 평가의 네 후보 점수: 모델이 아니라 판단 도구가 계산(모델은 어느 도구에 무엇을 넣을지 적었을 뿐)</a:t>
+            </a:r>
+          </a:p>
+          <a:p>
+            <a:r>
+              <a:t>· 냉각 효율 70 %와 46.2 %: 70은 지식 그래프의 기준, 46.2는 그때 읽은 값</a:t>
+            </a:r>
+          </a:p>
+          <a:p>
+            <a:r>
+              <a:t>· 쿨러 핀 오염 · 팬 구동 불량: 이 모델의 증거 기준이 지지한 건 핀 오염, 팬 진동이 기준보다 낮아 팬 구동 불량은 지웠다</a:t>
+            </a:r>
+          </a:p>
+          <a:p>
+            <a:r>
+              <a:t>· 추천안 제출(판단 번호를 돌려받음)은 에이전트, 승인할지는 그 추천안을 본 운전원이 정한다</a:t>
+            </a:r>
+          </a:p>
+          <a:p>
+            <a:r>
+              <a:t>· 조회 0행 = 조건에 맞는 기록 없음, 조회 실패 = 기록을 확인 못 함. 둘 다 재고 수량 0과 구분</a:t>
+            </a:r>
+          </a:p>
+          <a:p>
+            <a:r>
+              <a:t>· 다섯 짝(계산의 주체, 지식과 값, 확인과 가설, 제안과 결정, 기록 없음과 실패)을 가르면 에이전트 결과를 어디까지 믿을지 판단한다</a:t>
+            </a:r>
+          </a:p>
+          <a:p>
+            <a:r>
+              <a:t>[다음] 오늘 다룬 핵심 개념과 주요 용어 정리</a:t>
+            </a:r>
+          </a:p>
+        </p:txBody>
+      </p:sp>
+      <p:sp>
+        <p:nvSpPr>
+          <p:cNvPr id="4" name="Slide Number Placeholder 3"/>
+          <p:cNvSpPr>
+            <a:spLocks noGrp="1"/>
+          </p:cNvSpPr>
+          <p:nvPr>
+            <p:ph type="sldNum" idx="5" sz="quarter"/>
+          </p:nvPr>
+        </p:nvSpPr>
+        <p:spPr/>
+      </p:sp>
+    </p:spTree>
+  </p:cSld>
+  <p:clrMapOvr>
+    <a:masterClrMapping/>
+  </p:clrMapOvr>
+</p:notes>
+</file>
+
+<file path=ppt/notesSlides/notesSlide29.xml><?xml version="1.0" encoding="utf-8"?>
+<p:notes xmlns:a="http://schemas.openxmlformats.org/drawingml/2006/main" xmlns:p="http://schemas.openxmlformats.org/presentationml/2006/main" xmlns:r="http://schemas.openxmlformats.org/officeDocument/2006/relationships">
+  <p:cSld>
+    <p:spTree>
+      <p:nvGrpSpPr>
+        <p:cNvPr id="1" name=""/>
+        <p:cNvGrpSpPr/>
+        <p:nvPr/>
+      </p:nvGrpSpPr>
+      <p:grpSpPr>
+        <a:xfrm>
+          <a:off x="0" y="0"/>
+          <a:ext cx="0" cy="0"/>
+          <a:chOff x="0" y="0"/>
+          <a:chExt cx="0" cy="0"/>
+        </a:xfrm>
+      </p:grpSpPr>
+      <p:sp>
+        <p:nvSpPr>
+          <p:cNvPr id="2" name="Slide Image Placeholder 1"/>
+          <p:cNvSpPr>
+            <a:spLocks noGrp="1"/>
+          </p:cNvSpPr>
+          <p:nvPr>
+            <p:ph type="sldImg" idx="2"/>
+          </p:nvPr>
+        </p:nvSpPr>
+        <p:spPr/>
+      </p:sp>
+      <p:sp>
+        <p:nvSpPr>
+          <p:cNvPr id="3" name="Notes Placeholder 2"/>
+          <p:cNvSpPr>
+            <a:spLocks noGrp="1"/>
+          </p:cNvSpPr>
+          <p:nvPr>
+            <p:ph type="body" idx="3" sz="quarter"/>
+          </p:nvPr>
+        </p:nvSpPr>
+        <p:spPr/>
+        <p:txBody>
+          <a:bodyPr/>
+          <a:lstStyle/>
+          <a:p>
+            <a:r>
+              <a:t>[짚을 곳] 표 일곱 줄 위에서부터, 정식 명칭은 화면에 맡기고 뜻만</a:t>
+            </a:r>
+          </a:p>
+          <a:p>
+            <a:r>
+              <a:t>· LLM = 입력과 학습한 내용으로 응답을 만드는 대규모 언어 모델. RAG = 검색한 자료를 답 생성의 근거로 제공하는 방식</a:t>
+            </a:r>
+          </a:p>
+          <a:p>
+            <a:r>
+              <a:t>· 에이전트 = 목표를 받고 도구 결과에 따라 다음 행동을 정하되 완료 · 멈춤 조건에서 끝내는 시스템. 도구 = 실제 조회 · 계산 · 제출을 수행하는 기능(모델이 이름과 입력을 적어 부름)</a:t>
+            </a:r>
+          </a:p>
+          <a:p>
+            <a:r>
+              <a:t>· 실행 고리 = 요청 해석 · 계획 · 호출 · 관찰을 되풀이하다 종료하는 틀. 신선도 = 관측된 값이 판단 시점에서 얼마나 오래됐나</a:t>
+            </a:r>
+          </a:p>
+          <a:p>
+            <a:r>
+              <a:t>· 근거의 상태 셋 = 지지 · 확인 못 함 · 지지 근거 없음</a:t>
+            </a:r>
+          </a:p>
+          <a:p>
+            <a:r>
+              <a:t>[다음] Review Quiz</a:t>
             </a:r>
           </a:p>
         </p:txBody>
@@ -2639,6 +2755,481 @@
 </p:notes>
 </file>
 
+<file path=ppt/notesSlides/notesSlide30.xml><?xml version="1.0" encoding="utf-8"?>
+<p:notes xmlns:a="http://schemas.openxmlformats.org/drawingml/2006/main" xmlns:p="http://schemas.openxmlformats.org/presentationml/2006/main" xmlns:r="http://schemas.openxmlformats.org/officeDocument/2006/relationships">
+  <p:cSld>
+    <p:spTree>
+      <p:nvGrpSpPr>
+        <p:cNvPr id="1" name=""/>
+        <p:cNvGrpSpPr/>
+        <p:nvPr/>
+      </p:nvGrpSpPr>
+      <p:grpSpPr>
+        <a:xfrm>
+          <a:off x="0" y="0"/>
+          <a:ext cx="0" cy="0"/>
+          <a:chOff x="0" y="0"/>
+          <a:chExt cx="0" cy="0"/>
+        </a:xfrm>
+      </p:grpSpPr>
+      <p:sp>
+        <p:nvSpPr>
+          <p:cNvPr id="2" name="Slide Image Placeholder 1"/>
+          <p:cNvSpPr>
+            <a:spLocks noGrp="1"/>
+          </p:cNvSpPr>
+          <p:nvPr>
+            <p:ph type="sldImg" idx="2"/>
+          </p:nvPr>
+        </p:nvSpPr>
+        <p:spPr/>
+      </p:sp>
+      <p:sp>
+        <p:nvSpPr>
+          <p:cNvPr id="3" name="Notes Placeholder 2"/>
+          <p:cNvSpPr>
+            <a:spLocks noGrp="1"/>
+          </p:cNvSpPr>
+          <p:nvPr>
+            <p:ph type="body" idx="3" sz="quarter"/>
+          </p:nvPr>
+        </p:nvSpPr>
+        <p:spPr/>
+        <p:txBody>
+          <a:bodyPr/>
+          <a:lstStyle/>
+          <a:p>
+            <a:r>
+              <a:t>[짚을 곳] 간지 제목 → 부제</a:t>
+            </a:r>
+          </a:p>
+          <a:p>
+            <a:r>
+              <a:t>· 정리한 이름과 뜻을 판단에 쓸 수 있는지 확인하는 자리</a:t>
+            </a:r>
+          </a:p>
+          <a:p>
+            <a:r>
+              <a:t>· 용어를 외웠는지보다 상황을 보고 에이전트가 무엇을 해야 하는지 고를 수 있는지</a:t>
+            </a:r>
+          </a:p>
+          <a:p>
+            <a:r>
+              <a:t>· 세 문제: 처리 기록의 한 장면, 읽지 못한 값과 묵은 값, 허용되지 않은 도구</a:t>
+            </a:r>
+          </a:p>
+          <a:p>
+            <a:r>
+              <a:t>· 문제마다 고를 시간 → 정답과 까닭은 세 문항을 다 푼 뒤</a:t>
+            </a:r>
+          </a:p>
+          <a:p>
+            <a:r>
+              <a:t>[다음] Quiz 1. 처리 기록의 한 장면</a:t>
+            </a:r>
+          </a:p>
+        </p:txBody>
+      </p:sp>
+      <p:sp>
+        <p:nvSpPr>
+          <p:cNvPr id="4" name="Slide Number Placeholder 3"/>
+          <p:cNvSpPr>
+            <a:spLocks noGrp="1"/>
+          </p:cNvSpPr>
+          <p:nvPr>
+            <p:ph type="sldNum" idx="5" sz="quarter"/>
+          </p:nvPr>
+        </p:nvSpPr>
+        <p:spPr/>
+      </p:sp>
+    </p:spTree>
+  </p:cSld>
+  <p:clrMapOvr>
+    <a:masterClrMapping/>
+  </p:clrMapOvr>
+</p:notes>
+</file>
+
+<file path=ppt/notesSlides/notesSlide31.xml><?xml version="1.0" encoding="utf-8"?>
+<p:notes xmlns:a="http://schemas.openxmlformats.org/drawingml/2006/main" xmlns:p="http://schemas.openxmlformats.org/presentationml/2006/main" xmlns:r="http://schemas.openxmlformats.org/officeDocument/2006/relationships">
+  <p:cSld>
+    <p:spTree>
+      <p:nvGrpSpPr>
+        <p:cNvPr id="1" name=""/>
+        <p:cNvGrpSpPr/>
+        <p:nvPr/>
+      </p:nvGrpSpPr>
+      <p:grpSpPr>
+        <a:xfrm>
+          <a:off x="0" y="0"/>
+          <a:ext cx="0" cy="0"/>
+          <a:chOff x="0" y="0"/>
+          <a:chExt cx="0" cy="0"/>
+        </a:xfrm>
+      </p:grpSpPr>
+      <p:sp>
+        <p:nvSpPr>
+          <p:cNvPr id="2" name="Slide Image Placeholder 1"/>
+          <p:cNvSpPr>
+            <a:spLocks noGrp="1"/>
+          </p:cNvSpPr>
+          <p:nvPr>
+            <p:ph type="sldImg" idx="2"/>
+          </p:nvPr>
+        </p:nvSpPr>
+        <p:spPr/>
+      </p:sp>
+      <p:sp>
+        <p:nvSpPr>
+          <p:cNvPr id="3" name="Notes Placeholder 2"/>
+          <p:cNvSpPr>
+            <a:spLocks noGrp="1"/>
+          </p:cNvSpPr>
+          <p:nvPr>
+            <p:ph type="body" idx="3" sz="quarter"/>
+          </p:nvPr>
+        </p:nvSpPr>
+        <p:spPr/>
+        <p:txBody>
+          <a:bodyPr/>
+          <a:lstStyle/>
+          <a:p>
+            <a:r>
+              <a:t>[짚을 곳] 위 장면(원인 진단 결과의 식별자를 넣어 대안 평가 호출) → 물음 → 보기 넷</a:t>
+            </a:r>
+          </a:p>
+          <a:p>
+            <a:r>
+              <a:t>· 보기 요지: ① 요청 해석 ② 결과 관찰에 이은 다음 호출 ③ 재시도 ④ 종료</a:t>
+            </a:r>
+          </a:p>
+          <a:p>
+            <a:r>
+              <a:t>· 생각할 거리: 두 호출의 도구가 같은가, 뒤 호출의 입력이 어디서 왔나</a:t>
+            </a:r>
+          </a:p>
+          <a:p>
+            <a:r>
+              <a:t>· 생각할 시간 약 20초</a:t>
+            </a:r>
+          </a:p>
+          <a:p>
+            <a:r>
+              <a:t>[다음] Quiz 2. 읽지 못한 값과 묵은 값</a:t>
+            </a:r>
+          </a:p>
+        </p:txBody>
+      </p:sp>
+      <p:sp>
+        <p:nvSpPr>
+          <p:cNvPr id="4" name="Slide Number Placeholder 3"/>
+          <p:cNvSpPr>
+            <a:spLocks noGrp="1"/>
+          </p:cNvSpPr>
+          <p:nvPr>
+            <p:ph type="sldNum" idx="5" sz="quarter"/>
+          </p:nvPr>
+        </p:nvSpPr>
+        <p:spPr/>
+      </p:sp>
+    </p:spTree>
+  </p:cSld>
+  <p:clrMapOvr>
+    <a:masterClrMapping/>
+  </p:clrMapOvr>
+</p:notes>
+</file>
+
+<file path=ppt/notesSlides/notesSlide32.xml><?xml version="1.0" encoding="utf-8"?>
+<p:notes xmlns:a="http://schemas.openxmlformats.org/drawingml/2006/main" xmlns:p="http://schemas.openxmlformats.org/presentationml/2006/main" xmlns:r="http://schemas.openxmlformats.org/officeDocument/2006/relationships">
+  <p:cSld>
+    <p:spTree>
+      <p:nvGrpSpPr>
+        <p:cNvPr id="1" name=""/>
+        <p:cNvGrpSpPr/>
+        <p:nvPr/>
+      </p:nvGrpSpPr>
+      <p:grpSpPr>
+        <a:xfrm>
+          <a:off x="0" y="0"/>
+          <a:ext cx="0" cy="0"/>
+          <a:chOff x="0" y="0"/>
+          <a:chExt cx="0" cy="0"/>
+        </a:xfrm>
+      </p:grpSpPr>
+      <p:sp>
+        <p:nvSpPr>
+          <p:cNvPr id="2" name="Slide Image Placeholder 1"/>
+          <p:cNvSpPr>
+            <a:spLocks noGrp="1"/>
+          </p:cNvSpPr>
+          <p:nvPr>
+            <p:ph type="sldImg" idx="2"/>
+          </p:nvPr>
+        </p:nvSpPr>
+        <p:spPr/>
+      </p:sp>
+      <p:sp>
+        <p:nvSpPr>
+          <p:cNvPr id="3" name="Notes Placeholder 2"/>
+          <p:cNvSpPr>
+            <a:spLocks noGrp="1"/>
+          </p:cNvSpPr>
+          <p:nvPr>
+            <p:ph type="body" idx="3" sz="quarter"/>
+          </p:nvPr>
+        </p:nvSpPr>
+        <p:spPr/>
+        <p:txBody>
+          <a:bodyPr/>
+          <a:lstStyle/>
+          <a:p>
+            <a:r>
+              <a:t>[짚을 곳] 위 상황(유온 최신 값이 3분 전, 냉각 효율 조회 실패) → 물음 → 보기 넷</a:t>
+            </a:r>
+          </a:p>
+          <a:p>
+            <a:r>
+              <a:t>· 보기 요지: ① 3분 전 유온과 기준 70 %로 핀 오염 제출 ② 냉각 효율을 0 %로 적고 유온을 가장 많이 내리는 조치 추천 ③ 후보인 핀 오염을 확인된 원인으로 ④ 원인을 적지 않고 확인 못 한 값과 이유를 담아 보류</a:t>
+            </a:r>
+          </a:p>
+          <a:p>
+            <a:r>
+              <a:t>· 생각할 거리: 보기마다 무엇을 무엇으로 바꿔 썼나</a:t>
+            </a:r>
+          </a:p>
+          <a:p>
+            <a:r>
+              <a:t>· 생각할 시간 약 20초</a:t>
+            </a:r>
+          </a:p>
+          <a:p>
+            <a:r>
+              <a:t>[다음] Quiz 3. 허용되지 않은 도구</a:t>
+            </a:r>
+          </a:p>
+        </p:txBody>
+      </p:sp>
+      <p:sp>
+        <p:nvSpPr>
+          <p:cNvPr id="4" name="Slide Number Placeholder 3"/>
+          <p:cNvSpPr>
+            <a:spLocks noGrp="1"/>
+          </p:cNvSpPr>
+          <p:nvPr>
+            <p:ph type="sldNum" idx="5" sz="quarter"/>
+          </p:nvPr>
+        </p:nvSpPr>
+        <p:spPr/>
+      </p:sp>
+    </p:spTree>
+  </p:cSld>
+  <p:clrMapOvr>
+    <a:masterClrMapping/>
+  </p:clrMapOvr>
+</p:notes>
+</file>
+
+<file path=ppt/notesSlides/notesSlide33.xml><?xml version="1.0" encoding="utf-8"?>
+<p:notes xmlns:a="http://schemas.openxmlformats.org/drawingml/2006/main" xmlns:p="http://schemas.openxmlformats.org/presentationml/2006/main" xmlns:r="http://schemas.openxmlformats.org/officeDocument/2006/relationships">
+  <p:cSld>
+    <p:spTree>
+      <p:nvGrpSpPr>
+        <p:cNvPr id="1" name=""/>
+        <p:cNvGrpSpPr/>
+        <p:nvPr/>
+      </p:nvGrpSpPr>
+      <p:grpSpPr>
+        <a:xfrm>
+          <a:off x="0" y="0"/>
+          <a:ext cx="0" cy="0"/>
+          <a:chOff x="0" y="0"/>
+          <a:chExt cx="0" cy="0"/>
+        </a:xfrm>
+      </p:grpSpPr>
+      <p:sp>
+        <p:nvSpPr>
+          <p:cNvPr id="2" name="Slide Image Placeholder 1"/>
+          <p:cNvSpPr>
+            <a:spLocks noGrp="1"/>
+          </p:cNvSpPr>
+          <p:nvPr>
+            <p:ph type="sldImg" idx="2"/>
+          </p:nvPr>
+        </p:nvSpPr>
+        <p:spPr/>
+      </p:sp>
+      <p:sp>
+        <p:nvSpPr>
+          <p:cNvPr id="3" name="Notes Placeholder 2"/>
+          <p:cNvSpPr>
+            <a:spLocks noGrp="1"/>
+          </p:cNvSpPr>
+          <p:nvPr>
+            <p:ph type="body" idx="3" sz="quarter"/>
+          </p:nvPr>
+        </p:nvSpPr>
+        <p:spPr/>
+        <p:txBody>
+          <a:bodyPr/>
+          <a:lstStyle/>
+          <a:p>
+            <a:r>
+              <a:t>[짚을 곳] 위 상황(허용 목록에 없는 도구가 필요, 유온은 계속 오름) → 물음 → 보기 넷</a:t>
+            </a:r>
+          </a:p>
+          <a:p>
+            <a:r>
+              <a:t>· 보기 요지: ① 허용된 도구를 조합해 같은 효과 ② 급하니 한 번만 실행하고 기록 ③ 실행하지 않고 사람에게 묻는다, 답을 받아도 권한은 그대로 ④ 사람에게 묻고 답을 받으면 그 도구를 직접 실행</a:t>
+            </a:r>
+          </a:p>
+          <a:p>
+            <a:r>
+              <a:t>· 생각할 거리: 상황의 급함과 사람의 답변이 권한을 바꾸나</a:t>
+            </a:r>
+          </a:p>
+          <a:p>
+            <a:r>
+              <a:t>· 생각할 시간 약 20초</a:t>
+            </a:r>
+          </a:p>
+          <a:p>
+            <a:r>
+              <a:t>[다음] 정답과 판단 기준</a:t>
+            </a:r>
+          </a:p>
+        </p:txBody>
+      </p:sp>
+      <p:sp>
+        <p:nvSpPr>
+          <p:cNvPr id="4" name="Slide Number Placeholder 3"/>
+          <p:cNvSpPr>
+            <a:spLocks noGrp="1"/>
+          </p:cNvSpPr>
+          <p:nvPr>
+            <p:ph type="sldNum" idx="5" sz="quarter"/>
+          </p:nvPr>
+        </p:nvSpPr>
+        <p:spPr/>
+      </p:sp>
+    </p:spTree>
+  </p:cSld>
+  <p:clrMapOvr>
+    <a:masterClrMapping/>
+  </p:clrMapOvr>
+</p:notes>
+</file>
+
+<file path=ppt/notesSlides/notesSlide34.xml><?xml version="1.0" encoding="utf-8"?>
+<p:notes xmlns:a="http://schemas.openxmlformats.org/drawingml/2006/main" xmlns:p="http://schemas.openxmlformats.org/presentationml/2006/main" xmlns:r="http://schemas.openxmlformats.org/officeDocument/2006/relationships">
+  <p:cSld>
+    <p:spTree>
+      <p:nvGrpSpPr>
+        <p:cNvPr id="1" name=""/>
+        <p:cNvGrpSpPr/>
+        <p:nvPr/>
+      </p:nvGrpSpPr>
+      <p:grpSpPr>
+        <a:xfrm>
+          <a:off x="0" y="0"/>
+          <a:ext cx="0" cy="0"/>
+          <a:chOff x="0" y="0"/>
+          <a:chExt cx="0" cy="0"/>
+        </a:xfrm>
+      </p:grpSpPr>
+      <p:sp>
+        <p:nvSpPr>
+          <p:cNvPr id="2" name="Slide Image Placeholder 1"/>
+          <p:cNvSpPr>
+            <a:spLocks noGrp="1"/>
+          </p:cNvSpPr>
+          <p:nvPr>
+            <p:ph type="sldImg" idx="2"/>
+          </p:nvPr>
+        </p:nvSpPr>
+        <p:spPr/>
+      </p:sp>
+      <p:sp>
+        <p:nvSpPr>
+          <p:cNvPr id="3" name="Notes Placeholder 2"/>
+          <p:cNvSpPr>
+            <a:spLocks noGrp="1"/>
+          </p:cNvSpPr>
+          <p:nvPr>
+            <p:ph type="body" idx="3" sz="quarter"/>
+          </p:nvPr>
+        </p:nvSpPr>
+        <p:spPr/>
+        <p:txBody>
+          <a:bodyPr/>
+          <a:lstStyle/>
+          <a:p>
+            <a:r>
+              <a:t>[짚을 곳] 표 세 줄: 문항 → 판단 기준 → 정답</a:t>
+            </a:r>
+          </a:p>
+          <a:p>
+            <a:r>
+              <a:t>· Q1 정답 2: 서로 다른 두 도구를 이어 불렀고 앞 결과가 뒤 입력이 됨 = 관찰이 다음 행동을 정한 장면. 3 재시도와 헷갈림 주의 — 재시도는 뜻대로 안 된 일을 방법을 바꿔 다시 하는 것, 여기선 앞 호출이 제대로 끝났다</a:t>
+            </a:r>
+          </a:p>
+          <a:p>
+            <a:r>
+              <a:t>· Q2 정답 4: 묵은 값과 실패한 조회로는 근거가 확인되지 않는다. 1은 3분 전 값을 지금처럼, 기준 70을 측정값처럼 씀. 2는 실패를 0으로, 3은 후보를 확인된 원인으로 바꿈 — 모양은 그럴듯하지만 근거 없는 자리를 채웠다</a:t>
+            </a:r>
+          </a:p>
+          <a:p>
+            <a:r>
+              <a:t>· Q3 정답 3: 허용 목록 밖 도구는 실행되지 않고 질문으로 올라간다. 1은 허용 도구로 막힌 일을 돌아가기, 2는 급하다는 이유로 권한을 넘기, 4는 그럴듯하지만 답변이 권한을 바꾸지 않는다</a:t>
+            </a:r>
+          </a:p>
+          <a:p>
+            <a:r>
+              <a:t>· 회차 정리: 추천안이라는 결과 뒤에 역할이 나뉜다 — 모델은 다음 행동을 정하고, 도구는 실제 값을 읽고 계산하며, 사람은 근거와 권한의 경계를 확인 → 다른 업무에 적용할 때 무엇을 맡기고 무엇을 확인할지의 기준</a:t>
+            </a:r>
+          </a:p>
+          <a:p>
+            <a:r>
+              <a:t>· 이어지는 실습: 설비 · 센서 · 고장 · SOP 관계와 센서 입력을 읽어 원인 후보 · 증거 · 점검 순서를 내는 에이전트를 만들고, 같은 구조로 품질 접수를 유형 · 추가 확인 · 담당 부서 · 대응 초안으로 옮긴다. 확인 안 된 원인은 가설로, 빠진 정보는 조사 요청으로 남긴다</a:t>
+            </a:r>
+          </a:p>
+          <a:p>
+            <a:r>
+              <a:t>· 센서 CSV의 온도 · 압력 변화를 그려 이상 구간을 관련 태그 · 조회 기간과 함께 요약하고, 세 결과에서 근거와 미확인이 갈리는지 검증한다 — 진행은 핸즈온 가이드</a:t>
+            </a:r>
+          </a:p>
+          <a:p>
+            <a:r>
+              <a:t>· 다음 회차: 반복 작업의 지침을 스킬로 만들고 파일 · Git · 시간 도구를 조합한다</a:t>
+            </a:r>
+          </a:p>
+          <a:p>
+            <a:r>
+              <a:t>[다음] 실습으로</a:t>
+            </a:r>
+          </a:p>
+        </p:txBody>
+      </p:sp>
+      <p:sp>
+        <p:nvSpPr>
+          <p:cNvPr id="4" name="Slide Number Placeholder 3"/>
+          <p:cNvSpPr>
+            <a:spLocks noGrp="1"/>
+          </p:cNvSpPr>
+          <p:nvPr>
+            <p:ph type="sldNum" idx="5" sz="quarter"/>
+          </p:nvPr>
+        </p:nvSpPr>
+        <p:spPr/>
+      </p:sp>
+    </p:spTree>
+  </p:cSld>
+  <p:clrMapOvr>
+    <a:masterClrMapping/>
+  </p:clrMapOvr>
+</p:notes>
+</file>
+
 <file path=ppt/notesSlides/notesSlide4.xml><?xml version="1.0" encoding="utf-8"?>
 <p:notes xmlns:a="http://schemas.openxmlformats.org/drawingml/2006/main" xmlns:p="http://schemas.openxmlformats.org/presentationml/2006/main" xmlns:r="http://schemas.openxmlformats.org/officeDocument/2006/relationships">
   <p:cSld>
@@ -3109,7 +3700,7 @@
           </a:p>
           <a:p>
             <a:r>
-              <a:t>· 업무 지침 = 어떤 순서로 일할지 적어 둔 것, 에이전트 스킬이라는 파일로 준다(모양은 다음 회차에)</a:t>
+              <a:t>· 업무 지침 = 어떤 순서로 일할지 적어 둔 것, 에이전트 스킬이라는 파일로 준다</a:t>
             </a:r>
           </a:p>
           <a:p>
@@ -7137,7 +7728,7 @@
       </p:sp>
       <p:pic>
         <p:nvPicPr>
-          <p:cNvPr id="6" name="삽화:실행고리.svg" descr="illust_5462182364650228371_1793113376.png"/>
+          <p:cNvPr id="6" name="삽화:실행고리.svg" descr="illust_7369547211007203233_1793113376.png"/>
           <p:cNvPicPr>
             <a:picLocks noChangeAspect="1"/>
           </p:cNvPicPr>
@@ -13868,7 +14459,7 @@
       </p:sp>
       <p:pic>
         <p:nvPicPr>
-          <p:cNvPr id="6" name="삽화:신선도.svg" descr="illust_311691370201162502_1793113376.png"/>
+          <p:cNvPr id="6" name="삽화:신선도.svg" descr="illust_7839386777667890644_1793113376.png"/>
           <p:cNvPicPr>
             <a:picLocks noChangeAspect="1"/>
           </p:cNvPicPr>
@@ -16546,7 +17137,7 @@
       </p:sp>
       <p:pic>
         <p:nvPicPr>
-          <p:cNvPr id="6" name="삽화:멈춤조건.svg" descr="illust_457820399975135422_1793113376.png"/>
+          <p:cNvPr id="6" name="삽화:멈춤조건.svg" descr="illust_7088954896353082859_1793113376.png"/>
           <p:cNvPicPr>
             <a:picLocks noChangeAspect="1"/>
           </p:cNvPicPr>
@@ -21439,7 +22030,7 @@
                 <a:ea typeface="맑은 고딕"/>
                 <a:cs typeface="맑은 고딕"/>
               </a:rPr>
-              <a:t>오늘의 실습과 남길 결과</a:t>
+              <a:t>쿨러 사건의 94초를 다시 읽기</a:t>
             </a:r>
           </a:p>
         </p:txBody>
@@ -21478,7 +22069,7 @@
                 <a:ea typeface="맑은 고딕"/>
                 <a:cs typeface="맑은 고딕"/>
               </a:rPr>
-              <a:t>이론 뒤 세 교시는 원인 · 점검 에이전트를 만들고, 그 구조를 품질 접수에 옮긴 뒤, 시각화와 결과를 검증한다.</a:t>
+              <a:t>쿨러 사건의 장면마다 누가 무엇을 했고 어떤 근거를 썼는지 가르면, 일하는 에이전트의 원리가 한 번에 드러난다.</a:t>
             </a:r>
           </a:p>
         </p:txBody>
@@ -21559,7 +22150,7 @@
         </p:nvSpPr>
         <p:spPr>
           <a:xfrm>
-            <a:off x="548640" y="2418587"/>
+            <a:off x="548640" y="1627632"/>
             <a:ext cx="11094415" cy="347472"/>
           </a:xfrm>
           <a:prstGeom prst="roundRect">
@@ -21590,7 +22181,7 @@
         </p:nvSpPr>
         <p:spPr>
           <a:xfrm>
-            <a:off x="685800" y="2418587"/>
+            <a:off x="685800" y="1627632"/>
             <a:ext cx="2514600" cy="347472"/>
           </a:xfrm>
           <a:prstGeom prst="rect">
@@ -21616,7 +22207,7 @@
                 <a:ea typeface="맑은 고딕"/>
                 <a:cs typeface="맑은 고딕"/>
               </a:rPr>
-              <a:t>교시</a:t>
+              <a:t>장면</a:t>
             </a:r>
           </a:p>
         </p:txBody>
@@ -21629,7 +22220,7 @@
         </p:nvSpPr>
         <p:spPr>
           <a:xfrm>
-            <a:off x="3200400" y="2418587"/>
+            <a:off x="3200400" y="1627632"/>
             <a:ext cx="6248095" cy="347472"/>
           </a:xfrm>
           <a:prstGeom prst="rect">
@@ -21655,7 +22246,7 @@
                 <a:ea typeface="맑은 고딕"/>
                 <a:cs typeface="맑은 고딕"/>
               </a:rPr>
-              <a:t>실습</a:t>
+              <a:t>가를 것</a:t>
             </a:r>
           </a:p>
         </p:txBody>
@@ -21668,7 +22259,7 @@
         </p:nvSpPr>
         <p:spPr>
           <a:xfrm>
-            <a:off x="9448495" y="2418587"/>
+            <a:off x="9448495" y="1627632"/>
             <a:ext cx="2194560" cy="347472"/>
           </a:xfrm>
           <a:prstGeom prst="rect">
@@ -21694,7 +22285,7 @@
                 <a:ea typeface="맑은 고딕"/>
                 <a:cs typeface="맑은 고딕"/>
               </a:rPr>
-              <a:t>남길 결과</a:t>
+              <a:t>판단의 근거</a:t>
             </a:r>
           </a:p>
         </p:txBody>
@@ -21707,8 +22298,8 @@
         </p:nvSpPr>
         <p:spPr>
           <a:xfrm>
-            <a:off x="548640" y="2852927"/>
-            <a:ext cx="11094415" cy="850392"/>
+            <a:off x="548640" y="2061972"/>
+            <a:ext cx="11094415" cy="801014"/>
           </a:xfrm>
           <a:prstGeom prst="roundRect">
             <a:avLst>
@@ -21738,8 +22329,8 @@
         </p:nvSpPr>
         <p:spPr>
           <a:xfrm>
-            <a:off x="685800" y="2820923"/>
-            <a:ext cx="2514600" cy="914400"/>
+            <a:off x="685800" y="2029968"/>
+            <a:ext cx="2514600" cy="865022"/>
           </a:xfrm>
           <a:prstGeom prst="rect">
             <a:avLst/>
@@ -21764,7 +22355,7 @@
                 <a:ea typeface="맑은 고딕"/>
                 <a:cs typeface="맑은 고딕"/>
               </a:rPr>
-              <a:t>2교시</a:t>
+              <a:t>대안 평가가 네 후보의 점수를 냈다</a:t>
             </a:r>
           </a:p>
         </p:txBody>
@@ -21777,8 +22368,8 @@
         </p:nvSpPr>
         <p:spPr>
           <a:xfrm>
-            <a:off x="3200400" y="2820923"/>
-            <a:ext cx="6156655" cy="914400"/>
+            <a:off x="3200400" y="2029968"/>
+            <a:ext cx="6156655" cy="865022"/>
           </a:xfrm>
           <a:prstGeom prst="rect">
             <a:avLst/>
@@ -21803,7 +22394,25 @@
                 <a:ea typeface="맑은 고딕"/>
                 <a:cs typeface="맑은 고딕"/>
               </a:rPr>
-              <a:t>설비 원인과 점검 순서 에이전트 만들기</a:t>
+              <a:t>모델이 계산했나,</a:t>
+            </a:r>
+          </a:p>
+          <a:p>
+            <a:pPr algn="l" eaLnBrk="0">
+              <a:lnSpc>
+                <a:spcPct val="110000"/>
+              </a:lnSpc>
+            </a:pPr>
+            <a:r>
+              <a:rPr sz="1400" b="0">
+                <a:solidFill>
+                  <a:srgbClr val="1F2A3A"/>
+                </a:solidFill>
+                <a:latin typeface="맑은 고딕"/>
+                <a:ea typeface="맑은 고딕"/>
+                <a:cs typeface="맑은 고딕"/>
+              </a:rPr>
+              <a:t>도구가 계산했나</a:t>
             </a:r>
           </a:p>
         </p:txBody>
@@ -21816,8 +22425,8 @@
         </p:nvSpPr>
         <p:spPr>
           <a:xfrm>
-            <a:off x="9448495" y="2820923"/>
-            <a:ext cx="2103120" cy="914400"/>
+            <a:off x="9448495" y="2029968"/>
+            <a:ext cx="2103120" cy="865022"/>
           </a:xfrm>
           <a:prstGeom prst="rect">
             <a:avLst/>
@@ -21842,7 +22451,7 @@
                 <a:ea typeface="맑은 고딕"/>
                 <a:cs typeface="맑은 고딕"/>
               </a:rPr>
-              <a:t>원인 후보 · 증거 · 점검 순서,</a:t>
+              <a:t>모델은 이름과 입력을 적고</a:t>
             </a:r>
           </a:p>
           <a:p>
@@ -21860,7 +22469,7 @@
                 <a:ea typeface="맑은 고딕"/>
                 <a:cs typeface="맑은 고딕"/>
               </a:rPr>
-              <a:t>가설 표시</a:t>
+              <a:t>계산은 판단 도구가 한다</a:t>
             </a:r>
           </a:p>
         </p:txBody>
@@ -21873,8 +22482,8 @@
         </p:nvSpPr>
         <p:spPr>
           <a:xfrm>
-            <a:off x="548640" y="3767327"/>
-            <a:ext cx="11094415" cy="850392"/>
+            <a:off x="548640" y="2926994"/>
+            <a:ext cx="11094415" cy="801014"/>
           </a:xfrm>
           <a:prstGeom prst="roundRect">
             <a:avLst>
@@ -21904,8 +22513,8 @@
         </p:nvSpPr>
         <p:spPr>
           <a:xfrm>
-            <a:off x="685800" y="3735323"/>
-            <a:ext cx="2514600" cy="914400"/>
+            <a:off x="685800" y="2894990"/>
+            <a:ext cx="2514600" cy="865022"/>
           </a:xfrm>
           <a:prstGeom prst="rect">
             <a:avLst/>
@@ -21930,7 +22539,7 @@
                 <a:ea typeface="맑은 고딕"/>
                 <a:cs typeface="맑은 고딕"/>
               </a:rPr>
-              <a:t>3교시</a:t>
+              <a:t>냉각 효율 70 %와 46.2 %</a:t>
             </a:r>
           </a:p>
         </p:txBody>
@@ -21943,8 +22552,8 @@
         </p:nvSpPr>
         <p:spPr>
           <a:xfrm>
-            <a:off x="3200400" y="3735323"/>
-            <a:ext cx="6156655" cy="914400"/>
+            <a:off x="3200400" y="2894990"/>
+            <a:ext cx="6156655" cy="865022"/>
           </a:xfrm>
           <a:prstGeom prst="rect">
             <a:avLst/>
@@ -21969,7 +22578,7 @@
                 <a:ea typeface="맑은 고딕"/>
                 <a:cs typeface="맑은 고딕"/>
               </a:rPr>
-              <a:t>품질 접수 후속 업무 에이전트 만들기</a:t>
+              <a:t>둘 다 지금의 값인가</a:t>
             </a:r>
           </a:p>
         </p:txBody>
@@ -21982,8 +22591,8 @@
         </p:nvSpPr>
         <p:spPr>
           <a:xfrm>
-            <a:off x="9448495" y="3735323"/>
-            <a:ext cx="2103120" cy="914400"/>
+            <a:off x="9448495" y="2894990"/>
+            <a:ext cx="2103120" cy="865022"/>
           </a:xfrm>
           <a:prstGeom prst="rect">
             <a:avLst/>
@@ -22008,7 +22617,7 @@
                 <a:ea typeface="맑은 고딕"/>
                 <a:cs typeface="맑은 고딕"/>
               </a:rPr>
-              <a:t>품질 대응 카드와 근거,</a:t>
+              <a:t>70은 지식의 기준,</a:t>
             </a:r>
           </a:p>
           <a:p>
@@ -22026,7 +22635,7 @@
                 <a:ea typeface="맑은 고딕"/>
                 <a:cs typeface="맑은 고딕"/>
               </a:rPr>
-              <a:t>조사 요청</a:t>
+              <a:t>46.2는 그때 읽은 값</a:t>
             </a:r>
           </a:p>
         </p:txBody>
@@ -22039,8 +22648,174 @@
         </p:nvSpPr>
         <p:spPr>
           <a:xfrm>
-            <a:off x="548640" y="4681727"/>
-            <a:ext cx="11094415" cy="850392"/>
+            <a:off x="548640" y="3792016"/>
+            <a:ext cx="11094415" cy="801014"/>
+          </a:xfrm>
+          <a:prstGeom prst="roundRect">
+            <a:avLst>
+              <a:gd name="adj" fmla="val 8000"/>
+            </a:avLst>
+          </a:prstGeom>
+          <a:solidFill>
+            <a:srgbClr val="F3F6F9"/>
+          </a:solidFill>
+          <a:ln>
+            <a:noFill/>
+          </a:ln>
+        </p:spPr>
+        <p:txBody>
+          <a:bodyPr rtlCol="0" anchor="ctr"/>
+          <a:lstStyle/>
+          <a:p>
+            <a:pPr algn="ctr"/>
+          </a:p>
+        </p:txBody>
+      </p:sp>
+      <p:sp>
+        <p:nvSpPr>
+          <p:cNvPr id="19" name="TextBox 18"/>
+          <p:cNvSpPr txBox="1"/>
+          <p:nvPr/>
+        </p:nvSpPr>
+        <p:spPr>
+          <a:xfrm>
+            <a:off x="685800" y="3760012"/>
+            <a:ext cx="2514600" cy="865022"/>
+          </a:xfrm>
+          <a:prstGeom prst="rect">
+            <a:avLst/>
+          </a:prstGeom>
+          <a:noFill/>
+        </p:spPr>
+        <p:txBody>
+          <a:bodyPr wrap="square" anchor="ctr"/>
+          <a:lstStyle/>
+          <a:p>
+            <a:pPr algn="l" eaLnBrk="0">
+              <a:lnSpc>
+                <a:spcPct val="110000"/>
+              </a:lnSpc>
+            </a:pPr>
+            <a:r>
+              <a:rPr sz="1600" b="1">
+                <a:solidFill>
+                  <a:srgbClr val="13294B"/>
+                </a:solidFill>
+                <a:latin typeface="맑은 고딕"/>
+                <a:ea typeface="맑은 고딕"/>
+                <a:cs typeface="맑은 고딕"/>
+              </a:rPr>
+              <a:t>쿨러 핀 오염 · 팬 구동 불량</a:t>
+            </a:r>
+          </a:p>
+        </p:txBody>
+      </p:sp>
+      <p:sp>
+        <p:nvSpPr>
+          <p:cNvPr id="20" name="TextBox 19"/>
+          <p:cNvSpPr txBox="1"/>
+          <p:nvPr/>
+        </p:nvSpPr>
+        <p:spPr>
+          <a:xfrm>
+            <a:off x="3200400" y="3760012"/>
+            <a:ext cx="6156655" cy="865022"/>
+          </a:xfrm>
+          <a:prstGeom prst="rect">
+            <a:avLst/>
+          </a:prstGeom>
+          <a:noFill/>
+        </p:spPr>
+        <p:txBody>
+          <a:bodyPr wrap="square" anchor="ctr"/>
+          <a:lstStyle/>
+          <a:p>
+            <a:pPr algn="l" eaLnBrk="0">
+              <a:lnSpc>
+                <a:spcPct val="110000"/>
+              </a:lnSpc>
+            </a:pPr>
+            <a:r>
+              <a:rPr sz="1400" b="0">
+                <a:solidFill>
+                  <a:srgbClr val="1F2A3A"/>
+                </a:solidFill>
+                <a:latin typeface="맑은 고딕"/>
+                <a:ea typeface="맑은 고딕"/>
+                <a:cs typeface="맑은 고딕"/>
+              </a:rPr>
+              <a:t>둘 다 기준이 지지하는가</a:t>
+            </a:r>
+          </a:p>
+        </p:txBody>
+      </p:sp>
+      <p:sp>
+        <p:nvSpPr>
+          <p:cNvPr id="21" name="TextBox 20"/>
+          <p:cNvSpPr txBox="1"/>
+          <p:nvPr/>
+        </p:nvSpPr>
+        <p:spPr>
+          <a:xfrm>
+            <a:off x="9448495" y="3760012"/>
+            <a:ext cx="2103120" cy="865022"/>
+          </a:xfrm>
+          <a:prstGeom prst="rect">
+            <a:avLst/>
+          </a:prstGeom>
+          <a:noFill/>
+        </p:spPr>
+        <p:txBody>
+          <a:bodyPr wrap="square" anchor="ctr"/>
+          <a:lstStyle/>
+          <a:p>
+            <a:pPr algn="l" eaLnBrk="0">
+              <a:lnSpc>
+                <a:spcPct val="110000"/>
+              </a:lnSpc>
+            </a:pPr>
+            <a:r>
+              <a:rPr sz="1250" b="1">
+                <a:solidFill>
+                  <a:srgbClr val="556175"/>
+                </a:solidFill>
+                <a:latin typeface="맑은 고딕"/>
+                <a:ea typeface="맑은 고딕"/>
+                <a:cs typeface="맑은 고딕"/>
+              </a:rPr>
+              <a:t>등록 기준에서 핀 오염은 지지,</a:t>
+            </a:r>
+          </a:p>
+          <a:p>
+            <a:pPr algn="l" eaLnBrk="0">
+              <a:lnSpc>
+                <a:spcPct val="110000"/>
+              </a:lnSpc>
+            </a:pPr>
+            <a:r>
+              <a:rPr sz="1250" b="1">
+                <a:solidFill>
+                  <a:srgbClr val="556175"/>
+                </a:solidFill>
+                <a:latin typeface="맑은 고딕"/>
+                <a:ea typeface="맑은 고딕"/>
+                <a:cs typeface="맑은 고딕"/>
+              </a:rPr>
+              <a:t>팬 구동 불량은 불일치</a:t>
+            </a:r>
+          </a:p>
+        </p:txBody>
+      </p:sp>
+      <p:sp>
+        <p:nvSpPr>
+          <p:cNvPr id="22" name="Rounded Rectangle 21"/>
+          <p:cNvSpPr/>
+          <p:nvPr/>
+        </p:nvSpPr>
+        <p:spPr>
+          <a:xfrm>
+            <a:off x="548640" y="4657039"/>
+            <a:ext cx="11094415" cy="801014"/>
           </a:xfrm>
           <a:prstGeom prst="roundRect">
             <a:avLst>
@@ -22064,14 +22839,1008 @@
       </p:sp>
       <p:sp>
         <p:nvSpPr>
+          <p:cNvPr id="23" name="TextBox 22"/>
+          <p:cNvSpPr txBox="1"/>
+          <p:nvPr/>
+        </p:nvSpPr>
+        <p:spPr>
+          <a:xfrm>
+            <a:off x="685800" y="4625035"/>
+            <a:ext cx="2514600" cy="865022"/>
+          </a:xfrm>
+          <a:prstGeom prst="rect">
+            <a:avLst/>
+          </a:prstGeom>
+          <a:noFill/>
+        </p:spPr>
+        <p:txBody>
+          <a:bodyPr wrap="square" anchor="ctr"/>
+          <a:lstStyle/>
+          <a:p>
+            <a:pPr algn="l" eaLnBrk="0">
+              <a:lnSpc>
+                <a:spcPct val="110000"/>
+              </a:lnSpc>
+            </a:pPr>
+            <a:r>
+              <a:rPr sz="1600" b="1">
+                <a:solidFill>
+                  <a:srgbClr val="13294B"/>
+                </a:solidFill>
+                <a:latin typeface="맑은 고딕"/>
+                <a:ea typeface="맑은 고딕"/>
+                <a:cs typeface="맑은 고딕"/>
+              </a:rPr>
+              <a:t>추천안 제출과 승인</a:t>
+            </a:r>
+          </a:p>
+        </p:txBody>
+      </p:sp>
+      <p:sp>
+        <p:nvSpPr>
+          <p:cNvPr id="24" name="TextBox 23"/>
+          <p:cNvSpPr txBox="1"/>
+          <p:nvPr/>
+        </p:nvSpPr>
+        <p:spPr>
+          <a:xfrm>
+            <a:off x="3200400" y="4625035"/>
+            <a:ext cx="6156655" cy="865022"/>
+          </a:xfrm>
+          <a:prstGeom prst="rect">
+            <a:avLst/>
+          </a:prstGeom>
+          <a:noFill/>
+        </p:spPr>
+        <p:txBody>
+          <a:bodyPr wrap="square" anchor="ctr"/>
+          <a:lstStyle/>
+          <a:p>
+            <a:pPr algn="l" eaLnBrk="0">
+              <a:lnSpc>
+                <a:spcPct val="110000"/>
+              </a:lnSpc>
+            </a:pPr>
+            <a:r>
+              <a:rPr sz="1400" b="0">
+                <a:solidFill>
+                  <a:srgbClr val="1F2A3A"/>
+                </a:solidFill>
+                <a:latin typeface="맑은 고딕"/>
+                <a:ea typeface="맑은 고딕"/>
+                <a:cs typeface="맑은 고딕"/>
+              </a:rPr>
+              <a:t>둘 다 에이전트가 했나</a:t>
+            </a:r>
+          </a:p>
+        </p:txBody>
+      </p:sp>
+      <p:sp>
+        <p:nvSpPr>
+          <p:cNvPr id="25" name="TextBox 24"/>
+          <p:cNvSpPr txBox="1"/>
+          <p:nvPr/>
+        </p:nvSpPr>
+        <p:spPr>
+          <a:xfrm>
+            <a:off x="9448495" y="4625035"/>
+            <a:ext cx="2103120" cy="865022"/>
+          </a:xfrm>
+          <a:prstGeom prst="rect">
+            <a:avLst/>
+          </a:prstGeom>
+          <a:noFill/>
+        </p:spPr>
+        <p:txBody>
+          <a:bodyPr wrap="square" anchor="ctr"/>
+          <a:lstStyle/>
+          <a:p>
+            <a:pPr algn="l" eaLnBrk="0">
+              <a:lnSpc>
+                <a:spcPct val="110000"/>
+              </a:lnSpc>
+            </a:pPr>
+            <a:r>
+              <a:rPr sz="1250" b="1">
+                <a:solidFill>
+                  <a:srgbClr val="1A6FC4"/>
+                </a:solidFill>
+                <a:latin typeface="맑은 고딕"/>
+                <a:ea typeface="맑은 고딕"/>
+                <a:cs typeface="맑은 고딕"/>
+              </a:rPr>
+              <a:t>에이전트는 제출까지,</a:t>
+            </a:r>
+          </a:p>
+          <a:p>
+            <a:pPr algn="l" eaLnBrk="0">
+              <a:lnSpc>
+                <a:spcPct val="110000"/>
+              </a:lnSpc>
+            </a:pPr>
+            <a:r>
+              <a:rPr sz="1250" b="1">
+                <a:solidFill>
+                  <a:srgbClr val="1A6FC4"/>
+                </a:solidFill>
+                <a:latin typeface="맑은 고딕"/>
+                <a:ea typeface="맑은 고딕"/>
+                <a:cs typeface="맑은 고딕"/>
+              </a:rPr>
+              <a:t>승인은 운전원</a:t>
+            </a:r>
+          </a:p>
+        </p:txBody>
+      </p:sp>
+      <p:sp>
+        <p:nvSpPr>
+          <p:cNvPr id="26" name="Rounded Rectangle 25"/>
+          <p:cNvSpPr/>
+          <p:nvPr/>
+        </p:nvSpPr>
+        <p:spPr>
+          <a:xfrm>
+            <a:off x="548640" y="5522061"/>
+            <a:ext cx="11094415" cy="801014"/>
+          </a:xfrm>
+          <a:prstGeom prst="roundRect">
+            <a:avLst>
+              <a:gd name="adj" fmla="val 8000"/>
+            </a:avLst>
+          </a:prstGeom>
+          <a:solidFill>
+            <a:srgbClr val="F3F6F9"/>
+          </a:solidFill>
+          <a:ln>
+            <a:noFill/>
+          </a:ln>
+        </p:spPr>
+        <p:txBody>
+          <a:bodyPr rtlCol="0" anchor="ctr"/>
+          <a:lstStyle/>
+          <a:p>
+            <a:pPr algn="ctr"/>
+          </a:p>
+        </p:txBody>
+      </p:sp>
+      <p:sp>
+        <p:nvSpPr>
+          <p:cNvPr id="27" name="TextBox 26"/>
+          <p:cNvSpPr txBox="1"/>
+          <p:nvPr/>
+        </p:nvSpPr>
+        <p:spPr>
+          <a:xfrm>
+            <a:off x="685800" y="5490057"/>
+            <a:ext cx="2514600" cy="865022"/>
+          </a:xfrm>
+          <a:prstGeom prst="rect">
+            <a:avLst/>
+          </a:prstGeom>
+          <a:noFill/>
+        </p:spPr>
+        <p:txBody>
+          <a:bodyPr wrap="square" anchor="ctr"/>
+          <a:lstStyle/>
+          <a:p>
+            <a:pPr algn="l" eaLnBrk="0">
+              <a:lnSpc>
+                <a:spcPct val="110000"/>
+              </a:lnSpc>
+            </a:pPr>
+            <a:r>
+              <a:rPr sz="1550" b="1">
+                <a:solidFill>
+                  <a:srgbClr val="13294B"/>
+                </a:solidFill>
+                <a:latin typeface="맑은 고딕"/>
+                <a:ea typeface="맑은 고딕"/>
+                <a:cs typeface="맑은 고딕"/>
+              </a:rPr>
+              <a:t>재고 조회 0행과 조회 실패</a:t>
+            </a:r>
+          </a:p>
+        </p:txBody>
+      </p:sp>
+      <p:sp>
+        <p:nvSpPr>
+          <p:cNvPr id="28" name="TextBox 27"/>
+          <p:cNvSpPr txBox="1"/>
+          <p:nvPr/>
+        </p:nvSpPr>
+        <p:spPr>
+          <a:xfrm>
+            <a:off x="3200400" y="5490057"/>
+            <a:ext cx="6156655" cy="865022"/>
+          </a:xfrm>
+          <a:prstGeom prst="rect">
+            <a:avLst/>
+          </a:prstGeom>
+          <a:noFill/>
+        </p:spPr>
+        <p:txBody>
+          <a:bodyPr wrap="square" anchor="ctr"/>
+          <a:lstStyle/>
+          <a:p>
+            <a:pPr algn="l" eaLnBrk="0">
+              <a:lnSpc>
+                <a:spcPct val="110000"/>
+              </a:lnSpc>
+            </a:pPr>
+            <a:r>
+              <a:rPr sz="1400" b="0">
+                <a:solidFill>
+                  <a:srgbClr val="1F2A3A"/>
+                </a:solidFill>
+                <a:latin typeface="맑은 고딕"/>
+                <a:ea typeface="맑은 고딕"/>
+                <a:cs typeface="맑은 고딕"/>
+              </a:rPr>
+              <a:t>같은 뜻인가</a:t>
+            </a:r>
+          </a:p>
+        </p:txBody>
+      </p:sp>
+      <p:sp>
+        <p:nvSpPr>
+          <p:cNvPr id="29" name="TextBox 28"/>
+          <p:cNvSpPr txBox="1"/>
+          <p:nvPr/>
+        </p:nvSpPr>
+        <p:spPr>
+          <a:xfrm>
+            <a:off x="9448495" y="5490057"/>
+            <a:ext cx="2103120" cy="865022"/>
+          </a:xfrm>
+          <a:prstGeom prst="rect">
+            <a:avLst/>
+          </a:prstGeom>
+          <a:noFill/>
+        </p:spPr>
+        <p:txBody>
+          <a:bodyPr wrap="square" anchor="ctr"/>
+          <a:lstStyle/>
+          <a:p>
+            <a:pPr algn="l" eaLnBrk="0">
+              <a:lnSpc>
+                <a:spcPct val="110000"/>
+              </a:lnSpc>
+            </a:pPr>
+            <a:r>
+              <a:rPr sz="1250" b="1">
+                <a:solidFill>
+                  <a:srgbClr val="556175"/>
+                </a:solidFill>
+                <a:latin typeface="맑은 고딕"/>
+                <a:ea typeface="맑은 고딕"/>
+                <a:cs typeface="맑은 고딕"/>
+              </a:rPr>
+              <a:t>0행은 일치 기록 없음,</a:t>
+            </a:r>
+          </a:p>
+          <a:p>
+            <a:pPr algn="l" eaLnBrk="0">
+              <a:lnSpc>
+                <a:spcPct val="110000"/>
+              </a:lnSpc>
+            </a:pPr>
+            <a:r>
+              <a:rPr sz="1250" b="1">
+                <a:solidFill>
+                  <a:srgbClr val="556175"/>
+                </a:solidFill>
+                <a:latin typeface="맑은 고딕"/>
+                <a:ea typeface="맑은 고딕"/>
+                <a:cs typeface="맑은 고딕"/>
+              </a:rPr>
+              <a:t>실패는 조회 불가</a:t>
+            </a:r>
+          </a:p>
+        </p:txBody>
+      </p:sp>
+    </p:spTree>
+  </p:cSld>
+  <p:clrMapOvr>
+    <a:masterClrMapping/>
+  </p:clrMapOvr>
+</p:sld>
+</file>
+
+<file path=ppt/slides/slide29.xml><?xml version="1.0" encoding="utf-8"?>
+<p:sld xmlns:a="http://schemas.openxmlformats.org/drawingml/2006/main" xmlns:p="http://schemas.openxmlformats.org/presentationml/2006/main" xmlns:r="http://schemas.openxmlformats.org/officeDocument/2006/relationships">
+  <p:cSld>
+    <p:bg>
+      <p:bgPr>
+        <a:solidFill>
+          <a:srgbClr val="FFFFFF"/>
+        </a:solidFill>
+        <a:effectLst/>
+      </p:bgPr>
+    </p:bg>
+    <p:spTree>
+      <p:nvGrpSpPr>
+        <p:cNvPr id="1" name=""/>
+        <p:cNvGrpSpPr/>
+        <p:nvPr/>
+      </p:nvGrpSpPr>
+      <p:grpSpPr/>
+      <p:sp>
+        <p:nvSpPr>
+          <p:cNvPr id="2" name="TextBox 1"/>
+          <p:cNvSpPr txBox="1"/>
+          <p:nvPr/>
+        </p:nvSpPr>
+        <p:spPr>
+          <a:xfrm>
+            <a:off x="457200" y="329184"/>
+            <a:ext cx="11277295" cy="603504"/>
+          </a:xfrm>
+          <a:prstGeom prst="rect">
+            <a:avLst/>
+          </a:prstGeom>
+          <a:noFill/>
+        </p:spPr>
+        <p:txBody>
+          <a:bodyPr wrap="square" anchor="ctr"/>
+          <a:lstStyle/>
+          <a:p>
+            <a:pPr algn="l" eaLnBrk="0">
+              <a:lnSpc>
+                <a:spcPct val="110000"/>
+              </a:lnSpc>
+            </a:pPr>
+            <a:r>
+              <a:rPr sz="2800" b="1">
+                <a:solidFill>
+                  <a:srgbClr val="13294B"/>
+                </a:solidFill>
+                <a:latin typeface="맑은 고딕"/>
+                <a:ea typeface="맑은 고딕"/>
+                <a:cs typeface="맑은 고딕"/>
+              </a:rPr>
+              <a:t>오늘 다룬 핵심 개념과 주요 용어 정리</a:t>
+            </a:r>
+          </a:p>
+        </p:txBody>
+      </p:sp>
+      <p:sp>
+        <p:nvSpPr>
+          <p:cNvPr id="3" name="TextBox 2"/>
+          <p:cNvSpPr txBox="1"/>
+          <p:nvPr/>
+        </p:nvSpPr>
+        <p:spPr>
+          <a:xfrm>
+            <a:off x="457200" y="932688"/>
+            <a:ext cx="11277295" cy="420624"/>
+          </a:xfrm>
+          <a:prstGeom prst="rect">
+            <a:avLst/>
+          </a:prstGeom>
+          <a:noFill/>
+        </p:spPr>
+        <p:txBody>
+          <a:bodyPr wrap="square" anchor="ctr"/>
+          <a:lstStyle/>
+          <a:p>
+            <a:pPr algn="l" eaLnBrk="0">
+              <a:lnSpc>
+                <a:spcPct val="110000"/>
+              </a:lnSpc>
+            </a:pPr>
+            <a:r>
+              <a:rPr sz="1600" b="0">
+                <a:solidFill>
+                  <a:srgbClr val="556175"/>
+                </a:solidFill>
+                <a:latin typeface="맑은 고딕"/>
+                <a:ea typeface="맑은 고딕"/>
+                <a:cs typeface="맑은 고딕"/>
+              </a:rPr>
+              <a:t>본문에서 정의한 일곱 용어의 정식 명칭과 뜻을 한곳에 모은다.</a:t>
+            </a:r>
+          </a:p>
+        </p:txBody>
+      </p:sp>
+      <p:sp>
+        <p:nvSpPr>
+          <p:cNvPr id="4" name="Rectangle 3"/>
+          <p:cNvSpPr/>
+          <p:nvPr/>
+        </p:nvSpPr>
+        <p:spPr>
+          <a:xfrm>
+            <a:off x="548640" y="1408176"/>
+            <a:ext cx="11094415" cy="18288"/>
+          </a:xfrm>
+          <a:prstGeom prst="rect">
+            <a:avLst/>
+          </a:prstGeom>
+          <a:solidFill>
+            <a:srgbClr val="D3D9E1"/>
+          </a:solidFill>
+          <a:ln>
+            <a:noFill/>
+          </a:ln>
+        </p:spPr>
+        <p:txBody>
+          <a:bodyPr rtlCol="0" anchor="ctr"/>
+          <a:lstStyle/>
+          <a:p>
+            <a:pPr algn="ctr"/>
+          </a:p>
+        </p:txBody>
+      </p:sp>
+      <p:sp>
+        <p:nvSpPr>
+          <p:cNvPr id="5" name="TextBox 4"/>
+          <p:cNvSpPr txBox="1"/>
+          <p:nvPr/>
+        </p:nvSpPr>
+        <p:spPr>
+          <a:xfrm>
+            <a:off x="10911535" y="6473952"/>
+            <a:ext cx="822960" cy="274320"/>
+          </a:xfrm>
+          <a:prstGeom prst="rect">
+            <a:avLst/>
+          </a:prstGeom>
+          <a:noFill/>
+        </p:spPr>
+        <p:txBody>
+          <a:bodyPr wrap="square" anchor="t"/>
+          <a:lstStyle/>
+          <a:p>
+            <a:pPr algn="r" eaLnBrk="0">
+              <a:lnSpc>
+                <a:spcPct val="110000"/>
+              </a:lnSpc>
+            </a:pPr>
+            <a:r>
+              <a:rPr sz="1000" b="0">
+                <a:solidFill>
+                  <a:srgbClr val="556175"/>
+                </a:solidFill>
+                <a:latin typeface="맑은 고딕"/>
+                <a:ea typeface="맑은 고딕"/>
+                <a:cs typeface="맑은 고딕"/>
+              </a:rPr>
+              <a:t>29</a:t>
+            </a:r>
+          </a:p>
+        </p:txBody>
+      </p:sp>
+      <p:sp>
+        <p:nvSpPr>
+          <p:cNvPr id="6" name="Rounded Rectangle 5"/>
+          <p:cNvSpPr/>
+          <p:nvPr/>
+        </p:nvSpPr>
+        <p:spPr>
+          <a:xfrm>
+            <a:off x="548640" y="1627632"/>
+            <a:ext cx="11094415" cy="347472"/>
+          </a:xfrm>
+          <a:prstGeom prst="roundRect">
+            <a:avLst>
+              <a:gd name="adj" fmla="val 12000"/>
+            </a:avLst>
+          </a:prstGeom>
+          <a:solidFill>
+            <a:srgbClr val="13294B"/>
+          </a:solidFill>
+          <a:ln>
+            <a:noFill/>
+          </a:ln>
+        </p:spPr>
+        <p:txBody>
+          <a:bodyPr rtlCol="0" anchor="ctr"/>
+          <a:lstStyle/>
+          <a:p>
+            <a:pPr algn="ctr"/>
+          </a:p>
+        </p:txBody>
+      </p:sp>
+      <p:sp>
+        <p:nvSpPr>
+          <p:cNvPr id="7" name="TextBox 6"/>
+          <p:cNvSpPr txBox="1"/>
+          <p:nvPr/>
+        </p:nvSpPr>
+        <p:spPr>
+          <a:xfrm>
+            <a:off x="685800" y="1627632"/>
+            <a:ext cx="2514600" cy="347472"/>
+          </a:xfrm>
+          <a:prstGeom prst="rect">
+            <a:avLst/>
+          </a:prstGeom>
+          <a:noFill/>
+        </p:spPr>
+        <p:txBody>
+          <a:bodyPr wrap="square" anchor="ctr"/>
+          <a:lstStyle/>
+          <a:p>
+            <a:pPr algn="l" eaLnBrk="0">
+              <a:lnSpc>
+                <a:spcPct val="110000"/>
+              </a:lnSpc>
+            </a:pPr>
+            <a:r>
+              <a:rPr sz="1300" b="1">
+                <a:solidFill>
+                  <a:srgbClr val="FFFFFF"/>
+                </a:solidFill>
+                <a:latin typeface="맑은 고딕"/>
+                <a:ea typeface="맑은 고딕"/>
+                <a:cs typeface="맑은 고딕"/>
+              </a:rPr>
+              <a:t>용어</a:t>
+            </a:r>
+          </a:p>
+        </p:txBody>
+      </p:sp>
+      <p:sp>
+        <p:nvSpPr>
+          <p:cNvPr id="8" name="TextBox 7"/>
+          <p:cNvSpPr txBox="1"/>
+          <p:nvPr/>
+        </p:nvSpPr>
+        <p:spPr>
+          <a:xfrm>
+            <a:off x="3200400" y="1627632"/>
+            <a:ext cx="8442655" cy="347472"/>
+          </a:xfrm>
+          <a:prstGeom prst="rect">
+            <a:avLst/>
+          </a:prstGeom>
+          <a:noFill/>
+        </p:spPr>
+        <p:txBody>
+          <a:bodyPr wrap="square" anchor="ctr"/>
+          <a:lstStyle/>
+          <a:p>
+            <a:pPr algn="l" eaLnBrk="0">
+              <a:lnSpc>
+                <a:spcPct val="110000"/>
+              </a:lnSpc>
+            </a:pPr>
+            <a:r>
+              <a:rPr sz="1300" b="1">
+                <a:solidFill>
+                  <a:srgbClr val="FFFFFF"/>
+                </a:solidFill>
+                <a:latin typeface="맑은 고딕"/>
+                <a:ea typeface="맑은 고딕"/>
+                <a:cs typeface="맑은 고딕"/>
+              </a:rPr>
+              <a:t>정식 명칭 · 풀이</a:t>
+            </a:r>
+          </a:p>
+        </p:txBody>
+      </p:sp>
+      <p:sp>
+        <p:nvSpPr>
+          <p:cNvPr id="9" name="Rounded Rectangle 8"/>
+          <p:cNvSpPr/>
+          <p:nvPr/>
+        </p:nvSpPr>
+        <p:spPr>
+          <a:xfrm>
+            <a:off x="548640" y="2061972"/>
+            <a:ext cx="11094415" cy="553865"/>
+          </a:xfrm>
+          <a:prstGeom prst="roundRect">
+            <a:avLst>
+              <a:gd name="adj" fmla="val 8000"/>
+            </a:avLst>
+          </a:prstGeom>
+          <a:solidFill>
+            <a:srgbClr val="F3F6F9"/>
+          </a:solidFill>
+          <a:ln>
+            <a:noFill/>
+          </a:ln>
+        </p:spPr>
+        <p:txBody>
+          <a:bodyPr rtlCol="0" anchor="ctr"/>
+          <a:lstStyle/>
+          <a:p>
+            <a:pPr algn="ctr"/>
+          </a:p>
+        </p:txBody>
+      </p:sp>
+      <p:sp>
+        <p:nvSpPr>
+          <p:cNvPr id="10" name="TextBox 9"/>
+          <p:cNvSpPr txBox="1"/>
+          <p:nvPr/>
+        </p:nvSpPr>
+        <p:spPr>
+          <a:xfrm>
+            <a:off x="685800" y="2029968"/>
+            <a:ext cx="2514600" cy="617873"/>
+          </a:xfrm>
+          <a:prstGeom prst="rect">
+            <a:avLst/>
+          </a:prstGeom>
+          <a:noFill/>
+        </p:spPr>
+        <p:txBody>
+          <a:bodyPr wrap="square" anchor="ctr"/>
+          <a:lstStyle/>
+          <a:p>
+            <a:pPr algn="l" eaLnBrk="0">
+              <a:lnSpc>
+                <a:spcPct val="110000"/>
+              </a:lnSpc>
+            </a:pPr>
+            <a:r>
+              <a:rPr sz="1600" b="1">
+                <a:solidFill>
+                  <a:srgbClr val="13294B"/>
+                </a:solidFill>
+                <a:latin typeface="맑은 고딕"/>
+                <a:ea typeface="맑은 고딕"/>
+                <a:cs typeface="맑은 고딕"/>
+              </a:rPr>
+              <a:t>LLM</a:t>
+            </a:r>
+          </a:p>
+        </p:txBody>
+      </p:sp>
+      <p:sp>
+        <p:nvSpPr>
+          <p:cNvPr id="11" name="TextBox 10"/>
+          <p:cNvSpPr txBox="1"/>
+          <p:nvPr/>
+        </p:nvSpPr>
+        <p:spPr>
+          <a:xfrm>
+            <a:off x="3200400" y="2029968"/>
+            <a:ext cx="8351215" cy="617873"/>
+          </a:xfrm>
+          <a:prstGeom prst="rect">
+            <a:avLst/>
+          </a:prstGeom>
+          <a:noFill/>
+        </p:spPr>
+        <p:txBody>
+          <a:bodyPr wrap="square" anchor="ctr"/>
+          <a:lstStyle/>
+          <a:p>
+            <a:pPr algn="l" eaLnBrk="0">
+              <a:lnSpc>
+                <a:spcPct val="110000"/>
+              </a:lnSpc>
+            </a:pPr>
+            <a:r>
+              <a:rPr sz="1400" b="0">
+                <a:solidFill>
+                  <a:srgbClr val="1F2A3A"/>
+                </a:solidFill>
+                <a:latin typeface="맑은 고딕"/>
+                <a:ea typeface="맑은 고딕"/>
+                <a:cs typeface="맑은 고딕"/>
+              </a:rPr>
+              <a:t>Large Language Model</a:t>
+            </a:r>
+          </a:p>
+          <a:p>
+            <a:pPr algn="l" eaLnBrk="0">
+              <a:lnSpc>
+                <a:spcPct val="110000"/>
+              </a:lnSpc>
+            </a:pPr>
+            <a:r>
+              <a:rPr sz="1400" b="0">
+                <a:solidFill>
+                  <a:srgbClr val="1F2A3A"/>
+                </a:solidFill>
+                <a:latin typeface="맑은 고딕"/>
+                <a:ea typeface="맑은 고딕"/>
+                <a:cs typeface="맑은 고딕"/>
+              </a:rPr>
+              <a:t>입력과 학습한 내용을 바탕으로 응답을 만드는 대규모 언어 모델</a:t>
+            </a:r>
+          </a:p>
+        </p:txBody>
+      </p:sp>
+      <p:sp>
+        <p:nvSpPr>
+          <p:cNvPr id="12" name="Rounded Rectangle 11"/>
+          <p:cNvSpPr/>
+          <p:nvPr/>
+        </p:nvSpPr>
+        <p:spPr>
+          <a:xfrm>
+            <a:off x="548640" y="2679845"/>
+            <a:ext cx="11094415" cy="553865"/>
+          </a:xfrm>
+          <a:prstGeom prst="roundRect">
+            <a:avLst>
+              <a:gd name="adj" fmla="val 8000"/>
+            </a:avLst>
+          </a:prstGeom>
+          <a:solidFill>
+            <a:srgbClr val="F3F6F9"/>
+          </a:solidFill>
+          <a:ln>
+            <a:noFill/>
+          </a:ln>
+        </p:spPr>
+        <p:txBody>
+          <a:bodyPr rtlCol="0" anchor="ctr"/>
+          <a:lstStyle/>
+          <a:p>
+            <a:pPr algn="ctr"/>
+          </a:p>
+        </p:txBody>
+      </p:sp>
+      <p:sp>
+        <p:nvSpPr>
+          <p:cNvPr id="13" name="TextBox 12"/>
+          <p:cNvSpPr txBox="1"/>
+          <p:nvPr/>
+        </p:nvSpPr>
+        <p:spPr>
+          <a:xfrm>
+            <a:off x="685800" y="2647841"/>
+            <a:ext cx="2514600" cy="617873"/>
+          </a:xfrm>
+          <a:prstGeom prst="rect">
+            <a:avLst/>
+          </a:prstGeom>
+          <a:noFill/>
+        </p:spPr>
+        <p:txBody>
+          <a:bodyPr wrap="square" anchor="ctr"/>
+          <a:lstStyle/>
+          <a:p>
+            <a:pPr algn="l" eaLnBrk="0">
+              <a:lnSpc>
+                <a:spcPct val="110000"/>
+              </a:lnSpc>
+            </a:pPr>
+            <a:r>
+              <a:rPr sz="1600" b="1">
+                <a:solidFill>
+                  <a:srgbClr val="13294B"/>
+                </a:solidFill>
+                <a:latin typeface="맑은 고딕"/>
+                <a:ea typeface="맑은 고딕"/>
+                <a:cs typeface="맑은 고딕"/>
+              </a:rPr>
+              <a:t>RAG</a:t>
+            </a:r>
+          </a:p>
+        </p:txBody>
+      </p:sp>
+      <p:sp>
+        <p:nvSpPr>
+          <p:cNvPr id="14" name="TextBox 13"/>
+          <p:cNvSpPr txBox="1"/>
+          <p:nvPr/>
+        </p:nvSpPr>
+        <p:spPr>
+          <a:xfrm>
+            <a:off x="3200400" y="2647841"/>
+            <a:ext cx="8351215" cy="617873"/>
+          </a:xfrm>
+          <a:prstGeom prst="rect">
+            <a:avLst/>
+          </a:prstGeom>
+          <a:noFill/>
+        </p:spPr>
+        <p:txBody>
+          <a:bodyPr wrap="square" anchor="ctr"/>
+          <a:lstStyle/>
+          <a:p>
+            <a:pPr algn="l" eaLnBrk="0">
+              <a:lnSpc>
+                <a:spcPct val="110000"/>
+              </a:lnSpc>
+            </a:pPr>
+            <a:r>
+              <a:rPr sz="1400" b="0">
+                <a:solidFill>
+                  <a:srgbClr val="1F2A3A"/>
+                </a:solidFill>
+                <a:latin typeface="맑은 고딕"/>
+                <a:ea typeface="맑은 고딕"/>
+                <a:cs typeface="맑은 고딕"/>
+              </a:rPr>
+              <a:t>Retrieval-Augmented Generation</a:t>
+            </a:r>
+          </a:p>
+          <a:p>
+            <a:pPr algn="l" eaLnBrk="0">
+              <a:lnSpc>
+                <a:spcPct val="110000"/>
+              </a:lnSpc>
+            </a:pPr>
+            <a:r>
+              <a:rPr sz="1400" b="0">
+                <a:solidFill>
+                  <a:srgbClr val="1F2A3A"/>
+                </a:solidFill>
+                <a:latin typeface="맑은 고딕"/>
+                <a:ea typeface="맑은 고딕"/>
+                <a:cs typeface="맑은 고딕"/>
+              </a:rPr>
+              <a:t>검색한 자료를 답 생성의 근거로 제공하는 방식</a:t>
+            </a:r>
+          </a:p>
+        </p:txBody>
+      </p:sp>
+      <p:sp>
+        <p:nvSpPr>
+          <p:cNvPr id="15" name="Rounded Rectangle 14"/>
+          <p:cNvSpPr/>
+          <p:nvPr/>
+        </p:nvSpPr>
+        <p:spPr>
+          <a:xfrm>
+            <a:off x="548640" y="3297718"/>
+            <a:ext cx="11094415" cy="553865"/>
+          </a:xfrm>
+          <a:prstGeom prst="roundRect">
+            <a:avLst>
+              <a:gd name="adj" fmla="val 8000"/>
+            </a:avLst>
+          </a:prstGeom>
+          <a:solidFill>
+            <a:srgbClr val="F3F6F9"/>
+          </a:solidFill>
+          <a:ln>
+            <a:noFill/>
+          </a:ln>
+        </p:spPr>
+        <p:txBody>
+          <a:bodyPr rtlCol="0" anchor="ctr"/>
+          <a:lstStyle/>
+          <a:p>
+            <a:pPr algn="ctr"/>
+          </a:p>
+        </p:txBody>
+      </p:sp>
+      <p:sp>
+        <p:nvSpPr>
+          <p:cNvPr id="16" name="TextBox 15"/>
+          <p:cNvSpPr txBox="1"/>
+          <p:nvPr/>
+        </p:nvSpPr>
+        <p:spPr>
+          <a:xfrm>
+            <a:off x="685800" y="3265714"/>
+            <a:ext cx="2514600" cy="617873"/>
+          </a:xfrm>
+          <a:prstGeom prst="rect">
+            <a:avLst/>
+          </a:prstGeom>
+          <a:noFill/>
+        </p:spPr>
+        <p:txBody>
+          <a:bodyPr wrap="square" anchor="ctr"/>
+          <a:lstStyle/>
+          <a:p>
+            <a:pPr algn="l" eaLnBrk="0">
+              <a:lnSpc>
+                <a:spcPct val="110000"/>
+              </a:lnSpc>
+            </a:pPr>
+            <a:r>
+              <a:rPr sz="1600" b="1">
+                <a:solidFill>
+                  <a:srgbClr val="13294B"/>
+                </a:solidFill>
+                <a:latin typeface="맑은 고딕"/>
+                <a:ea typeface="맑은 고딕"/>
+                <a:cs typeface="맑은 고딕"/>
+              </a:rPr>
+              <a:t>에이전트</a:t>
+            </a:r>
+          </a:p>
+        </p:txBody>
+      </p:sp>
+      <p:sp>
+        <p:nvSpPr>
+          <p:cNvPr id="17" name="TextBox 16"/>
+          <p:cNvSpPr txBox="1"/>
+          <p:nvPr/>
+        </p:nvSpPr>
+        <p:spPr>
+          <a:xfrm>
+            <a:off x="3200400" y="3265714"/>
+            <a:ext cx="8351215" cy="617873"/>
+          </a:xfrm>
+          <a:prstGeom prst="rect">
+            <a:avLst/>
+          </a:prstGeom>
+          <a:noFill/>
+        </p:spPr>
+        <p:txBody>
+          <a:bodyPr wrap="square" anchor="ctr"/>
+          <a:lstStyle/>
+          <a:p>
+            <a:pPr algn="l" eaLnBrk="0">
+              <a:lnSpc>
+                <a:spcPct val="110000"/>
+              </a:lnSpc>
+            </a:pPr>
+            <a:r>
+              <a:rPr sz="1400" b="0">
+                <a:solidFill>
+                  <a:srgbClr val="1F2A3A"/>
+                </a:solidFill>
+                <a:latin typeface="맑은 고딕"/>
+                <a:ea typeface="맑은 고딕"/>
+                <a:cs typeface="맑은 고딕"/>
+              </a:rPr>
+              <a:t>AI Agent</a:t>
+            </a:r>
+          </a:p>
+          <a:p>
+            <a:pPr algn="l" eaLnBrk="0">
+              <a:lnSpc>
+                <a:spcPct val="110000"/>
+              </a:lnSpc>
+            </a:pPr>
+            <a:r>
+              <a:rPr sz="1400" b="0">
+                <a:solidFill>
+                  <a:srgbClr val="1F2A3A"/>
+                </a:solidFill>
+                <a:latin typeface="맑은 고딕"/>
+                <a:ea typeface="맑은 고딕"/>
+                <a:cs typeface="맑은 고딕"/>
+              </a:rPr>
+              <a:t>목표와 도구 결과에 따라 행동하며 완료 · 멈춤 조건에서 끝내는 시스템</a:t>
+            </a:r>
+          </a:p>
+        </p:txBody>
+      </p:sp>
+      <p:sp>
+        <p:nvSpPr>
+          <p:cNvPr id="18" name="Rounded Rectangle 17"/>
+          <p:cNvSpPr/>
+          <p:nvPr/>
+        </p:nvSpPr>
+        <p:spPr>
+          <a:xfrm>
+            <a:off x="548640" y="3915591"/>
+            <a:ext cx="11094415" cy="553865"/>
+          </a:xfrm>
+          <a:prstGeom prst="roundRect">
+            <a:avLst>
+              <a:gd name="adj" fmla="val 8000"/>
+            </a:avLst>
+          </a:prstGeom>
+          <a:solidFill>
+            <a:srgbClr val="F3F6F9"/>
+          </a:solidFill>
+          <a:ln>
+            <a:noFill/>
+          </a:ln>
+        </p:spPr>
+        <p:txBody>
+          <a:bodyPr rtlCol="0" anchor="ctr"/>
+          <a:lstStyle/>
+          <a:p>
+            <a:pPr algn="ctr"/>
+          </a:p>
+        </p:txBody>
+      </p:sp>
+      <p:sp>
+        <p:nvSpPr>
           <p:cNvPr id="19" name="TextBox 18"/>
           <p:cNvSpPr txBox="1"/>
           <p:nvPr/>
         </p:nvSpPr>
         <p:spPr>
           <a:xfrm>
-            <a:off x="685800" y="4649723"/>
-            <a:ext cx="2514600" cy="914400"/>
+            <a:off x="685800" y="3883587"/>
+            <a:ext cx="2514600" cy="617873"/>
           </a:xfrm>
           <a:prstGeom prst="rect">
             <a:avLst/>
@@ -22096,7 +23865,7 @@
                 <a:ea typeface="맑은 고딕"/>
                 <a:cs typeface="맑은 고딕"/>
               </a:rPr>
-              <a:t>4교시</a:t>
+              <a:t>도구</a:t>
             </a:r>
           </a:p>
         </p:txBody>
@@ -22109,8 +23878,8 @@
         </p:nvSpPr>
         <p:spPr>
           <a:xfrm>
-            <a:off x="3200400" y="4649723"/>
-            <a:ext cx="6156655" cy="914400"/>
+            <a:off x="3200400" y="3883587"/>
+            <a:ext cx="8351215" cy="617873"/>
           </a:xfrm>
           <a:prstGeom prst="rect">
             <a:avLst/>
@@ -22135,21 +23904,70 @@
                 <a:ea typeface="맑은 고딕"/>
                 <a:cs typeface="맑은 고딕"/>
               </a:rPr>
-              <a:t>센서 시각화와 에이전트 결과 검증하기</a:t>
-            </a:r>
-          </a:p>
-        </p:txBody>
-      </p:sp>
-      <p:sp>
-        <p:nvSpPr>
-          <p:cNvPr id="21" name="TextBox 20"/>
-          <p:cNvSpPr txBox="1"/>
-          <p:nvPr/>
-        </p:nvSpPr>
-        <p:spPr>
-          <a:xfrm>
-            <a:off x="9448495" y="4649723"/>
-            <a:ext cx="2103120" cy="914400"/>
+              <a:t>Tool</a:t>
+            </a:r>
+          </a:p>
+          <a:p>
+            <a:pPr algn="l" eaLnBrk="0">
+              <a:lnSpc>
+                <a:spcPct val="110000"/>
+              </a:lnSpc>
+            </a:pPr>
+            <a:r>
+              <a:rPr sz="1400" b="0">
+                <a:solidFill>
+                  <a:srgbClr val="1F2A3A"/>
+                </a:solidFill>
+                <a:latin typeface="맑은 고딕"/>
+                <a:ea typeface="맑은 고딕"/>
+                <a:cs typeface="맑은 고딕"/>
+              </a:rPr>
+              <a:t>모델이 이름과 입력을 적어 부르는 조회 · 계산 · 제출 기능</a:t>
+            </a:r>
+          </a:p>
+        </p:txBody>
+      </p:sp>
+      <p:sp>
+        <p:nvSpPr>
+          <p:cNvPr id="21" name="Rounded Rectangle 20"/>
+          <p:cNvSpPr/>
+          <p:nvPr/>
+        </p:nvSpPr>
+        <p:spPr>
+          <a:xfrm>
+            <a:off x="548640" y="4533464"/>
+            <a:ext cx="11094415" cy="553865"/>
+          </a:xfrm>
+          <a:prstGeom prst="roundRect">
+            <a:avLst>
+              <a:gd name="adj" fmla="val 8000"/>
+            </a:avLst>
+          </a:prstGeom>
+          <a:solidFill>
+            <a:srgbClr val="F3F6F9"/>
+          </a:solidFill>
+          <a:ln>
+            <a:noFill/>
+          </a:ln>
+        </p:spPr>
+        <p:txBody>
+          <a:bodyPr rtlCol="0" anchor="ctr"/>
+          <a:lstStyle/>
+          <a:p>
+            <a:pPr algn="ctr"/>
+          </a:p>
+        </p:txBody>
+      </p:sp>
+      <p:sp>
+        <p:nvSpPr>
+          <p:cNvPr id="22" name="TextBox 21"/>
+          <p:cNvSpPr txBox="1"/>
+          <p:nvPr/>
+        </p:nvSpPr>
+        <p:spPr>
+          <a:xfrm>
+            <a:off x="685800" y="4501460"/>
+            <a:ext cx="2514600" cy="617873"/>
           </a:xfrm>
           <a:prstGeom prst="rect">
             <a:avLst/>
@@ -22166,17 +23984,38 @@
               </a:lnSpc>
             </a:pPr>
             <a:r>
-              <a:rPr sz="1250" b="1">
-                <a:solidFill>
-                  <a:srgbClr val="1A6FC4"/>
-                </a:solidFill>
-                <a:latin typeface="맑은 고딕"/>
-                <a:ea typeface="맑은 고딕"/>
-                <a:cs typeface="맑은 고딕"/>
-              </a:rPr>
-              <a:t>이상 구간 도표,</a:t>
-            </a:r>
-          </a:p>
+              <a:rPr sz="1600" b="1">
+                <a:solidFill>
+                  <a:srgbClr val="13294B"/>
+                </a:solidFill>
+                <a:latin typeface="맑은 고딕"/>
+                <a:ea typeface="맑은 고딕"/>
+                <a:cs typeface="맑은 고딕"/>
+              </a:rPr>
+              <a:t>실행 고리</a:t>
+            </a:r>
+          </a:p>
+        </p:txBody>
+      </p:sp>
+      <p:sp>
+        <p:nvSpPr>
+          <p:cNvPr id="23" name="TextBox 22"/>
+          <p:cNvSpPr txBox="1"/>
+          <p:nvPr/>
+        </p:nvSpPr>
+        <p:spPr>
+          <a:xfrm>
+            <a:off x="3200400" y="4501460"/>
+            <a:ext cx="8351215" cy="617873"/>
+          </a:xfrm>
+          <a:prstGeom prst="rect">
+            <a:avLst/>
+          </a:prstGeom>
+          <a:noFill/>
+        </p:spPr>
+        <p:txBody>
+          <a:bodyPr wrap="square" anchor="ctr"/>
+          <a:lstStyle/>
           <a:p>
             <a:pPr algn="l" eaLnBrk="0">
               <a:lnSpc>
@@ -22184,15 +24023,287 @@
               </a:lnSpc>
             </a:pPr>
             <a:r>
-              <a:rPr sz="1250" b="1">
-                <a:solidFill>
-                  <a:srgbClr val="1A6FC4"/>
-                </a:solidFill>
-                <a:latin typeface="맑은 고딕"/>
-                <a:ea typeface="맑은 고딕"/>
-                <a:cs typeface="맑은 고딕"/>
-              </a:rPr>
-              <a:t>근거와 미확인의 구분</a:t>
+              <a:rPr sz="1400" b="0">
+                <a:solidFill>
+                  <a:srgbClr val="1F2A3A"/>
+                </a:solidFill>
+                <a:latin typeface="맑은 고딕"/>
+                <a:ea typeface="맑은 고딕"/>
+                <a:cs typeface="맑은 고딕"/>
+              </a:rPr>
+              <a:t>Agent Loop</a:t>
+            </a:r>
+          </a:p>
+          <a:p>
+            <a:pPr algn="l" eaLnBrk="0">
+              <a:lnSpc>
+                <a:spcPct val="110000"/>
+              </a:lnSpc>
+            </a:pPr>
+            <a:r>
+              <a:rPr sz="1400" b="0">
+                <a:solidFill>
+                  <a:srgbClr val="1F2A3A"/>
+                </a:solidFill>
+                <a:latin typeface="맑은 고딕"/>
+                <a:ea typeface="맑은 고딕"/>
+                <a:cs typeface="맑은 고딕"/>
+              </a:rPr>
+              <a:t>요청 해석 · 계획 · 호출 · 관찰을 되풀이하다 종료하는 틀</a:t>
+            </a:r>
+          </a:p>
+        </p:txBody>
+      </p:sp>
+      <p:sp>
+        <p:nvSpPr>
+          <p:cNvPr id="24" name="Rounded Rectangle 23"/>
+          <p:cNvSpPr/>
+          <p:nvPr/>
+        </p:nvSpPr>
+        <p:spPr>
+          <a:xfrm>
+            <a:off x="548640" y="5151337"/>
+            <a:ext cx="11094415" cy="553865"/>
+          </a:xfrm>
+          <a:prstGeom prst="roundRect">
+            <a:avLst>
+              <a:gd name="adj" fmla="val 8000"/>
+            </a:avLst>
+          </a:prstGeom>
+          <a:solidFill>
+            <a:srgbClr val="F3F6F9"/>
+          </a:solidFill>
+          <a:ln>
+            <a:noFill/>
+          </a:ln>
+        </p:spPr>
+        <p:txBody>
+          <a:bodyPr rtlCol="0" anchor="ctr"/>
+          <a:lstStyle/>
+          <a:p>
+            <a:pPr algn="ctr"/>
+          </a:p>
+        </p:txBody>
+      </p:sp>
+      <p:sp>
+        <p:nvSpPr>
+          <p:cNvPr id="25" name="TextBox 24"/>
+          <p:cNvSpPr txBox="1"/>
+          <p:nvPr/>
+        </p:nvSpPr>
+        <p:spPr>
+          <a:xfrm>
+            <a:off x="685800" y="5119333"/>
+            <a:ext cx="2514600" cy="617873"/>
+          </a:xfrm>
+          <a:prstGeom prst="rect">
+            <a:avLst/>
+          </a:prstGeom>
+          <a:noFill/>
+        </p:spPr>
+        <p:txBody>
+          <a:bodyPr wrap="square" anchor="ctr"/>
+          <a:lstStyle/>
+          <a:p>
+            <a:pPr algn="l" eaLnBrk="0">
+              <a:lnSpc>
+                <a:spcPct val="110000"/>
+              </a:lnSpc>
+            </a:pPr>
+            <a:r>
+              <a:rPr sz="1600" b="1">
+                <a:solidFill>
+                  <a:srgbClr val="13294B"/>
+                </a:solidFill>
+                <a:latin typeface="맑은 고딕"/>
+                <a:ea typeface="맑은 고딕"/>
+                <a:cs typeface="맑은 고딕"/>
+              </a:rPr>
+              <a:t>신선도</a:t>
+            </a:r>
+          </a:p>
+        </p:txBody>
+      </p:sp>
+      <p:sp>
+        <p:nvSpPr>
+          <p:cNvPr id="26" name="TextBox 25"/>
+          <p:cNvSpPr txBox="1"/>
+          <p:nvPr/>
+        </p:nvSpPr>
+        <p:spPr>
+          <a:xfrm>
+            <a:off x="3200400" y="5119333"/>
+            <a:ext cx="8351215" cy="617873"/>
+          </a:xfrm>
+          <a:prstGeom prst="rect">
+            <a:avLst/>
+          </a:prstGeom>
+          <a:noFill/>
+        </p:spPr>
+        <p:txBody>
+          <a:bodyPr wrap="square" anchor="ctr"/>
+          <a:lstStyle/>
+          <a:p>
+            <a:pPr algn="l" eaLnBrk="0">
+              <a:lnSpc>
+                <a:spcPct val="110000"/>
+              </a:lnSpc>
+            </a:pPr>
+            <a:r>
+              <a:rPr sz="1400" b="0">
+                <a:solidFill>
+                  <a:srgbClr val="1F2A3A"/>
+                </a:solidFill>
+                <a:latin typeface="맑은 고딕"/>
+                <a:ea typeface="맑은 고딕"/>
+                <a:cs typeface="맑은 고딕"/>
+              </a:rPr>
+              <a:t>Freshness</a:t>
+            </a:r>
+          </a:p>
+          <a:p>
+            <a:pPr algn="l" eaLnBrk="0">
+              <a:lnSpc>
+                <a:spcPct val="110000"/>
+              </a:lnSpc>
+            </a:pPr>
+            <a:r>
+              <a:rPr sz="1400" b="0">
+                <a:solidFill>
+                  <a:srgbClr val="1F2A3A"/>
+                </a:solidFill>
+                <a:latin typeface="맑은 고딕"/>
+                <a:ea typeface="맑은 고딕"/>
+                <a:cs typeface="맑은 고딕"/>
+              </a:rPr>
+              <a:t>관측된 값이 판단 시점에서 얼마나 오래됐는가</a:t>
+            </a:r>
+          </a:p>
+        </p:txBody>
+      </p:sp>
+      <p:sp>
+        <p:nvSpPr>
+          <p:cNvPr id="27" name="Rounded Rectangle 26"/>
+          <p:cNvSpPr/>
+          <p:nvPr/>
+        </p:nvSpPr>
+        <p:spPr>
+          <a:xfrm>
+            <a:off x="548640" y="5769210"/>
+            <a:ext cx="11094415" cy="553865"/>
+          </a:xfrm>
+          <a:prstGeom prst="roundRect">
+            <a:avLst>
+              <a:gd name="adj" fmla="val 8000"/>
+            </a:avLst>
+          </a:prstGeom>
+          <a:solidFill>
+            <a:srgbClr val="F3F6F9"/>
+          </a:solidFill>
+          <a:ln>
+            <a:noFill/>
+          </a:ln>
+        </p:spPr>
+        <p:txBody>
+          <a:bodyPr rtlCol="0" anchor="ctr"/>
+          <a:lstStyle/>
+          <a:p>
+            <a:pPr algn="ctr"/>
+          </a:p>
+        </p:txBody>
+      </p:sp>
+      <p:sp>
+        <p:nvSpPr>
+          <p:cNvPr id="28" name="TextBox 27"/>
+          <p:cNvSpPr txBox="1"/>
+          <p:nvPr/>
+        </p:nvSpPr>
+        <p:spPr>
+          <a:xfrm>
+            <a:off x="685800" y="5737206"/>
+            <a:ext cx="2514600" cy="617873"/>
+          </a:xfrm>
+          <a:prstGeom prst="rect">
+            <a:avLst/>
+          </a:prstGeom>
+          <a:noFill/>
+        </p:spPr>
+        <p:txBody>
+          <a:bodyPr wrap="square" anchor="ctr"/>
+          <a:lstStyle/>
+          <a:p>
+            <a:pPr algn="l" eaLnBrk="0">
+              <a:lnSpc>
+                <a:spcPct val="110000"/>
+              </a:lnSpc>
+            </a:pPr>
+            <a:r>
+              <a:rPr sz="1600" b="1">
+                <a:solidFill>
+                  <a:srgbClr val="13294B"/>
+                </a:solidFill>
+                <a:latin typeface="맑은 고딕"/>
+                <a:ea typeface="맑은 고딕"/>
+                <a:cs typeface="맑은 고딕"/>
+              </a:rPr>
+              <a:t>근거의 상태</a:t>
+            </a:r>
+          </a:p>
+        </p:txBody>
+      </p:sp>
+      <p:sp>
+        <p:nvSpPr>
+          <p:cNvPr id="29" name="TextBox 28"/>
+          <p:cNvSpPr txBox="1"/>
+          <p:nvPr/>
+        </p:nvSpPr>
+        <p:spPr>
+          <a:xfrm>
+            <a:off x="3200400" y="5737206"/>
+            <a:ext cx="8351215" cy="617873"/>
+          </a:xfrm>
+          <a:prstGeom prst="rect">
+            <a:avLst/>
+          </a:prstGeom>
+          <a:noFill/>
+        </p:spPr>
+        <p:txBody>
+          <a:bodyPr wrap="square" anchor="ctr"/>
+          <a:lstStyle/>
+          <a:p>
+            <a:pPr algn="l" eaLnBrk="0">
+              <a:lnSpc>
+                <a:spcPct val="110000"/>
+              </a:lnSpc>
+            </a:pPr>
+            <a:r>
+              <a:rPr sz="1400" b="0">
+                <a:solidFill>
+                  <a:srgbClr val="1F2A3A"/>
+                </a:solidFill>
+                <a:latin typeface="맑은 고딕"/>
+                <a:ea typeface="맑은 고딕"/>
+                <a:cs typeface="맑은 고딕"/>
+              </a:rPr>
+              <a:t>SUPPORTED · UNKNOWN · UNSUPPORTED</a:t>
+            </a:r>
+          </a:p>
+          <a:p>
+            <a:pPr algn="l" eaLnBrk="0">
+              <a:lnSpc>
+                <a:spcPct val="110000"/>
+              </a:lnSpc>
+            </a:pPr>
+            <a:r>
+              <a:rPr sz="1400" b="0">
+                <a:solidFill>
+                  <a:srgbClr val="1F2A3A"/>
+                </a:solidFill>
+                <a:latin typeface="맑은 고딕"/>
+                <a:ea typeface="맑은 고딕"/>
+                <a:cs typeface="맑은 고딕"/>
+              </a:rPr>
+              <a:t>근거 지지 · 미확인 · 지지 근거 없음</a:t>
             </a:r>
           </a:p>
         </p:txBody>
@@ -23017,6 +25128,3324 @@
 </p:sld>
 </file>
 
+<file path=ppt/slides/slide30.xml><?xml version="1.0" encoding="utf-8"?>
+<p:sld xmlns:a="http://schemas.openxmlformats.org/drawingml/2006/main" xmlns:p="http://schemas.openxmlformats.org/presentationml/2006/main" xmlns:r="http://schemas.openxmlformats.org/officeDocument/2006/relationships">
+  <p:cSld>
+    <p:bg>
+      <p:bgPr>
+        <a:solidFill>
+          <a:srgbClr val="E7F3FD"/>
+        </a:solidFill>
+        <a:effectLst/>
+      </p:bgPr>
+    </p:bg>
+    <p:spTree>
+      <p:nvGrpSpPr>
+        <p:cNvPr id="1" name=""/>
+        <p:cNvGrpSpPr/>
+        <p:nvPr/>
+      </p:nvGrpSpPr>
+      <p:grpSpPr/>
+      <p:sp>
+        <p:nvSpPr>
+          <p:cNvPr id="2" name="TextBox 1"/>
+          <p:cNvSpPr txBox="1"/>
+          <p:nvPr/>
+        </p:nvSpPr>
+        <p:spPr>
+          <a:xfrm>
+            <a:off x="457200" y="384048"/>
+            <a:ext cx="8229600" cy="457200"/>
+          </a:xfrm>
+          <a:prstGeom prst="rect">
+            <a:avLst/>
+          </a:prstGeom>
+          <a:noFill/>
+        </p:spPr>
+        <p:txBody>
+          <a:bodyPr wrap="square" anchor="t"/>
+          <a:lstStyle/>
+          <a:p>
+            <a:pPr algn="l" eaLnBrk="0">
+              <a:lnSpc>
+                <a:spcPct val="110000"/>
+              </a:lnSpc>
+            </a:pPr>
+            <a:r>
+              <a:rPr sz="2000" b="1">
+                <a:solidFill>
+                  <a:srgbClr val="5CB8F2"/>
+                </a:solidFill>
+                <a:latin typeface="맑은 고딕"/>
+                <a:ea typeface="맑은 고딕"/>
+                <a:cs typeface="맑은 고딕"/>
+              </a:rPr>
+              <a:t>경남대학교 피지컬AI 사관학교</a:t>
+            </a:r>
+          </a:p>
+        </p:txBody>
+      </p:sp>
+      <p:sp>
+        <p:nvSpPr>
+          <p:cNvPr id="3" name="Rectangle 2"/>
+          <p:cNvSpPr/>
+          <p:nvPr/>
+        </p:nvSpPr>
+        <p:spPr>
+          <a:xfrm>
+            <a:off x="548640" y="859536"/>
+            <a:ext cx="3606800" cy="41148"/>
+          </a:xfrm>
+          <a:prstGeom prst="rect">
+            <a:avLst/>
+          </a:prstGeom>
+          <a:solidFill>
+            <a:srgbClr val="5CB8F2"/>
+          </a:solidFill>
+          <a:ln>
+            <a:noFill/>
+          </a:ln>
+        </p:spPr>
+        <p:txBody>
+          <a:bodyPr rtlCol="0" anchor="ctr"/>
+          <a:lstStyle/>
+          <a:p>
+            <a:pPr algn="ctr"/>
+          </a:p>
+        </p:txBody>
+      </p:sp>
+      <p:sp>
+        <p:nvSpPr>
+          <p:cNvPr id="4" name="TextBox 3"/>
+          <p:cNvSpPr txBox="1"/>
+          <p:nvPr/>
+        </p:nvSpPr>
+        <p:spPr>
+          <a:xfrm>
+            <a:off x="731520" y="2011680"/>
+            <a:ext cx="10911535" cy="2011680"/>
+          </a:xfrm>
+          <a:prstGeom prst="rect">
+            <a:avLst/>
+          </a:prstGeom>
+          <a:noFill/>
+        </p:spPr>
+        <p:txBody>
+          <a:bodyPr wrap="square" anchor="ctr"/>
+          <a:lstStyle/>
+          <a:p>
+            <a:pPr algn="l" eaLnBrk="0">
+              <a:lnSpc>
+                <a:spcPct val="110000"/>
+              </a:lnSpc>
+            </a:pPr>
+            <a:r>
+              <a:rPr sz="3400" b="1">
+                <a:solidFill>
+                  <a:srgbClr val="13294B"/>
+                </a:solidFill>
+                <a:latin typeface="맑은 고딕"/>
+                <a:ea typeface="맑은 고딕"/>
+                <a:cs typeface="맑은 고딕"/>
+              </a:rPr>
+              <a:t>Review Quiz: 핵심 흐름 되짚어보기</a:t>
+            </a:r>
+          </a:p>
+        </p:txBody>
+      </p:sp>
+      <p:sp>
+        <p:nvSpPr>
+          <p:cNvPr id="5" name="TextBox 4"/>
+          <p:cNvSpPr txBox="1"/>
+          <p:nvPr/>
+        </p:nvSpPr>
+        <p:spPr>
+          <a:xfrm>
+            <a:off x="731520" y="4160520"/>
+            <a:ext cx="10911535" cy="457200"/>
+          </a:xfrm>
+          <a:prstGeom prst="rect">
+            <a:avLst/>
+          </a:prstGeom>
+          <a:noFill/>
+        </p:spPr>
+        <p:txBody>
+          <a:bodyPr wrap="square" anchor="t"/>
+          <a:lstStyle/>
+          <a:p>
+            <a:pPr algn="l" eaLnBrk="0">
+              <a:lnSpc>
+                <a:spcPct val="110000"/>
+              </a:lnSpc>
+            </a:pPr>
+            <a:r>
+              <a:rPr sz="1700" b="0">
+                <a:solidFill>
+                  <a:srgbClr val="556175"/>
+                </a:solidFill>
+                <a:latin typeface="맑은 고딕"/>
+                <a:ea typeface="맑은 고딕"/>
+                <a:cs typeface="맑은 고딕"/>
+              </a:rPr>
+              <a:t>배운 내용을 바탕으로 정답을 맞혀 보세요.</a:t>
+            </a:r>
+          </a:p>
+        </p:txBody>
+      </p:sp>
+    </p:spTree>
+  </p:cSld>
+  <p:clrMapOvr>
+    <a:masterClrMapping/>
+  </p:clrMapOvr>
+</p:sld>
+</file>
+
+<file path=ppt/slides/slide31.xml><?xml version="1.0" encoding="utf-8"?>
+<p:sld xmlns:a="http://schemas.openxmlformats.org/drawingml/2006/main" xmlns:p="http://schemas.openxmlformats.org/presentationml/2006/main" xmlns:r="http://schemas.openxmlformats.org/officeDocument/2006/relationships">
+  <p:cSld>
+    <p:bg>
+      <p:bgPr>
+        <a:solidFill>
+          <a:srgbClr val="FFFFFF"/>
+        </a:solidFill>
+        <a:effectLst/>
+      </p:bgPr>
+    </p:bg>
+    <p:spTree>
+      <p:nvGrpSpPr>
+        <p:cNvPr id="1" name=""/>
+        <p:cNvGrpSpPr/>
+        <p:nvPr/>
+      </p:nvGrpSpPr>
+      <p:grpSpPr/>
+      <p:sp>
+        <p:nvSpPr>
+          <p:cNvPr id="2" name="TextBox 1"/>
+          <p:cNvSpPr txBox="1"/>
+          <p:nvPr/>
+        </p:nvSpPr>
+        <p:spPr>
+          <a:xfrm>
+            <a:off x="457200" y="329184"/>
+            <a:ext cx="11277295" cy="603504"/>
+          </a:xfrm>
+          <a:prstGeom prst="rect">
+            <a:avLst/>
+          </a:prstGeom>
+          <a:noFill/>
+        </p:spPr>
+        <p:txBody>
+          <a:bodyPr wrap="square" anchor="ctr"/>
+          <a:lstStyle/>
+          <a:p>
+            <a:pPr algn="l" eaLnBrk="0">
+              <a:lnSpc>
+                <a:spcPct val="110000"/>
+              </a:lnSpc>
+            </a:pPr>
+            <a:r>
+              <a:rPr sz="2800" b="1">
+                <a:solidFill>
+                  <a:srgbClr val="13294B"/>
+                </a:solidFill>
+                <a:latin typeface="맑은 고딕"/>
+                <a:ea typeface="맑은 고딕"/>
+                <a:cs typeface="맑은 고딕"/>
+              </a:rPr>
+              <a:t>Quiz 1. 처리 기록의 한 장면</a:t>
+            </a:r>
+          </a:p>
+        </p:txBody>
+      </p:sp>
+      <p:sp>
+        <p:nvSpPr>
+          <p:cNvPr id="3" name="TextBox 2"/>
+          <p:cNvSpPr txBox="1"/>
+          <p:nvPr/>
+        </p:nvSpPr>
+        <p:spPr>
+          <a:xfrm>
+            <a:off x="457200" y="932688"/>
+            <a:ext cx="11277295" cy="420624"/>
+          </a:xfrm>
+          <a:prstGeom prst="rect">
+            <a:avLst/>
+          </a:prstGeom>
+          <a:noFill/>
+        </p:spPr>
+        <p:txBody>
+          <a:bodyPr wrap="square" anchor="ctr"/>
+          <a:lstStyle/>
+          <a:p>
+            <a:pPr algn="l" eaLnBrk="0">
+              <a:lnSpc>
+                <a:spcPct val="110000"/>
+              </a:lnSpc>
+            </a:pPr>
+            <a:r>
+              <a:rPr sz="1600" b="0">
+                <a:solidFill>
+                  <a:srgbClr val="556175"/>
+                </a:solidFill>
+                <a:latin typeface="맑은 고딕"/>
+                <a:ea typeface="맑은 고딕"/>
+                <a:cs typeface="맑은 고딕"/>
+              </a:rPr>
+              <a:t>에이전트가 원인 진단을 부른 뒤, 그 결과에 든 원인과 고장 유형의 식별자를 넣어 대안 평가를 불렀다.</a:t>
+            </a:r>
+          </a:p>
+        </p:txBody>
+      </p:sp>
+      <p:sp>
+        <p:nvSpPr>
+          <p:cNvPr id="4" name="Rectangle 3"/>
+          <p:cNvSpPr/>
+          <p:nvPr/>
+        </p:nvSpPr>
+        <p:spPr>
+          <a:xfrm>
+            <a:off x="548640" y="1408176"/>
+            <a:ext cx="11094415" cy="18288"/>
+          </a:xfrm>
+          <a:prstGeom prst="rect">
+            <a:avLst/>
+          </a:prstGeom>
+          <a:solidFill>
+            <a:srgbClr val="D3D9E1"/>
+          </a:solidFill>
+          <a:ln>
+            <a:noFill/>
+          </a:ln>
+        </p:spPr>
+        <p:txBody>
+          <a:bodyPr rtlCol="0" anchor="ctr"/>
+          <a:lstStyle/>
+          <a:p>
+            <a:pPr algn="ctr"/>
+          </a:p>
+        </p:txBody>
+      </p:sp>
+      <p:sp>
+        <p:nvSpPr>
+          <p:cNvPr id="5" name="TextBox 4"/>
+          <p:cNvSpPr txBox="1"/>
+          <p:nvPr/>
+        </p:nvSpPr>
+        <p:spPr>
+          <a:xfrm>
+            <a:off x="10911535" y="6473952"/>
+            <a:ext cx="822960" cy="274320"/>
+          </a:xfrm>
+          <a:prstGeom prst="rect">
+            <a:avLst/>
+          </a:prstGeom>
+          <a:noFill/>
+        </p:spPr>
+        <p:txBody>
+          <a:bodyPr wrap="square" anchor="t"/>
+          <a:lstStyle/>
+          <a:p>
+            <a:pPr algn="r" eaLnBrk="0">
+              <a:lnSpc>
+                <a:spcPct val="110000"/>
+              </a:lnSpc>
+            </a:pPr>
+            <a:r>
+              <a:rPr sz="1000" b="0">
+                <a:solidFill>
+                  <a:srgbClr val="556175"/>
+                </a:solidFill>
+                <a:latin typeface="맑은 고딕"/>
+                <a:ea typeface="맑은 고딕"/>
+                <a:cs typeface="맑은 고딕"/>
+              </a:rPr>
+              <a:t>31</a:t>
+            </a:r>
+          </a:p>
+        </p:txBody>
+      </p:sp>
+      <p:sp>
+        <p:nvSpPr>
+          <p:cNvPr id="6" name="Rounded Rectangle 5"/>
+          <p:cNvSpPr/>
+          <p:nvPr/>
+        </p:nvSpPr>
+        <p:spPr>
+          <a:xfrm>
+            <a:off x="548640" y="1627632"/>
+            <a:ext cx="11094415" cy="704088"/>
+          </a:xfrm>
+          <a:prstGeom prst="roundRect">
+            <a:avLst>
+              <a:gd name="adj" fmla="val 5000"/>
+            </a:avLst>
+          </a:prstGeom>
+          <a:solidFill>
+            <a:srgbClr val="E7F3FD"/>
+          </a:solidFill>
+          <a:ln>
+            <a:noFill/>
+          </a:ln>
+        </p:spPr>
+        <p:txBody>
+          <a:bodyPr rtlCol="0" anchor="ctr"/>
+          <a:lstStyle/>
+          <a:p>
+            <a:pPr algn="ctr"/>
+          </a:p>
+        </p:txBody>
+      </p:sp>
+      <p:sp>
+        <p:nvSpPr>
+          <p:cNvPr id="7" name="TextBox 6"/>
+          <p:cNvSpPr txBox="1"/>
+          <p:nvPr/>
+        </p:nvSpPr>
+        <p:spPr>
+          <a:xfrm>
+            <a:off x="777240" y="1627632"/>
+            <a:ext cx="10637215" cy="704088"/>
+          </a:xfrm>
+          <a:prstGeom prst="rect">
+            <a:avLst/>
+          </a:prstGeom>
+          <a:noFill/>
+        </p:spPr>
+        <p:txBody>
+          <a:bodyPr wrap="square" anchor="ctr"/>
+          <a:lstStyle/>
+          <a:p>
+            <a:pPr algn="l" eaLnBrk="0">
+              <a:lnSpc>
+                <a:spcPct val="110000"/>
+              </a:lnSpc>
+            </a:pPr>
+            <a:r>
+              <a:rPr sz="1900" b="1">
+                <a:solidFill>
+                  <a:srgbClr val="13294B"/>
+                </a:solidFill>
+                <a:latin typeface="맑은 고딕"/>
+                <a:ea typeface="맑은 고딕"/>
+                <a:cs typeface="맑은 고딕"/>
+              </a:rPr>
+              <a:t>이 장면이 보여 주는 실행 고리의 단계는?</a:t>
+            </a:r>
+          </a:p>
+        </p:txBody>
+      </p:sp>
+      <p:sp>
+        <p:nvSpPr>
+          <p:cNvPr id="8" name="Rounded Rectangle 7"/>
+          <p:cNvSpPr/>
+          <p:nvPr/>
+        </p:nvSpPr>
+        <p:spPr>
+          <a:xfrm>
+            <a:off x="548640" y="2560320"/>
+            <a:ext cx="11094415" cy="822960"/>
+          </a:xfrm>
+          <a:prstGeom prst="roundRect">
+            <a:avLst>
+              <a:gd name="adj" fmla="val 8000"/>
+            </a:avLst>
+          </a:prstGeom>
+          <a:solidFill>
+            <a:srgbClr val="F3F6F9"/>
+          </a:solidFill>
+          <a:ln>
+            <a:noFill/>
+          </a:ln>
+        </p:spPr>
+        <p:txBody>
+          <a:bodyPr rtlCol="0" anchor="ctr"/>
+          <a:lstStyle/>
+          <a:p>
+            <a:pPr algn="ctr"/>
+          </a:p>
+        </p:txBody>
+      </p:sp>
+      <p:sp>
+        <p:nvSpPr>
+          <p:cNvPr id="9" name="Oval 8"/>
+          <p:cNvSpPr/>
+          <p:nvPr/>
+        </p:nvSpPr>
+        <p:spPr>
+          <a:xfrm>
+            <a:off x="731520" y="2788920"/>
+            <a:ext cx="365760" cy="365760"/>
+          </a:xfrm>
+          <a:prstGeom prst="ellipse">
+            <a:avLst/>
+          </a:prstGeom>
+          <a:solidFill>
+            <a:srgbClr val="13294B"/>
+          </a:solidFill>
+          <a:ln>
+            <a:noFill/>
+          </a:ln>
+        </p:spPr>
+        <p:txBody>
+          <a:bodyPr rtlCol="0" anchor="ctr"/>
+          <a:lstStyle/>
+          <a:p>
+            <a:pPr algn="ctr"/>
+          </a:p>
+        </p:txBody>
+      </p:sp>
+      <p:sp>
+        <p:nvSpPr>
+          <p:cNvPr id="10" name="TextBox 9"/>
+          <p:cNvSpPr txBox="1"/>
+          <p:nvPr/>
+        </p:nvSpPr>
+        <p:spPr>
+          <a:xfrm>
+            <a:off x="731520" y="2788920"/>
+            <a:ext cx="365760" cy="365760"/>
+          </a:xfrm>
+          <a:prstGeom prst="rect">
+            <a:avLst/>
+          </a:prstGeom>
+          <a:noFill/>
+        </p:spPr>
+        <p:txBody>
+          <a:bodyPr wrap="square" anchor="ctr"/>
+          <a:lstStyle/>
+          <a:p>
+            <a:pPr algn="ctr" eaLnBrk="0">
+              <a:lnSpc>
+                <a:spcPct val="110000"/>
+              </a:lnSpc>
+            </a:pPr>
+            <a:r>
+              <a:rPr sz="1300" b="1">
+                <a:solidFill>
+                  <a:srgbClr val="FFFFFF"/>
+                </a:solidFill>
+                <a:latin typeface="맑은 고딕"/>
+                <a:ea typeface="맑은 고딕"/>
+                <a:cs typeface="맑은 고딕"/>
+              </a:rPr>
+              <a:t>1</a:t>
+            </a:r>
+          </a:p>
+        </p:txBody>
+      </p:sp>
+      <p:sp>
+        <p:nvSpPr>
+          <p:cNvPr id="11" name="TextBox 10"/>
+          <p:cNvSpPr txBox="1"/>
+          <p:nvPr/>
+        </p:nvSpPr>
+        <p:spPr>
+          <a:xfrm>
+            <a:off x="1234440" y="2514600"/>
+            <a:ext cx="10225735" cy="914400"/>
+          </a:xfrm>
+          <a:prstGeom prst="rect">
+            <a:avLst/>
+          </a:prstGeom>
+          <a:noFill/>
+        </p:spPr>
+        <p:txBody>
+          <a:bodyPr wrap="square" anchor="ctr"/>
+          <a:lstStyle/>
+          <a:p>
+            <a:pPr algn="l" eaLnBrk="0">
+              <a:lnSpc>
+                <a:spcPct val="110000"/>
+              </a:lnSpc>
+            </a:pPr>
+            <a:r>
+              <a:rPr sz="1550" b="1">
+                <a:solidFill>
+                  <a:srgbClr val="1F2A3A"/>
+                </a:solidFill>
+                <a:latin typeface="맑은 고딕"/>
+                <a:ea typeface="맑은 고딕"/>
+                <a:cs typeface="맑은 고딕"/>
+              </a:rPr>
+              <a:t>요청 해석 — 맡은 업무와 입력을 읽은 것이다</a:t>
+            </a:r>
+          </a:p>
+        </p:txBody>
+      </p:sp>
+      <p:sp>
+        <p:nvSpPr>
+          <p:cNvPr id="12" name="Rounded Rectangle 11"/>
+          <p:cNvSpPr/>
+          <p:nvPr/>
+        </p:nvSpPr>
+        <p:spPr>
+          <a:xfrm>
+            <a:off x="548640" y="3474720"/>
+            <a:ext cx="11094415" cy="822960"/>
+          </a:xfrm>
+          <a:prstGeom prst="roundRect">
+            <a:avLst>
+              <a:gd name="adj" fmla="val 8000"/>
+            </a:avLst>
+          </a:prstGeom>
+          <a:solidFill>
+            <a:srgbClr val="F3F6F9"/>
+          </a:solidFill>
+          <a:ln>
+            <a:noFill/>
+          </a:ln>
+        </p:spPr>
+        <p:txBody>
+          <a:bodyPr rtlCol="0" anchor="ctr"/>
+          <a:lstStyle/>
+          <a:p>
+            <a:pPr algn="ctr"/>
+          </a:p>
+        </p:txBody>
+      </p:sp>
+      <p:sp>
+        <p:nvSpPr>
+          <p:cNvPr id="13" name="Oval 12"/>
+          <p:cNvSpPr/>
+          <p:nvPr/>
+        </p:nvSpPr>
+        <p:spPr>
+          <a:xfrm>
+            <a:off x="731520" y="3703320"/>
+            <a:ext cx="365760" cy="365760"/>
+          </a:xfrm>
+          <a:prstGeom prst="ellipse">
+            <a:avLst/>
+          </a:prstGeom>
+          <a:solidFill>
+            <a:srgbClr val="13294B"/>
+          </a:solidFill>
+          <a:ln>
+            <a:noFill/>
+          </a:ln>
+        </p:spPr>
+        <p:txBody>
+          <a:bodyPr rtlCol="0" anchor="ctr"/>
+          <a:lstStyle/>
+          <a:p>
+            <a:pPr algn="ctr"/>
+          </a:p>
+        </p:txBody>
+      </p:sp>
+      <p:sp>
+        <p:nvSpPr>
+          <p:cNvPr id="14" name="TextBox 13"/>
+          <p:cNvSpPr txBox="1"/>
+          <p:nvPr/>
+        </p:nvSpPr>
+        <p:spPr>
+          <a:xfrm>
+            <a:off x="731520" y="3703320"/>
+            <a:ext cx="365760" cy="365760"/>
+          </a:xfrm>
+          <a:prstGeom prst="rect">
+            <a:avLst/>
+          </a:prstGeom>
+          <a:noFill/>
+        </p:spPr>
+        <p:txBody>
+          <a:bodyPr wrap="square" anchor="ctr"/>
+          <a:lstStyle/>
+          <a:p>
+            <a:pPr algn="ctr" eaLnBrk="0">
+              <a:lnSpc>
+                <a:spcPct val="110000"/>
+              </a:lnSpc>
+            </a:pPr>
+            <a:r>
+              <a:rPr sz="1300" b="1">
+                <a:solidFill>
+                  <a:srgbClr val="FFFFFF"/>
+                </a:solidFill>
+                <a:latin typeface="맑은 고딕"/>
+                <a:ea typeface="맑은 고딕"/>
+                <a:cs typeface="맑은 고딕"/>
+              </a:rPr>
+              <a:t>2</a:t>
+            </a:r>
+          </a:p>
+        </p:txBody>
+      </p:sp>
+      <p:sp>
+        <p:nvSpPr>
+          <p:cNvPr id="15" name="TextBox 14"/>
+          <p:cNvSpPr txBox="1"/>
+          <p:nvPr/>
+        </p:nvSpPr>
+        <p:spPr>
+          <a:xfrm>
+            <a:off x="1234440" y="3429000"/>
+            <a:ext cx="10225735" cy="914400"/>
+          </a:xfrm>
+          <a:prstGeom prst="rect">
+            <a:avLst/>
+          </a:prstGeom>
+          <a:noFill/>
+        </p:spPr>
+        <p:txBody>
+          <a:bodyPr wrap="square" anchor="ctr"/>
+          <a:lstStyle/>
+          <a:p>
+            <a:pPr algn="l" eaLnBrk="0">
+              <a:lnSpc>
+                <a:spcPct val="110000"/>
+              </a:lnSpc>
+            </a:pPr>
+            <a:r>
+              <a:rPr sz="1550" b="1">
+                <a:solidFill>
+                  <a:srgbClr val="1F2A3A"/>
+                </a:solidFill>
+                <a:latin typeface="맑은 고딕"/>
+                <a:ea typeface="맑은 고딕"/>
+                <a:cs typeface="맑은 고딕"/>
+              </a:rPr>
+              <a:t>결과 관찰에 이은 다음 호출 — 앞의 결과가 다음 입력을 정했다</a:t>
+            </a:r>
+          </a:p>
+        </p:txBody>
+      </p:sp>
+      <p:sp>
+        <p:nvSpPr>
+          <p:cNvPr id="16" name="Rounded Rectangle 15"/>
+          <p:cNvSpPr/>
+          <p:nvPr/>
+        </p:nvSpPr>
+        <p:spPr>
+          <a:xfrm>
+            <a:off x="548640" y="4389120"/>
+            <a:ext cx="11094415" cy="822960"/>
+          </a:xfrm>
+          <a:prstGeom prst="roundRect">
+            <a:avLst>
+              <a:gd name="adj" fmla="val 8000"/>
+            </a:avLst>
+          </a:prstGeom>
+          <a:solidFill>
+            <a:srgbClr val="F3F6F9"/>
+          </a:solidFill>
+          <a:ln>
+            <a:noFill/>
+          </a:ln>
+        </p:spPr>
+        <p:txBody>
+          <a:bodyPr rtlCol="0" anchor="ctr"/>
+          <a:lstStyle/>
+          <a:p>
+            <a:pPr algn="ctr"/>
+          </a:p>
+        </p:txBody>
+      </p:sp>
+      <p:sp>
+        <p:nvSpPr>
+          <p:cNvPr id="17" name="Oval 16"/>
+          <p:cNvSpPr/>
+          <p:nvPr/>
+        </p:nvSpPr>
+        <p:spPr>
+          <a:xfrm>
+            <a:off x="731520" y="4617720"/>
+            <a:ext cx="365760" cy="365760"/>
+          </a:xfrm>
+          <a:prstGeom prst="ellipse">
+            <a:avLst/>
+          </a:prstGeom>
+          <a:solidFill>
+            <a:srgbClr val="13294B"/>
+          </a:solidFill>
+          <a:ln>
+            <a:noFill/>
+          </a:ln>
+        </p:spPr>
+        <p:txBody>
+          <a:bodyPr rtlCol="0" anchor="ctr"/>
+          <a:lstStyle/>
+          <a:p>
+            <a:pPr algn="ctr"/>
+          </a:p>
+        </p:txBody>
+      </p:sp>
+      <p:sp>
+        <p:nvSpPr>
+          <p:cNvPr id="18" name="TextBox 17"/>
+          <p:cNvSpPr txBox="1"/>
+          <p:nvPr/>
+        </p:nvSpPr>
+        <p:spPr>
+          <a:xfrm>
+            <a:off x="731520" y="4617720"/>
+            <a:ext cx="365760" cy="365760"/>
+          </a:xfrm>
+          <a:prstGeom prst="rect">
+            <a:avLst/>
+          </a:prstGeom>
+          <a:noFill/>
+        </p:spPr>
+        <p:txBody>
+          <a:bodyPr wrap="square" anchor="ctr"/>
+          <a:lstStyle/>
+          <a:p>
+            <a:pPr algn="ctr" eaLnBrk="0">
+              <a:lnSpc>
+                <a:spcPct val="110000"/>
+              </a:lnSpc>
+            </a:pPr>
+            <a:r>
+              <a:rPr sz="1300" b="1">
+                <a:solidFill>
+                  <a:srgbClr val="FFFFFF"/>
+                </a:solidFill>
+                <a:latin typeface="맑은 고딕"/>
+                <a:ea typeface="맑은 고딕"/>
+                <a:cs typeface="맑은 고딕"/>
+              </a:rPr>
+              <a:t>3</a:t>
+            </a:r>
+          </a:p>
+        </p:txBody>
+      </p:sp>
+      <p:sp>
+        <p:nvSpPr>
+          <p:cNvPr id="19" name="TextBox 18"/>
+          <p:cNvSpPr txBox="1"/>
+          <p:nvPr/>
+        </p:nvSpPr>
+        <p:spPr>
+          <a:xfrm>
+            <a:off x="1234440" y="4343400"/>
+            <a:ext cx="10225735" cy="914400"/>
+          </a:xfrm>
+          <a:prstGeom prst="rect">
+            <a:avLst/>
+          </a:prstGeom>
+          <a:noFill/>
+        </p:spPr>
+        <p:txBody>
+          <a:bodyPr wrap="square" anchor="ctr"/>
+          <a:lstStyle/>
+          <a:p>
+            <a:pPr algn="l" eaLnBrk="0">
+              <a:lnSpc>
+                <a:spcPct val="110000"/>
+              </a:lnSpc>
+            </a:pPr>
+            <a:r>
+              <a:rPr sz="1550" b="1">
+                <a:solidFill>
+                  <a:srgbClr val="1F2A3A"/>
+                </a:solidFill>
+                <a:latin typeface="맑은 고딕"/>
+                <a:ea typeface="맑은 고딕"/>
+                <a:cs typeface="맑은 고딕"/>
+              </a:rPr>
+              <a:t>재시도 — 뜻대로 되지 않은 호출을 다시 부른 것이다</a:t>
+            </a:r>
+          </a:p>
+        </p:txBody>
+      </p:sp>
+      <p:sp>
+        <p:nvSpPr>
+          <p:cNvPr id="20" name="Rounded Rectangle 19"/>
+          <p:cNvSpPr/>
+          <p:nvPr/>
+        </p:nvSpPr>
+        <p:spPr>
+          <a:xfrm>
+            <a:off x="548640" y="5303520"/>
+            <a:ext cx="11094415" cy="822960"/>
+          </a:xfrm>
+          <a:prstGeom prst="roundRect">
+            <a:avLst>
+              <a:gd name="adj" fmla="val 8000"/>
+            </a:avLst>
+          </a:prstGeom>
+          <a:solidFill>
+            <a:srgbClr val="F3F6F9"/>
+          </a:solidFill>
+          <a:ln>
+            <a:noFill/>
+          </a:ln>
+        </p:spPr>
+        <p:txBody>
+          <a:bodyPr rtlCol="0" anchor="ctr"/>
+          <a:lstStyle/>
+          <a:p>
+            <a:pPr algn="ctr"/>
+          </a:p>
+        </p:txBody>
+      </p:sp>
+      <p:sp>
+        <p:nvSpPr>
+          <p:cNvPr id="21" name="Oval 20"/>
+          <p:cNvSpPr/>
+          <p:nvPr/>
+        </p:nvSpPr>
+        <p:spPr>
+          <a:xfrm>
+            <a:off x="731520" y="5532120"/>
+            <a:ext cx="365760" cy="365760"/>
+          </a:xfrm>
+          <a:prstGeom prst="ellipse">
+            <a:avLst/>
+          </a:prstGeom>
+          <a:solidFill>
+            <a:srgbClr val="13294B"/>
+          </a:solidFill>
+          <a:ln>
+            <a:noFill/>
+          </a:ln>
+        </p:spPr>
+        <p:txBody>
+          <a:bodyPr rtlCol="0" anchor="ctr"/>
+          <a:lstStyle/>
+          <a:p>
+            <a:pPr algn="ctr"/>
+          </a:p>
+        </p:txBody>
+      </p:sp>
+      <p:sp>
+        <p:nvSpPr>
+          <p:cNvPr id="22" name="TextBox 21"/>
+          <p:cNvSpPr txBox="1"/>
+          <p:nvPr/>
+        </p:nvSpPr>
+        <p:spPr>
+          <a:xfrm>
+            <a:off x="731520" y="5532120"/>
+            <a:ext cx="365760" cy="365760"/>
+          </a:xfrm>
+          <a:prstGeom prst="rect">
+            <a:avLst/>
+          </a:prstGeom>
+          <a:noFill/>
+        </p:spPr>
+        <p:txBody>
+          <a:bodyPr wrap="square" anchor="ctr"/>
+          <a:lstStyle/>
+          <a:p>
+            <a:pPr algn="ctr" eaLnBrk="0">
+              <a:lnSpc>
+                <a:spcPct val="110000"/>
+              </a:lnSpc>
+            </a:pPr>
+            <a:r>
+              <a:rPr sz="1300" b="1">
+                <a:solidFill>
+                  <a:srgbClr val="FFFFFF"/>
+                </a:solidFill>
+                <a:latin typeface="맑은 고딕"/>
+                <a:ea typeface="맑은 고딕"/>
+                <a:cs typeface="맑은 고딕"/>
+              </a:rPr>
+              <a:t>4</a:t>
+            </a:r>
+          </a:p>
+        </p:txBody>
+      </p:sp>
+      <p:sp>
+        <p:nvSpPr>
+          <p:cNvPr id="23" name="TextBox 22"/>
+          <p:cNvSpPr txBox="1"/>
+          <p:nvPr/>
+        </p:nvSpPr>
+        <p:spPr>
+          <a:xfrm>
+            <a:off x="1234440" y="5257800"/>
+            <a:ext cx="10225735" cy="914400"/>
+          </a:xfrm>
+          <a:prstGeom prst="rect">
+            <a:avLst/>
+          </a:prstGeom>
+          <a:noFill/>
+        </p:spPr>
+        <p:txBody>
+          <a:bodyPr wrap="square" anchor="ctr"/>
+          <a:lstStyle/>
+          <a:p>
+            <a:pPr algn="l" eaLnBrk="0">
+              <a:lnSpc>
+                <a:spcPct val="110000"/>
+              </a:lnSpc>
+            </a:pPr>
+            <a:r>
+              <a:rPr sz="1550" b="1">
+                <a:solidFill>
+                  <a:srgbClr val="1F2A3A"/>
+                </a:solidFill>
+                <a:latin typeface="맑은 고딕"/>
+                <a:ea typeface="맑은 고딕"/>
+                <a:cs typeface="맑은 고딕"/>
+              </a:rPr>
+              <a:t>종료 — 산출물을 제출하고 끝낸 것이다</a:t>
+            </a:r>
+          </a:p>
+        </p:txBody>
+      </p:sp>
+    </p:spTree>
+  </p:cSld>
+  <p:clrMapOvr>
+    <a:masterClrMapping/>
+  </p:clrMapOvr>
+</p:sld>
+</file>
+
+<file path=ppt/slides/slide32.xml><?xml version="1.0" encoding="utf-8"?>
+<p:sld xmlns:a="http://schemas.openxmlformats.org/drawingml/2006/main" xmlns:p="http://schemas.openxmlformats.org/presentationml/2006/main" xmlns:r="http://schemas.openxmlformats.org/officeDocument/2006/relationships">
+  <p:cSld>
+    <p:bg>
+      <p:bgPr>
+        <a:solidFill>
+          <a:srgbClr val="FFFFFF"/>
+        </a:solidFill>
+        <a:effectLst/>
+      </p:bgPr>
+    </p:bg>
+    <p:spTree>
+      <p:nvGrpSpPr>
+        <p:cNvPr id="1" name=""/>
+        <p:cNvGrpSpPr/>
+        <p:nvPr/>
+      </p:nvGrpSpPr>
+      <p:grpSpPr/>
+      <p:sp>
+        <p:nvSpPr>
+          <p:cNvPr id="2" name="TextBox 1"/>
+          <p:cNvSpPr txBox="1"/>
+          <p:nvPr/>
+        </p:nvSpPr>
+        <p:spPr>
+          <a:xfrm>
+            <a:off x="457200" y="329184"/>
+            <a:ext cx="11277295" cy="603504"/>
+          </a:xfrm>
+          <a:prstGeom prst="rect">
+            <a:avLst/>
+          </a:prstGeom>
+          <a:noFill/>
+        </p:spPr>
+        <p:txBody>
+          <a:bodyPr wrap="square" anchor="ctr"/>
+          <a:lstStyle/>
+          <a:p>
+            <a:pPr algn="l" eaLnBrk="0">
+              <a:lnSpc>
+                <a:spcPct val="110000"/>
+              </a:lnSpc>
+            </a:pPr>
+            <a:r>
+              <a:rPr sz="2800" b="1">
+                <a:solidFill>
+                  <a:srgbClr val="13294B"/>
+                </a:solidFill>
+                <a:latin typeface="맑은 고딕"/>
+                <a:ea typeface="맑은 고딕"/>
+                <a:cs typeface="맑은 고딕"/>
+              </a:rPr>
+              <a:t>Quiz 2. 읽지 못한 값과 묵은 값</a:t>
+            </a:r>
+          </a:p>
+        </p:txBody>
+      </p:sp>
+      <p:sp>
+        <p:nvSpPr>
+          <p:cNvPr id="3" name="TextBox 2"/>
+          <p:cNvSpPr txBox="1"/>
+          <p:nvPr/>
+        </p:nvSpPr>
+        <p:spPr>
+          <a:xfrm>
+            <a:off x="457200" y="932688"/>
+            <a:ext cx="11277295" cy="420624"/>
+          </a:xfrm>
+          <a:prstGeom prst="rect">
+            <a:avLst/>
+          </a:prstGeom>
+          <a:noFill/>
+        </p:spPr>
+        <p:txBody>
+          <a:bodyPr wrap="square" anchor="ctr"/>
+          <a:lstStyle/>
+          <a:p>
+            <a:pPr algn="l" eaLnBrk="0">
+              <a:lnSpc>
+                <a:spcPct val="110000"/>
+              </a:lnSpc>
+            </a:pPr>
+            <a:r>
+              <a:rPr sz="1600" b="0">
+                <a:solidFill>
+                  <a:srgbClr val="556175"/>
+                </a:solidFill>
+                <a:latin typeface="맑은 고딕"/>
+                <a:ea typeface="맑은 고딕"/>
+                <a:cs typeface="맑은 고딕"/>
+              </a:rPr>
+              <a:t>에이전트가 원인을 가리려는데 유온의 최신 값은 3분 전의 것이었고, 냉각 효율의 조회는 실패했다.</a:t>
+            </a:r>
+          </a:p>
+        </p:txBody>
+      </p:sp>
+      <p:sp>
+        <p:nvSpPr>
+          <p:cNvPr id="4" name="Rectangle 3"/>
+          <p:cNvSpPr/>
+          <p:nvPr/>
+        </p:nvSpPr>
+        <p:spPr>
+          <a:xfrm>
+            <a:off x="548640" y="1408176"/>
+            <a:ext cx="11094415" cy="18288"/>
+          </a:xfrm>
+          <a:prstGeom prst="rect">
+            <a:avLst/>
+          </a:prstGeom>
+          <a:solidFill>
+            <a:srgbClr val="D3D9E1"/>
+          </a:solidFill>
+          <a:ln>
+            <a:noFill/>
+          </a:ln>
+        </p:spPr>
+        <p:txBody>
+          <a:bodyPr rtlCol="0" anchor="ctr"/>
+          <a:lstStyle/>
+          <a:p>
+            <a:pPr algn="ctr"/>
+          </a:p>
+        </p:txBody>
+      </p:sp>
+      <p:sp>
+        <p:nvSpPr>
+          <p:cNvPr id="5" name="TextBox 4"/>
+          <p:cNvSpPr txBox="1"/>
+          <p:nvPr/>
+        </p:nvSpPr>
+        <p:spPr>
+          <a:xfrm>
+            <a:off x="10911535" y="6473952"/>
+            <a:ext cx="822960" cy="274320"/>
+          </a:xfrm>
+          <a:prstGeom prst="rect">
+            <a:avLst/>
+          </a:prstGeom>
+          <a:noFill/>
+        </p:spPr>
+        <p:txBody>
+          <a:bodyPr wrap="square" anchor="t"/>
+          <a:lstStyle/>
+          <a:p>
+            <a:pPr algn="r" eaLnBrk="0">
+              <a:lnSpc>
+                <a:spcPct val="110000"/>
+              </a:lnSpc>
+            </a:pPr>
+            <a:r>
+              <a:rPr sz="1000" b="0">
+                <a:solidFill>
+                  <a:srgbClr val="556175"/>
+                </a:solidFill>
+                <a:latin typeface="맑은 고딕"/>
+                <a:ea typeface="맑은 고딕"/>
+                <a:cs typeface="맑은 고딕"/>
+              </a:rPr>
+              <a:t>32</a:t>
+            </a:r>
+          </a:p>
+        </p:txBody>
+      </p:sp>
+      <p:sp>
+        <p:nvSpPr>
+          <p:cNvPr id="6" name="Rounded Rectangle 5"/>
+          <p:cNvSpPr/>
+          <p:nvPr/>
+        </p:nvSpPr>
+        <p:spPr>
+          <a:xfrm>
+            <a:off x="548640" y="1627632"/>
+            <a:ext cx="11094415" cy="704088"/>
+          </a:xfrm>
+          <a:prstGeom prst="roundRect">
+            <a:avLst>
+              <a:gd name="adj" fmla="val 5000"/>
+            </a:avLst>
+          </a:prstGeom>
+          <a:solidFill>
+            <a:srgbClr val="E7F3FD"/>
+          </a:solidFill>
+          <a:ln>
+            <a:noFill/>
+          </a:ln>
+        </p:spPr>
+        <p:txBody>
+          <a:bodyPr rtlCol="0" anchor="ctr"/>
+          <a:lstStyle/>
+          <a:p>
+            <a:pPr algn="ctr"/>
+          </a:p>
+        </p:txBody>
+      </p:sp>
+      <p:sp>
+        <p:nvSpPr>
+          <p:cNvPr id="7" name="TextBox 6"/>
+          <p:cNvSpPr txBox="1"/>
+          <p:nvPr/>
+        </p:nvSpPr>
+        <p:spPr>
+          <a:xfrm>
+            <a:off x="777240" y="1627632"/>
+            <a:ext cx="10637215" cy="704088"/>
+          </a:xfrm>
+          <a:prstGeom prst="rect">
+            <a:avLst/>
+          </a:prstGeom>
+          <a:noFill/>
+        </p:spPr>
+        <p:txBody>
+          <a:bodyPr wrap="square" anchor="ctr"/>
+          <a:lstStyle/>
+          <a:p>
+            <a:pPr algn="l" eaLnBrk="0">
+              <a:lnSpc>
+                <a:spcPct val="110000"/>
+              </a:lnSpc>
+            </a:pPr>
+            <a:r>
+              <a:rPr sz="1900" b="1">
+                <a:solidFill>
+                  <a:srgbClr val="13294B"/>
+                </a:solidFill>
+                <a:latin typeface="맑은 고딕"/>
+                <a:ea typeface="맑은 고딕"/>
+                <a:cs typeface="맑은 고딕"/>
+              </a:rPr>
+              <a:t>이때 에이전트의 올바른 동작은?</a:t>
+            </a:r>
+          </a:p>
+        </p:txBody>
+      </p:sp>
+      <p:sp>
+        <p:nvSpPr>
+          <p:cNvPr id="8" name="Rounded Rectangle 7"/>
+          <p:cNvSpPr/>
+          <p:nvPr/>
+        </p:nvSpPr>
+        <p:spPr>
+          <a:xfrm>
+            <a:off x="548640" y="2560320"/>
+            <a:ext cx="11094415" cy="822960"/>
+          </a:xfrm>
+          <a:prstGeom prst="roundRect">
+            <a:avLst>
+              <a:gd name="adj" fmla="val 8000"/>
+            </a:avLst>
+          </a:prstGeom>
+          <a:solidFill>
+            <a:srgbClr val="F3F6F9"/>
+          </a:solidFill>
+          <a:ln>
+            <a:noFill/>
+          </a:ln>
+        </p:spPr>
+        <p:txBody>
+          <a:bodyPr rtlCol="0" anchor="ctr"/>
+          <a:lstStyle/>
+          <a:p>
+            <a:pPr algn="ctr"/>
+          </a:p>
+        </p:txBody>
+      </p:sp>
+      <p:sp>
+        <p:nvSpPr>
+          <p:cNvPr id="9" name="Oval 8"/>
+          <p:cNvSpPr/>
+          <p:nvPr/>
+        </p:nvSpPr>
+        <p:spPr>
+          <a:xfrm>
+            <a:off x="731520" y="2788920"/>
+            <a:ext cx="365760" cy="365760"/>
+          </a:xfrm>
+          <a:prstGeom prst="ellipse">
+            <a:avLst/>
+          </a:prstGeom>
+          <a:solidFill>
+            <a:srgbClr val="13294B"/>
+          </a:solidFill>
+          <a:ln>
+            <a:noFill/>
+          </a:ln>
+        </p:spPr>
+        <p:txBody>
+          <a:bodyPr rtlCol="0" anchor="ctr"/>
+          <a:lstStyle/>
+          <a:p>
+            <a:pPr algn="ctr"/>
+          </a:p>
+        </p:txBody>
+      </p:sp>
+      <p:sp>
+        <p:nvSpPr>
+          <p:cNvPr id="10" name="TextBox 9"/>
+          <p:cNvSpPr txBox="1"/>
+          <p:nvPr/>
+        </p:nvSpPr>
+        <p:spPr>
+          <a:xfrm>
+            <a:off x="731520" y="2788920"/>
+            <a:ext cx="365760" cy="365760"/>
+          </a:xfrm>
+          <a:prstGeom prst="rect">
+            <a:avLst/>
+          </a:prstGeom>
+          <a:noFill/>
+        </p:spPr>
+        <p:txBody>
+          <a:bodyPr wrap="square" anchor="ctr"/>
+          <a:lstStyle/>
+          <a:p>
+            <a:pPr algn="ctr" eaLnBrk="0">
+              <a:lnSpc>
+                <a:spcPct val="110000"/>
+              </a:lnSpc>
+            </a:pPr>
+            <a:r>
+              <a:rPr sz="1300" b="1">
+                <a:solidFill>
+                  <a:srgbClr val="FFFFFF"/>
+                </a:solidFill>
+                <a:latin typeface="맑은 고딕"/>
+                <a:ea typeface="맑은 고딕"/>
+                <a:cs typeface="맑은 고딕"/>
+              </a:rPr>
+              <a:t>1</a:t>
+            </a:r>
+          </a:p>
+        </p:txBody>
+      </p:sp>
+      <p:sp>
+        <p:nvSpPr>
+          <p:cNvPr id="11" name="TextBox 10"/>
+          <p:cNvSpPr txBox="1"/>
+          <p:nvPr/>
+        </p:nvSpPr>
+        <p:spPr>
+          <a:xfrm>
+            <a:off x="1234440" y="2514600"/>
+            <a:ext cx="10225735" cy="914400"/>
+          </a:xfrm>
+          <a:prstGeom prst="rect">
+            <a:avLst/>
+          </a:prstGeom>
+          <a:noFill/>
+        </p:spPr>
+        <p:txBody>
+          <a:bodyPr wrap="square" anchor="ctr"/>
+          <a:lstStyle/>
+          <a:p>
+            <a:pPr algn="l" eaLnBrk="0">
+              <a:lnSpc>
+                <a:spcPct val="110000"/>
+              </a:lnSpc>
+            </a:pPr>
+            <a:r>
+              <a:rPr sz="1550" b="1">
+                <a:solidFill>
+                  <a:srgbClr val="1F2A3A"/>
+                </a:solidFill>
+                <a:latin typeface="맑은 고딕"/>
+                <a:ea typeface="맑은 고딕"/>
+                <a:cs typeface="맑은 고딕"/>
+              </a:rPr>
+              <a:t>3분 전의 유온과 판별 기준 70 %를 써서 쿨러 핀 오염으로 제출한다</a:t>
+            </a:r>
+          </a:p>
+        </p:txBody>
+      </p:sp>
+      <p:sp>
+        <p:nvSpPr>
+          <p:cNvPr id="12" name="Rounded Rectangle 11"/>
+          <p:cNvSpPr/>
+          <p:nvPr/>
+        </p:nvSpPr>
+        <p:spPr>
+          <a:xfrm>
+            <a:off x="548640" y="3474720"/>
+            <a:ext cx="11094415" cy="822960"/>
+          </a:xfrm>
+          <a:prstGeom prst="roundRect">
+            <a:avLst>
+              <a:gd name="adj" fmla="val 8000"/>
+            </a:avLst>
+          </a:prstGeom>
+          <a:solidFill>
+            <a:srgbClr val="F3F6F9"/>
+          </a:solidFill>
+          <a:ln>
+            <a:noFill/>
+          </a:ln>
+        </p:spPr>
+        <p:txBody>
+          <a:bodyPr rtlCol="0" anchor="ctr"/>
+          <a:lstStyle/>
+          <a:p>
+            <a:pPr algn="ctr"/>
+          </a:p>
+        </p:txBody>
+      </p:sp>
+      <p:sp>
+        <p:nvSpPr>
+          <p:cNvPr id="13" name="Oval 12"/>
+          <p:cNvSpPr/>
+          <p:nvPr/>
+        </p:nvSpPr>
+        <p:spPr>
+          <a:xfrm>
+            <a:off x="731520" y="3703320"/>
+            <a:ext cx="365760" cy="365760"/>
+          </a:xfrm>
+          <a:prstGeom prst="ellipse">
+            <a:avLst/>
+          </a:prstGeom>
+          <a:solidFill>
+            <a:srgbClr val="13294B"/>
+          </a:solidFill>
+          <a:ln>
+            <a:noFill/>
+          </a:ln>
+        </p:spPr>
+        <p:txBody>
+          <a:bodyPr rtlCol="0" anchor="ctr"/>
+          <a:lstStyle/>
+          <a:p>
+            <a:pPr algn="ctr"/>
+          </a:p>
+        </p:txBody>
+      </p:sp>
+      <p:sp>
+        <p:nvSpPr>
+          <p:cNvPr id="14" name="TextBox 13"/>
+          <p:cNvSpPr txBox="1"/>
+          <p:nvPr/>
+        </p:nvSpPr>
+        <p:spPr>
+          <a:xfrm>
+            <a:off x="731520" y="3703320"/>
+            <a:ext cx="365760" cy="365760"/>
+          </a:xfrm>
+          <a:prstGeom prst="rect">
+            <a:avLst/>
+          </a:prstGeom>
+          <a:noFill/>
+        </p:spPr>
+        <p:txBody>
+          <a:bodyPr wrap="square" anchor="ctr"/>
+          <a:lstStyle/>
+          <a:p>
+            <a:pPr algn="ctr" eaLnBrk="0">
+              <a:lnSpc>
+                <a:spcPct val="110000"/>
+              </a:lnSpc>
+            </a:pPr>
+            <a:r>
+              <a:rPr sz="1300" b="1">
+                <a:solidFill>
+                  <a:srgbClr val="FFFFFF"/>
+                </a:solidFill>
+                <a:latin typeface="맑은 고딕"/>
+                <a:ea typeface="맑은 고딕"/>
+                <a:cs typeface="맑은 고딕"/>
+              </a:rPr>
+              <a:t>2</a:t>
+            </a:r>
+          </a:p>
+        </p:txBody>
+      </p:sp>
+      <p:sp>
+        <p:nvSpPr>
+          <p:cNvPr id="15" name="TextBox 14"/>
+          <p:cNvSpPr txBox="1"/>
+          <p:nvPr/>
+        </p:nvSpPr>
+        <p:spPr>
+          <a:xfrm>
+            <a:off x="1234440" y="3429000"/>
+            <a:ext cx="10225735" cy="914400"/>
+          </a:xfrm>
+          <a:prstGeom prst="rect">
+            <a:avLst/>
+          </a:prstGeom>
+          <a:noFill/>
+        </p:spPr>
+        <p:txBody>
+          <a:bodyPr wrap="square" anchor="ctr"/>
+          <a:lstStyle/>
+          <a:p>
+            <a:pPr algn="l" eaLnBrk="0">
+              <a:lnSpc>
+                <a:spcPct val="110000"/>
+              </a:lnSpc>
+            </a:pPr>
+            <a:r>
+              <a:rPr sz="1550" b="1">
+                <a:solidFill>
+                  <a:srgbClr val="1F2A3A"/>
+                </a:solidFill>
+                <a:latin typeface="맑은 고딕"/>
+                <a:ea typeface="맑은 고딕"/>
+                <a:cs typeface="맑은 고딕"/>
+              </a:rPr>
+              <a:t>냉각 효율을 0 %로 적고 유온을 가장 많이 내리는 조치를 추천한다</a:t>
+            </a:r>
+          </a:p>
+        </p:txBody>
+      </p:sp>
+      <p:sp>
+        <p:nvSpPr>
+          <p:cNvPr id="16" name="Rounded Rectangle 15"/>
+          <p:cNvSpPr/>
+          <p:nvPr/>
+        </p:nvSpPr>
+        <p:spPr>
+          <a:xfrm>
+            <a:off x="548640" y="4389120"/>
+            <a:ext cx="11094415" cy="822960"/>
+          </a:xfrm>
+          <a:prstGeom prst="roundRect">
+            <a:avLst>
+              <a:gd name="adj" fmla="val 8000"/>
+            </a:avLst>
+          </a:prstGeom>
+          <a:solidFill>
+            <a:srgbClr val="F3F6F9"/>
+          </a:solidFill>
+          <a:ln>
+            <a:noFill/>
+          </a:ln>
+        </p:spPr>
+        <p:txBody>
+          <a:bodyPr rtlCol="0" anchor="ctr"/>
+          <a:lstStyle/>
+          <a:p>
+            <a:pPr algn="ctr"/>
+          </a:p>
+        </p:txBody>
+      </p:sp>
+      <p:sp>
+        <p:nvSpPr>
+          <p:cNvPr id="17" name="Oval 16"/>
+          <p:cNvSpPr/>
+          <p:nvPr/>
+        </p:nvSpPr>
+        <p:spPr>
+          <a:xfrm>
+            <a:off x="731520" y="4617720"/>
+            <a:ext cx="365760" cy="365760"/>
+          </a:xfrm>
+          <a:prstGeom prst="ellipse">
+            <a:avLst/>
+          </a:prstGeom>
+          <a:solidFill>
+            <a:srgbClr val="13294B"/>
+          </a:solidFill>
+          <a:ln>
+            <a:noFill/>
+          </a:ln>
+        </p:spPr>
+        <p:txBody>
+          <a:bodyPr rtlCol="0" anchor="ctr"/>
+          <a:lstStyle/>
+          <a:p>
+            <a:pPr algn="ctr"/>
+          </a:p>
+        </p:txBody>
+      </p:sp>
+      <p:sp>
+        <p:nvSpPr>
+          <p:cNvPr id="18" name="TextBox 17"/>
+          <p:cNvSpPr txBox="1"/>
+          <p:nvPr/>
+        </p:nvSpPr>
+        <p:spPr>
+          <a:xfrm>
+            <a:off x="731520" y="4617720"/>
+            <a:ext cx="365760" cy="365760"/>
+          </a:xfrm>
+          <a:prstGeom prst="rect">
+            <a:avLst/>
+          </a:prstGeom>
+          <a:noFill/>
+        </p:spPr>
+        <p:txBody>
+          <a:bodyPr wrap="square" anchor="ctr"/>
+          <a:lstStyle/>
+          <a:p>
+            <a:pPr algn="ctr" eaLnBrk="0">
+              <a:lnSpc>
+                <a:spcPct val="110000"/>
+              </a:lnSpc>
+            </a:pPr>
+            <a:r>
+              <a:rPr sz="1300" b="1">
+                <a:solidFill>
+                  <a:srgbClr val="FFFFFF"/>
+                </a:solidFill>
+                <a:latin typeface="맑은 고딕"/>
+                <a:ea typeface="맑은 고딕"/>
+                <a:cs typeface="맑은 고딕"/>
+              </a:rPr>
+              <a:t>3</a:t>
+            </a:r>
+          </a:p>
+        </p:txBody>
+      </p:sp>
+      <p:sp>
+        <p:nvSpPr>
+          <p:cNvPr id="19" name="TextBox 18"/>
+          <p:cNvSpPr txBox="1"/>
+          <p:nvPr/>
+        </p:nvSpPr>
+        <p:spPr>
+          <a:xfrm>
+            <a:off x="1234440" y="4343400"/>
+            <a:ext cx="10225735" cy="914400"/>
+          </a:xfrm>
+          <a:prstGeom prst="rect">
+            <a:avLst/>
+          </a:prstGeom>
+          <a:noFill/>
+        </p:spPr>
+        <p:txBody>
+          <a:bodyPr wrap="square" anchor="ctr"/>
+          <a:lstStyle/>
+          <a:p>
+            <a:pPr algn="l" eaLnBrk="0">
+              <a:lnSpc>
+                <a:spcPct val="110000"/>
+              </a:lnSpc>
+            </a:pPr>
+            <a:r>
+              <a:rPr sz="1550" b="1">
+                <a:solidFill>
+                  <a:srgbClr val="1F2A3A"/>
+                </a:solidFill>
+                <a:latin typeface="맑은 고딕"/>
+                <a:ea typeface="맑은 고딕"/>
+                <a:cs typeface="맑은 고딕"/>
+              </a:rPr>
+              <a:t>원인 후보에 올라 있는 쿨러 핀 오염을 확인된 원인으로 적는다</a:t>
+            </a:r>
+          </a:p>
+        </p:txBody>
+      </p:sp>
+      <p:sp>
+        <p:nvSpPr>
+          <p:cNvPr id="20" name="Rounded Rectangle 19"/>
+          <p:cNvSpPr/>
+          <p:nvPr/>
+        </p:nvSpPr>
+        <p:spPr>
+          <a:xfrm>
+            <a:off x="548640" y="5303520"/>
+            <a:ext cx="11094415" cy="822960"/>
+          </a:xfrm>
+          <a:prstGeom prst="roundRect">
+            <a:avLst>
+              <a:gd name="adj" fmla="val 8000"/>
+            </a:avLst>
+          </a:prstGeom>
+          <a:solidFill>
+            <a:srgbClr val="F3F6F9"/>
+          </a:solidFill>
+          <a:ln>
+            <a:noFill/>
+          </a:ln>
+        </p:spPr>
+        <p:txBody>
+          <a:bodyPr rtlCol="0" anchor="ctr"/>
+          <a:lstStyle/>
+          <a:p>
+            <a:pPr algn="ctr"/>
+          </a:p>
+        </p:txBody>
+      </p:sp>
+      <p:sp>
+        <p:nvSpPr>
+          <p:cNvPr id="21" name="Oval 20"/>
+          <p:cNvSpPr/>
+          <p:nvPr/>
+        </p:nvSpPr>
+        <p:spPr>
+          <a:xfrm>
+            <a:off x="731520" y="5532120"/>
+            <a:ext cx="365760" cy="365760"/>
+          </a:xfrm>
+          <a:prstGeom prst="ellipse">
+            <a:avLst/>
+          </a:prstGeom>
+          <a:solidFill>
+            <a:srgbClr val="13294B"/>
+          </a:solidFill>
+          <a:ln>
+            <a:noFill/>
+          </a:ln>
+        </p:spPr>
+        <p:txBody>
+          <a:bodyPr rtlCol="0" anchor="ctr"/>
+          <a:lstStyle/>
+          <a:p>
+            <a:pPr algn="ctr"/>
+          </a:p>
+        </p:txBody>
+      </p:sp>
+      <p:sp>
+        <p:nvSpPr>
+          <p:cNvPr id="22" name="TextBox 21"/>
+          <p:cNvSpPr txBox="1"/>
+          <p:nvPr/>
+        </p:nvSpPr>
+        <p:spPr>
+          <a:xfrm>
+            <a:off x="731520" y="5532120"/>
+            <a:ext cx="365760" cy="365760"/>
+          </a:xfrm>
+          <a:prstGeom prst="rect">
+            <a:avLst/>
+          </a:prstGeom>
+          <a:noFill/>
+        </p:spPr>
+        <p:txBody>
+          <a:bodyPr wrap="square" anchor="ctr"/>
+          <a:lstStyle/>
+          <a:p>
+            <a:pPr algn="ctr" eaLnBrk="0">
+              <a:lnSpc>
+                <a:spcPct val="110000"/>
+              </a:lnSpc>
+            </a:pPr>
+            <a:r>
+              <a:rPr sz="1300" b="1">
+                <a:solidFill>
+                  <a:srgbClr val="FFFFFF"/>
+                </a:solidFill>
+                <a:latin typeface="맑은 고딕"/>
+                <a:ea typeface="맑은 고딕"/>
+                <a:cs typeface="맑은 고딕"/>
+              </a:rPr>
+              <a:t>4</a:t>
+            </a:r>
+          </a:p>
+        </p:txBody>
+      </p:sp>
+      <p:sp>
+        <p:nvSpPr>
+          <p:cNvPr id="23" name="TextBox 22"/>
+          <p:cNvSpPr txBox="1"/>
+          <p:nvPr/>
+        </p:nvSpPr>
+        <p:spPr>
+          <a:xfrm>
+            <a:off x="1234440" y="5257800"/>
+            <a:ext cx="10225735" cy="914400"/>
+          </a:xfrm>
+          <a:prstGeom prst="rect">
+            <a:avLst/>
+          </a:prstGeom>
+          <a:noFill/>
+        </p:spPr>
+        <p:txBody>
+          <a:bodyPr wrap="square" anchor="ctr"/>
+          <a:lstStyle/>
+          <a:p>
+            <a:pPr algn="l" eaLnBrk="0">
+              <a:lnSpc>
+                <a:spcPct val="110000"/>
+              </a:lnSpc>
+            </a:pPr>
+            <a:r>
+              <a:rPr sz="1550" b="1">
+                <a:solidFill>
+                  <a:srgbClr val="1F2A3A"/>
+                </a:solidFill>
+                <a:latin typeface="맑은 고딕"/>
+                <a:ea typeface="맑은 고딕"/>
+                <a:cs typeface="맑은 고딕"/>
+              </a:rPr>
+              <a:t>원인을 적지 않고, 확인하지 못한 값과 그 이유를 담아 보류한다</a:t>
+            </a:r>
+          </a:p>
+        </p:txBody>
+      </p:sp>
+    </p:spTree>
+  </p:cSld>
+  <p:clrMapOvr>
+    <a:masterClrMapping/>
+  </p:clrMapOvr>
+</p:sld>
+</file>
+
+<file path=ppt/slides/slide33.xml><?xml version="1.0" encoding="utf-8"?>
+<p:sld xmlns:a="http://schemas.openxmlformats.org/drawingml/2006/main" xmlns:p="http://schemas.openxmlformats.org/presentationml/2006/main" xmlns:r="http://schemas.openxmlformats.org/officeDocument/2006/relationships">
+  <p:cSld>
+    <p:bg>
+      <p:bgPr>
+        <a:solidFill>
+          <a:srgbClr val="FFFFFF"/>
+        </a:solidFill>
+        <a:effectLst/>
+      </p:bgPr>
+    </p:bg>
+    <p:spTree>
+      <p:nvGrpSpPr>
+        <p:cNvPr id="1" name=""/>
+        <p:cNvGrpSpPr/>
+        <p:nvPr/>
+      </p:nvGrpSpPr>
+      <p:grpSpPr/>
+      <p:sp>
+        <p:nvSpPr>
+          <p:cNvPr id="2" name="TextBox 1"/>
+          <p:cNvSpPr txBox="1"/>
+          <p:nvPr/>
+        </p:nvSpPr>
+        <p:spPr>
+          <a:xfrm>
+            <a:off x="457200" y="329184"/>
+            <a:ext cx="11277295" cy="603504"/>
+          </a:xfrm>
+          <a:prstGeom prst="rect">
+            <a:avLst/>
+          </a:prstGeom>
+          <a:noFill/>
+        </p:spPr>
+        <p:txBody>
+          <a:bodyPr wrap="square" anchor="ctr"/>
+          <a:lstStyle/>
+          <a:p>
+            <a:pPr algn="l" eaLnBrk="0">
+              <a:lnSpc>
+                <a:spcPct val="110000"/>
+              </a:lnSpc>
+            </a:pPr>
+            <a:r>
+              <a:rPr sz="2800" b="1">
+                <a:solidFill>
+                  <a:srgbClr val="13294B"/>
+                </a:solidFill>
+                <a:latin typeface="맑은 고딕"/>
+                <a:ea typeface="맑은 고딕"/>
+                <a:cs typeface="맑은 고딕"/>
+              </a:rPr>
+              <a:t>Quiz 3. 허용되지 않은 도구</a:t>
+            </a:r>
+          </a:p>
+        </p:txBody>
+      </p:sp>
+      <p:sp>
+        <p:nvSpPr>
+          <p:cNvPr id="3" name="TextBox 2"/>
+          <p:cNvSpPr txBox="1"/>
+          <p:nvPr/>
+        </p:nvSpPr>
+        <p:spPr>
+          <a:xfrm>
+            <a:off x="457200" y="932688"/>
+            <a:ext cx="11277295" cy="420624"/>
+          </a:xfrm>
+          <a:prstGeom prst="rect">
+            <a:avLst/>
+          </a:prstGeom>
+          <a:noFill/>
+        </p:spPr>
+        <p:txBody>
+          <a:bodyPr wrap="square" anchor="ctr"/>
+          <a:lstStyle/>
+          <a:p>
+            <a:pPr algn="l" eaLnBrk="0">
+              <a:lnSpc>
+                <a:spcPct val="110000"/>
+              </a:lnSpc>
+            </a:pPr>
+            <a:r>
+              <a:rPr sz="1600" b="0">
+                <a:solidFill>
+                  <a:srgbClr val="556175"/>
+                </a:solidFill>
+                <a:latin typeface="맑은 고딕"/>
+                <a:ea typeface="맑은 고딕"/>
+                <a:cs typeface="맑은 고딕"/>
+              </a:rPr>
+              <a:t>에이전트가 일을 끝내려면 허용 목록에 없는 도구가 필요하다고 판단했고, 유온은 계속 오르고 있다.</a:t>
+            </a:r>
+          </a:p>
+        </p:txBody>
+      </p:sp>
+      <p:sp>
+        <p:nvSpPr>
+          <p:cNvPr id="4" name="Rectangle 3"/>
+          <p:cNvSpPr/>
+          <p:nvPr/>
+        </p:nvSpPr>
+        <p:spPr>
+          <a:xfrm>
+            <a:off x="548640" y="1408176"/>
+            <a:ext cx="11094415" cy="18288"/>
+          </a:xfrm>
+          <a:prstGeom prst="rect">
+            <a:avLst/>
+          </a:prstGeom>
+          <a:solidFill>
+            <a:srgbClr val="D3D9E1"/>
+          </a:solidFill>
+          <a:ln>
+            <a:noFill/>
+          </a:ln>
+        </p:spPr>
+        <p:txBody>
+          <a:bodyPr rtlCol="0" anchor="ctr"/>
+          <a:lstStyle/>
+          <a:p>
+            <a:pPr algn="ctr"/>
+          </a:p>
+        </p:txBody>
+      </p:sp>
+      <p:sp>
+        <p:nvSpPr>
+          <p:cNvPr id="5" name="TextBox 4"/>
+          <p:cNvSpPr txBox="1"/>
+          <p:nvPr/>
+        </p:nvSpPr>
+        <p:spPr>
+          <a:xfrm>
+            <a:off x="10911535" y="6473952"/>
+            <a:ext cx="822960" cy="274320"/>
+          </a:xfrm>
+          <a:prstGeom prst="rect">
+            <a:avLst/>
+          </a:prstGeom>
+          <a:noFill/>
+        </p:spPr>
+        <p:txBody>
+          <a:bodyPr wrap="square" anchor="t"/>
+          <a:lstStyle/>
+          <a:p>
+            <a:pPr algn="r" eaLnBrk="0">
+              <a:lnSpc>
+                <a:spcPct val="110000"/>
+              </a:lnSpc>
+            </a:pPr>
+            <a:r>
+              <a:rPr sz="1000" b="0">
+                <a:solidFill>
+                  <a:srgbClr val="556175"/>
+                </a:solidFill>
+                <a:latin typeface="맑은 고딕"/>
+                <a:ea typeface="맑은 고딕"/>
+                <a:cs typeface="맑은 고딕"/>
+              </a:rPr>
+              <a:t>33</a:t>
+            </a:r>
+          </a:p>
+        </p:txBody>
+      </p:sp>
+      <p:sp>
+        <p:nvSpPr>
+          <p:cNvPr id="6" name="Rounded Rectangle 5"/>
+          <p:cNvSpPr/>
+          <p:nvPr/>
+        </p:nvSpPr>
+        <p:spPr>
+          <a:xfrm>
+            <a:off x="548640" y="1627632"/>
+            <a:ext cx="11094415" cy="704088"/>
+          </a:xfrm>
+          <a:prstGeom prst="roundRect">
+            <a:avLst>
+              <a:gd name="adj" fmla="val 5000"/>
+            </a:avLst>
+          </a:prstGeom>
+          <a:solidFill>
+            <a:srgbClr val="E7F3FD"/>
+          </a:solidFill>
+          <a:ln>
+            <a:noFill/>
+          </a:ln>
+        </p:spPr>
+        <p:txBody>
+          <a:bodyPr rtlCol="0" anchor="ctr"/>
+          <a:lstStyle/>
+          <a:p>
+            <a:pPr algn="ctr"/>
+          </a:p>
+        </p:txBody>
+      </p:sp>
+      <p:sp>
+        <p:nvSpPr>
+          <p:cNvPr id="7" name="TextBox 6"/>
+          <p:cNvSpPr txBox="1"/>
+          <p:nvPr/>
+        </p:nvSpPr>
+        <p:spPr>
+          <a:xfrm>
+            <a:off x="777240" y="1627632"/>
+            <a:ext cx="10637215" cy="704088"/>
+          </a:xfrm>
+          <a:prstGeom prst="rect">
+            <a:avLst/>
+          </a:prstGeom>
+          <a:noFill/>
+        </p:spPr>
+        <p:txBody>
+          <a:bodyPr wrap="square" anchor="ctr"/>
+          <a:lstStyle/>
+          <a:p>
+            <a:pPr algn="l" eaLnBrk="0">
+              <a:lnSpc>
+                <a:spcPct val="110000"/>
+              </a:lnSpc>
+            </a:pPr>
+            <a:r>
+              <a:rPr sz="1900" b="1">
+                <a:solidFill>
+                  <a:srgbClr val="13294B"/>
+                </a:solidFill>
+                <a:latin typeface="맑은 고딕"/>
+                <a:ea typeface="맑은 고딕"/>
+                <a:cs typeface="맑은 고딕"/>
+              </a:rPr>
+              <a:t>이때 일어나야 하는 일은?</a:t>
+            </a:r>
+          </a:p>
+        </p:txBody>
+      </p:sp>
+      <p:sp>
+        <p:nvSpPr>
+          <p:cNvPr id="8" name="Rounded Rectangle 7"/>
+          <p:cNvSpPr/>
+          <p:nvPr/>
+        </p:nvSpPr>
+        <p:spPr>
+          <a:xfrm>
+            <a:off x="548640" y="2560320"/>
+            <a:ext cx="11094415" cy="822960"/>
+          </a:xfrm>
+          <a:prstGeom prst="roundRect">
+            <a:avLst>
+              <a:gd name="adj" fmla="val 8000"/>
+            </a:avLst>
+          </a:prstGeom>
+          <a:solidFill>
+            <a:srgbClr val="F3F6F9"/>
+          </a:solidFill>
+          <a:ln>
+            <a:noFill/>
+          </a:ln>
+        </p:spPr>
+        <p:txBody>
+          <a:bodyPr rtlCol="0" anchor="ctr"/>
+          <a:lstStyle/>
+          <a:p>
+            <a:pPr algn="ctr"/>
+          </a:p>
+        </p:txBody>
+      </p:sp>
+      <p:sp>
+        <p:nvSpPr>
+          <p:cNvPr id="9" name="Oval 8"/>
+          <p:cNvSpPr/>
+          <p:nvPr/>
+        </p:nvSpPr>
+        <p:spPr>
+          <a:xfrm>
+            <a:off x="731520" y="2788920"/>
+            <a:ext cx="365760" cy="365760"/>
+          </a:xfrm>
+          <a:prstGeom prst="ellipse">
+            <a:avLst/>
+          </a:prstGeom>
+          <a:solidFill>
+            <a:srgbClr val="13294B"/>
+          </a:solidFill>
+          <a:ln>
+            <a:noFill/>
+          </a:ln>
+        </p:spPr>
+        <p:txBody>
+          <a:bodyPr rtlCol="0" anchor="ctr"/>
+          <a:lstStyle/>
+          <a:p>
+            <a:pPr algn="ctr"/>
+          </a:p>
+        </p:txBody>
+      </p:sp>
+      <p:sp>
+        <p:nvSpPr>
+          <p:cNvPr id="10" name="TextBox 9"/>
+          <p:cNvSpPr txBox="1"/>
+          <p:nvPr/>
+        </p:nvSpPr>
+        <p:spPr>
+          <a:xfrm>
+            <a:off x="731520" y="2788920"/>
+            <a:ext cx="365760" cy="365760"/>
+          </a:xfrm>
+          <a:prstGeom prst="rect">
+            <a:avLst/>
+          </a:prstGeom>
+          <a:noFill/>
+        </p:spPr>
+        <p:txBody>
+          <a:bodyPr wrap="square" anchor="ctr"/>
+          <a:lstStyle/>
+          <a:p>
+            <a:pPr algn="ctr" eaLnBrk="0">
+              <a:lnSpc>
+                <a:spcPct val="110000"/>
+              </a:lnSpc>
+            </a:pPr>
+            <a:r>
+              <a:rPr sz="1300" b="1">
+                <a:solidFill>
+                  <a:srgbClr val="FFFFFF"/>
+                </a:solidFill>
+                <a:latin typeface="맑은 고딕"/>
+                <a:ea typeface="맑은 고딕"/>
+                <a:cs typeface="맑은 고딕"/>
+              </a:rPr>
+              <a:t>1</a:t>
+            </a:r>
+          </a:p>
+        </p:txBody>
+      </p:sp>
+      <p:sp>
+        <p:nvSpPr>
+          <p:cNvPr id="11" name="TextBox 10"/>
+          <p:cNvSpPr txBox="1"/>
+          <p:nvPr/>
+        </p:nvSpPr>
+        <p:spPr>
+          <a:xfrm>
+            <a:off x="1234440" y="2514600"/>
+            <a:ext cx="10225735" cy="914400"/>
+          </a:xfrm>
+          <a:prstGeom prst="rect">
+            <a:avLst/>
+          </a:prstGeom>
+          <a:noFill/>
+        </p:spPr>
+        <p:txBody>
+          <a:bodyPr wrap="square" anchor="ctr"/>
+          <a:lstStyle/>
+          <a:p>
+            <a:pPr algn="l" eaLnBrk="0">
+              <a:lnSpc>
+                <a:spcPct val="110000"/>
+              </a:lnSpc>
+            </a:pPr>
+            <a:r>
+              <a:rPr sz="1550" b="1">
+                <a:solidFill>
+                  <a:srgbClr val="1F2A3A"/>
+                </a:solidFill>
+                <a:latin typeface="맑은 고딕"/>
+                <a:ea typeface="맑은 고딕"/>
+                <a:cs typeface="맑은 고딕"/>
+              </a:rPr>
+              <a:t>허용된 도구를 여럿 조합해 같은 효과를 내는 길을 찾는다</a:t>
+            </a:r>
+          </a:p>
+        </p:txBody>
+      </p:sp>
+      <p:sp>
+        <p:nvSpPr>
+          <p:cNvPr id="12" name="Rounded Rectangle 11"/>
+          <p:cNvSpPr/>
+          <p:nvPr/>
+        </p:nvSpPr>
+        <p:spPr>
+          <a:xfrm>
+            <a:off x="548640" y="3474720"/>
+            <a:ext cx="11094415" cy="822960"/>
+          </a:xfrm>
+          <a:prstGeom prst="roundRect">
+            <a:avLst>
+              <a:gd name="adj" fmla="val 8000"/>
+            </a:avLst>
+          </a:prstGeom>
+          <a:solidFill>
+            <a:srgbClr val="F3F6F9"/>
+          </a:solidFill>
+          <a:ln>
+            <a:noFill/>
+          </a:ln>
+        </p:spPr>
+        <p:txBody>
+          <a:bodyPr rtlCol="0" anchor="ctr"/>
+          <a:lstStyle/>
+          <a:p>
+            <a:pPr algn="ctr"/>
+          </a:p>
+        </p:txBody>
+      </p:sp>
+      <p:sp>
+        <p:nvSpPr>
+          <p:cNvPr id="13" name="Oval 12"/>
+          <p:cNvSpPr/>
+          <p:nvPr/>
+        </p:nvSpPr>
+        <p:spPr>
+          <a:xfrm>
+            <a:off x="731520" y="3703320"/>
+            <a:ext cx="365760" cy="365760"/>
+          </a:xfrm>
+          <a:prstGeom prst="ellipse">
+            <a:avLst/>
+          </a:prstGeom>
+          <a:solidFill>
+            <a:srgbClr val="13294B"/>
+          </a:solidFill>
+          <a:ln>
+            <a:noFill/>
+          </a:ln>
+        </p:spPr>
+        <p:txBody>
+          <a:bodyPr rtlCol="0" anchor="ctr"/>
+          <a:lstStyle/>
+          <a:p>
+            <a:pPr algn="ctr"/>
+          </a:p>
+        </p:txBody>
+      </p:sp>
+      <p:sp>
+        <p:nvSpPr>
+          <p:cNvPr id="14" name="TextBox 13"/>
+          <p:cNvSpPr txBox="1"/>
+          <p:nvPr/>
+        </p:nvSpPr>
+        <p:spPr>
+          <a:xfrm>
+            <a:off x="731520" y="3703320"/>
+            <a:ext cx="365760" cy="365760"/>
+          </a:xfrm>
+          <a:prstGeom prst="rect">
+            <a:avLst/>
+          </a:prstGeom>
+          <a:noFill/>
+        </p:spPr>
+        <p:txBody>
+          <a:bodyPr wrap="square" anchor="ctr"/>
+          <a:lstStyle/>
+          <a:p>
+            <a:pPr algn="ctr" eaLnBrk="0">
+              <a:lnSpc>
+                <a:spcPct val="110000"/>
+              </a:lnSpc>
+            </a:pPr>
+            <a:r>
+              <a:rPr sz="1300" b="1">
+                <a:solidFill>
+                  <a:srgbClr val="FFFFFF"/>
+                </a:solidFill>
+                <a:latin typeface="맑은 고딕"/>
+                <a:ea typeface="맑은 고딕"/>
+                <a:cs typeface="맑은 고딕"/>
+              </a:rPr>
+              <a:t>2</a:t>
+            </a:r>
+          </a:p>
+        </p:txBody>
+      </p:sp>
+      <p:sp>
+        <p:nvSpPr>
+          <p:cNvPr id="15" name="TextBox 14"/>
+          <p:cNvSpPr txBox="1"/>
+          <p:nvPr/>
+        </p:nvSpPr>
+        <p:spPr>
+          <a:xfrm>
+            <a:off x="1234440" y="3429000"/>
+            <a:ext cx="10225735" cy="914400"/>
+          </a:xfrm>
+          <a:prstGeom prst="rect">
+            <a:avLst/>
+          </a:prstGeom>
+          <a:noFill/>
+        </p:spPr>
+        <p:txBody>
+          <a:bodyPr wrap="square" anchor="ctr"/>
+          <a:lstStyle/>
+          <a:p>
+            <a:pPr algn="l" eaLnBrk="0">
+              <a:lnSpc>
+                <a:spcPct val="110000"/>
+              </a:lnSpc>
+            </a:pPr>
+            <a:r>
+              <a:rPr sz="1550" b="1">
+                <a:solidFill>
+                  <a:srgbClr val="1F2A3A"/>
+                </a:solidFill>
+                <a:latin typeface="맑은 고딕"/>
+                <a:ea typeface="맑은 고딕"/>
+                <a:cs typeface="맑은 고딕"/>
+              </a:rPr>
+              <a:t>급한 상황이므로 한 번만 실행하고 그 사실을 기록에 남긴다</a:t>
+            </a:r>
+          </a:p>
+        </p:txBody>
+      </p:sp>
+      <p:sp>
+        <p:nvSpPr>
+          <p:cNvPr id="16" name="Rounded Rectangle 15"/>
+          <p:cNvSpPr/>
+          <p:nvPr/>
+        </p:nvSpPr>
+        <p:spPr>
+          <a:xfrm>
+            <a:off x="548640" y="4389120"/>
+            <a:ext cx="11094415" cy="822960"/>
+          </a:xfrm>
+          <a:prstGeom prst="roundRect">
+            <a:avLst>
+              <a:gd name="adj" fmla="val 8000"/>
+            </a:avLst>
+          </a:prstGeom>
+          <a:solidFill>
+            <a:srgbClr val="F3F6F9"/>
+          </a:solidFill>
+          <a:ln>
+            <a:noFill/>
+          </a:ln>
+        </p:spPr>
+        <p:txBody>
+          <a:bodyPr rtlCol="0" anchor="ctr"/>
+          <a:lstStyle/>
+          <a:p>
+            <a:pPr algn="ctr"/>
+          </a:p>
+        </p:txBody>
+      </p:sp>
+      <p:sp>
+        <p:nvSpPr>
+          <p:cNvPr id="17" name="Oval 16"/>
+          <p:cNvSpPr/>
+          <p:nvPr/>
+        </p:nvSpPr>
+        <p:spPr>
+          <a:xfrm>
+            <a:off x="731520" y="4617720"/>
+            <a:ext cx="365760" cy="365760"/>
+          </a:xfrm>
+          <a:prstGeom prst="ellipse">
+            <a:avLst/>
+          </a:prstGeom>
+          <a:solidFill>
+            <a:srgbClr val="13294B"/>
+          </a:solidFill>
+          <a:ln>
+            <a:noFill/>
+          </a:ln>
+        </p:spPr>
+        <p:txBody>
+          <a:bodyPr rtlCol="0" anchor="ctr"/>
+          <a:lstStyle/>
+          <a:p>
+            <a:pPr algn="ctr"/>
+          </a:p>
+        </p:txBody>
+      </p:sp>
+      <p:sp>
+        <p:nvSpPr>
+          <p:cNvPr id="18" name="TextBox 17"/>
+          <p:cNvSpPr txBox="1"/>
+          <p:nvPr/>
+        </p:nvSpPr>
+        <p:spPr>
+          <a:xfrm>
+            <a:off x="731520" y="4617720"/>
+            <a:ext cx="365760" cy="365760"/>
+          </a:xfrm>
+          <a:prstGeom prst="rect">
+            <a:avLst/>
+          </a:prstGeom>
+          <a:noFill/>
+        </p:spPr>
+        <p:txBody>
+          <a:bodyPr wrap="square" anchor="ctr"/>
+          <a:lstStyle/>
+          <a:p>
+            <a:pPr algn="ctr" eaLnBrk="0">
+              <a:lnSpc>
+                <a:spcPct val="110000"/>
+              </a:lnSpc>
+            </a:pPr>
+            <a:r>
+              <a:rPr sz="1300" b="1">
+                <a:solidFill>
+                  <a:srgbClr val="FFFFFF"/>
+                </a:solidFill>
+                <a:latin typeface="맑은 고딕"/>
+                <a:ea typeface="맑은 고딕"/>
+                <a:cs typeface="맑은 고딕"/>
+              </a:rPr>
+              <a:t>3</a:t>
+            </a:r>
+          </a:p>
+        </p:txBody>
+      </p:sp>
+      <p:sp>
+        <p:nvSpPr>
+          <p:cNvPr id="19" name="TextBox 18"/>
+          <p:cNvSpPr txBox="1"/>
+          <p:nvPr/>
+        </p:nvSpPr>
+        <p:spPr>
+          <a:xfrm>
+            <a:off x="1234440" y="4343400"/>
+            <a:ext cx="10225735" cy="914400"/>
+          </a:xfrm>
+          <a:prstGeom prst="rect">
+            <a:avLst/>
+          </a:prstGeom>
+          <a:noFill/>
+        </p:spPr>
+        <p:txBody>
+          <a:bodyPr wrap="square" anchor="ctr"/>
+          <a:lstStyle/>
+          <a:p>
+            <a:pPr algn="l" eaLnBrk="0">
+              <a:lnSpc>
+                <a:spcPct val="110000"/>
+              </a:lnSpc>
+            </a:pPr>
+            <a:r>
+              <a:rPr sz="1550" b="1">
+                <a:solidFill>
+                  <a:srgbClr val="1F2A3A"/>
+                </a:solidFill>
+                <a:latin typeface="맑은 고딕"/>
+                <a:ea typeface="맑은 고딕"/>
+                <a:cs typeface="맑은 고딕"/>
+              </a:rPr>
+              <a:t>실행하지 않고 사람에게 묻는다. 답을 받아도 실행 권한은 그대로이다</a:t>
+            </a:r>
+          </a:p>
+        </p:txBody>
+      </p:sp>
+      <p:sp>
+        <p:nvSpPr>
+          <p:cNvPr id="20" name="Rounded Rectangle 19"/>
+          <p:cNvSpPr/>
+          <p:nvPr/>
+        </p:nvSpPr>
+        <p:spPr>
+          <a:xfrm>
+            <a:off x="548640" y="5303520"/>
+            <a:ext cx="11094415" cy="822960"/>
+          </a:xfrm>
+          <a:prstGeom prst="roundRect">
+            <a:avLst>
+              <a:gd name="adj" fmla="val 8000"/>
+            </a:avLst>
+          </a:prstGeom>
+          <a:solidFill>
+            <a:srgbClr val="F3F6F9"/>
+          </a:solidFill>
+          <a:ln>
+            <a:noFill/>
+          </a:ln>
+        </p:spPr>
+        <p:txBody>
+          <a:bodyPr rtlCol="0" anchor="ctr"/>
+          <a:lstStyle/>
+          <a:p>
+            <a:pPr algn="ctr"/>
+          </a:p>
+        </p:txBody>
+      </p:sp>
+      <p:sp>
+        <p:nvSpPr>
+          <p:cNvPr id="21" name="Oval 20"/>
+          <p:cNvSpPr/>
+          <p:nvPr/>
+        </p:nvSpPr>
+        <p:spPr>
+          <a:xfrm>
+            <a:off x="731520" y="5532120"/>
+            <a:ext cx="365760" cy="365760"/>
+          </a:xfrm>
+          <a:prstGeom prst="ellipse">
+            <a:avLst/>
+          </a:prstGeom>
+          <a:solidFill>
+            <a:srgbClr val="13294B"/>
+          </a:solidFill>
+          <a:ln>
+            <a:noFill/>
+          </a:ln>
+        </p:spPr>
+        <p:txBody>
+          <a:bodyPr rtlCol="0" anchor="ctr"/>
+          <a:lstStyle/>
+          <a:p>
+            <a:pPr algn="ctr"/>
+          </a:p>
+        </p:txBody>
+      </p:sp>
+      <p:sp>
+        <p:nvSpPr>
+          <p:cNvPr id="22" name="TextBox 21"/>
+          <p:cNvSpPr txBox="1"/>
+          <p:nvPr/>
+        </p:nvSpPr>
+        <p:spPr>
+          <a:xfrm>
+            <a:off x="731520" y="5532120"/>
+            <a:ext cx="365760" cy="365760"/>
+          </a:xfrm>
+          <a:prstGeom prst="rect">
+            <a:avLst/>
+          </a:prstGeom>
+          <a:noFill/>
+        </p:spPr>
+        <p:txBody>
+          <a:bodyPr wrap="square" anchor="ctr"/>
+          <a:lstStyle/>
+          <a:p>
+            <a:pPr algn="ctr" eaLnBrk="0">
+              <a:lnSpc>
+                <a:spcPct val="110000"/>
+              </a:lnSpc>
+            </a:pPr>
+            <a:r>
+              <a:rPr sz="1300" b="1">
+                <a:solidFill>
+                  <a:srgbClr val="FFFFFF"/>
+                </a:solidFill>
+                <a:latin typeface="맑은 고딕"/>
+                <a:ea typeface="맑은 고딕"/>
+                <a:cs typeface="맑은 고딕"/>
+              </a:rPr>
+              <a:t>4</a:t>
+            </a:r>
+          </a:p>
+        </p:txBody>
+      </p:sp>
+      <p:sp>
+        <p:nvSpPr>
+          <p:cNvPr id="23" name="TextBox 22"/>
+          <p:cNvSpPr txBox="1"/>
+          <p:nvPr/>
+        </p:nvSpPr>
+        <p:spPr>
+          <a:xfrm>
+            <a:off x="1234440" y="5257800"/>
+            <a:ext cx="10225735" cy="914400"/>
+          </a:xfrm>
+          <a:prstGeom prst="rect">
+            <a:avLst/>
+          </a:prstGeom>
+          <a:noFill/>
+        </p:spPr>
+        <p:txBody>
+          <a:bodyPr wrap="square" anchor="ctr"/>
+          <a:lstStyle/>
+          <a:p>
+            <a:pPr algn="l" eaLnBrk="0">
+              <a:lnSpc>
+                <a:spcPct val="110000"/>
+              </a:lnSpc>
+            </a:pPr>
+            <a:r>
+              <a:rPr sz="1550" b="1">
+                <a:solidFill>
+                  <a:srgbClr val="1F2A3A"/>
+                </a:solidFill>
+                <a:latin typeface="맑은 고딕"/>
+                <a:ea typeface="맑은 고딕"/>
+                <a:cs typeface="맑은 고딕"/>
+              </a:rPr>
+              <a:t>사람에게 물은 뒤 답을 받으면 그 도구를 직접 실행한다</a:t>
+            </a:r>
+          </a:p>
+        </p:txBody>
+      </p:sp>
+    </p:spTree>
+  </p:cSld>
+  <p:clrMapOvr>
+    <a:masterClrMapping/>
+  </p:clrMapOvr>
+</p:sld>
+</file>
+
+<file path=ppt/slides/slide34.xml><?xml version="1.0" encoding="utf-8"?>
+<p:sld xmlns:a="http://schemas.openxmlformats.org/drawingml/2006/main" xmlns:p="http://schemas.openxmlformats.org/presentationml/2006/main" xmlns:r="http://schemas.openxmlformats.org/officeDocument/2006/relationships">
+  <p:cSld>
+    <p:bg>
+      <p:bgPr>
+        <a:solidFill>
+          <a:srgbClr val="FFFFFF"/>
+        </a:solidFill>
+        <a:effectLst/>
+      </p:bgPr>
+    </p:bg>
+    <p:spTree>
+      <p:nvGrpSpPr>
+        <p:cNvPr id="1" name=""/>
+        <p:cNvGrpSpPr/>
+        <p:nvPr/>
+      </p:nvGrpSpPr>
+      <p:grpSpPr/>
+      <p:sp>
+        <p:nvSpPr>
+          <p:cNvPr id="2" name="TextBox 1"/>
+          <p:cNvSpPr txBox="1"/>
+          <p:nvPr/>
+        </p:nvSpPr>
+        <p:spPr>
+          <a:xfrm>
+            <a:off x="457200" y="329184"/>
+            <a:ext cx="11277295" cy="603504"/>
+          </a:xfrm>
+          <a:prstGeom prst="rect">
+            <a:avLst/>
+          </a:prstGeom>
+          <a:noFill/>
+        </p:spPr>
+        <p:txBody>
+          <a:bodyPr wrap="square" anchor="ctr"/>
+          <a:lstStyle/>
+          <a:p>
+            <a:pPr algn="l" eaLnBrk="0">
+              <a:lnSpc>
+                <a:spcPct val="110000"/>
+              </a:lnSpc>
+            </a:pPr>
+            <a:r>
+              <a:rPr sz="2800" b="1">
+                <a:solidFill>
+                  <a:srgbClr val="13294B"/>
+                </a:solidFill>
+                <a:latin typeface="맑은 고딕"/>
+                <a:ea typeface="맑은 고딕"/>
+                <a:cs typeface="맑은 고딕"/>
+              </a:rPr>
+              <a:t>정답과 판단 기준</a:t>
+            </a:r>
+          </a:p>
+        </p:txBody>
+      </p:sp>
+      <p:sp>
+        <p:nvSpPr>
+          <p:cNvPr id="3" name="TextBox 2"/>
+          <p:cNvSpPr txBox="1"/>
+          <p:nvPr/>
+        </p:nvSpPr>
+        <p:spPr>
+          <a:xfrm>
+            <a:off x="457200" y="932688"/>
+            <a:ext cx="11277295" cy="420624"/>
+          </a:xfrm>
+          <a:prstGeom prst="rect">
+            <a:avLst/>
+          </a:prstGeom>
+          <a:noFill/>
+        </p:spPr>
+        <p:txBody>
+          <a:bodyPr wrap="square" anchor="ctr"/>
+          <a:lstStyle/>
+          <a:p>
+            <a:pPr algn="l" eaLnBrk="0">
+              <a:lnSpc>
+                <a:spcPct val="110000"/>
+              </a:lnSpc>
+            </a:pPr>
+            <a:r>
+              <a:rPr sz="1600" b="0">
+                <a:solidFill>
+                  <a:srgbClr val="556175"/>
+                </a:solidFill>
+                <a:latin typeface="맑은 고딕"/>
+                <a:ea typeface="맑은 고딕"/>
+                <a:cs typeface="맑은 고딕"/>
+              </a:rPr>
+              <a:t>세 문항은 실행 고리의 단계, 지식과 값의 구분, 권한의 경계를 각각 올바른 기준으로 판단하는지 확인한다.</a:t>
+            </a:r>
+          </a:p>
+        </p:txBody>
+      </p:sp>
+      <p:sp>
+        <p:nvSpPr>
+          <p:cNvPr id="4" name="Rectangle 3"/>
+          <p:cNvSpPr/>
+          <p:nvPr/>
+        </p:nvSpPr>
+        <p:spPr>
+          <a:xfrm>
+            <a:off x="548640" y="1408176"/>
+            <a:ext cx="11094415" cy="18288"/>
+          </a:xfrm>
+          <a:prstGeom prst="rect">
+            <a:avLst/>
+          </a:prstGeom>
+          <a:solidFill>
+            <a:srgbClr val="D3D9E1"/>
+          </a:solidFill>
+          <a:ln>
+            <a:noFill/>
+          </a:ln>
+        </p:spPr>
+        <p:txBody>
+          <a:bodyPr rtlCol="0" anchor="ctr"/>
+          <a:lstStyle/>
+          <a:p>
+            <a:pPr algn="ctr"/>
+          </a:p>
+        </p:txBody>
+      </p:sp>
+      <p:sp>
+        <p:nvSpPr>
+          <p:cNvPr id="5" name="TextBox 4"/>
+          <p:cNvSpPr txBox="1"/>
+          <p:nvPr/>
+        </p:nvSpPr>
+        <p:spPr>
+          <a:xfrm>
+            <a:off x="10911535" y="6473952"/>
+            <a:ext cx="822960" cy="274320"/>
+          </a:xfrm>
+          <a:prstGeom prst="rect">
+            <a:avLst/>
+          </a:prstGeom>
+          <a:noFill/>
+        </p:spPr>
+        <p:txBody>
+          <a:bodyPr wrap="square" anchor="t"/>
+          <a:lstStyle/>
+          <a:p>
+            <a:pPr algn="r" eaLnBrk="0">
+              <a:lnSpc>
+                <a:spcPct val="110000"/>
+              </a:lnSpc>
+            </a:pPr>
+            <a:r>
+              <a:rPr sz="1000" b="0">
+                <a:solidFill>
+                  <a:srgbClr val="556175"/>
+                </a:solidFill>
+                <a:latin typeface="맑은 고딕"/>
+                <a:ea typeface="맑은 고딕"/>
+                <a:cs typeface="맑은 고딕"/>
+              </a:rPr>
+              <a:t>34</a:t>
+            </a:r>
+          </a:p>
+        </p:txBody>
+      </p:sp>
+      <p:sp>
+        <p:nvSpPr>
+          <p:cNvPr id="6" name="Rounded Rectangle 5"/>
+          <p:cNvSpPr/>
+          <p:nvPr/>
+        </p:nvSpPr>
+        <p:spPr>
+          <a:xfrm>
+            <a:off x="548640" y="2418587"/>
+            <a:ext cx="11094415" cy="347472"/>
+          </a:xfrm>
+          <a:prstGeom prst="roundRect">
+            <a:avLst>
+              <a:gd name="adj" fmla="val 12000"/>
+            </a:avLst>
+          </a:prstGeom>
+          <a:solidFill>
+            <a:srgbClr val="13294B"/>
+          </a:solidFill>
+          <a:ln>
+            <a:noFill/>
+          </a:ln>
+        </p:spPr>
+        <p:txBody>
+          <a:bodyPr rtlCol="0" anchor="ctr"/>
+          <a:lstStyle/>
+          <a:p>
+            <a:pPr algn="ctr"/>
+          </a:p>
+        </p:txBody>
+      </p:sp>
+      <p:sp>
+        <p:nvSpPr>
+          <p:cNvPr id="7" name="TextBox 6"/>
+          <p:cNvSpPr txBox="1"/>
+          <p:nvPr/>
+        </p:nvSpPr>
+        <p:spPr>
+          <a:xfrm>
+            <a:off x="685800" y="2418587"/>
+            <a:ext cx="2514600" cy="347472"/>
+          </a:xfrm>
+          <a:prstGeom prst="rect">
+            <a:avLst/>
+          </a:prstGeom>
+          <a:noFill/>
+        </p:spPr>
+        <p:txBody>
+          <a:bodyPr wrap="square" anchor="ctr"/>
+          <a:lstStyle/>
+          <a:p>
+            <a:pPr algn="l" eaLnBrk="0">
+              <a:lnSpc>
+                <a:spcPct val="110000"/>
+              </a:lnSpc>
+            </a:pPr>
+            <a:r>
+              <a:rPr sz="1300" b="1">
+                <a:solidFill>
+                  <a:srgbClr val="FFFFFF"/>
+                </a:solidFill>
+                <a:latin typeface="맑은 고딕"/>
+                <a:ea typeface="맑은 고딕"/>
+                <a:cs typeface="맑은 고딕"/>
+              </a:rPr>
+              <a:t>문항</a:t>
+            </a:r>
+          </a:p>
+        </p:txBody>
+      </p:sp>
+      <p:sp>
+        <p:nvSpPr>
+          <p:cNvPr id="8" name="TextBox 7"/>
+          <p:cNvSpPr txBox="1"/>
+          <p:nvPr/>
+        </p:nvSpPr>
+        <p:spPr>
+          <a:xfrm>
+            <a:off x="3200400" y="2418587"/>
+            <a:ext cx="6248095" cy="347472"/>
+          </a:xfrm>
+          <a:prstGeom prst="rect">
+            <a:avLst/>
+          </a:prstGeom>
+          <a:noFill/>
+        </p:spPr>
+        <p:txBody>
+          <a:bodyPr wrap="square" anchor="ctr"/>
+          <a:lstStyle/>
+          <a:p>
+            <a:pPr algn="l" eaLnBrk="0">
+              <a:lnSpc>
+                <a:spcPct val="110000"/>
+              </a:lnSpc>
+            </a:pPr>
+            <a:r>
+              <a:rPr sz="1300" b="1">
+                <a:solidFill>
+                  <a:srgbClr val="FFFFFF"/>
+                </a:solidFill>
+                <a:latin typeface="맑은 고딕"/>
+                <a:ea typeface="맑은 고딕"/>
+                <a:cs typeface="맑은 고딕"/>
+              </a:rPr>
+              <a:t>판단 기준</a:t>
+            </a:r>
+          </a:p>
+        </p:txBody>
+      </p:sp>
+      <p:sp>
+        <p:nvSpPr>
+          <p:cNvPr id="9" name="TextBox 8"/>
+          <p:cNvSpPr txBox="1"/>
+          <p:nvPr/>
+        </p:nvSpPr>
+        <p:spPr>
+          <a:xfrm>
+            <a:off x="9448495" y="2418587"/>
+            <a:ext cx="2194560" cy="347472"/>
+          </a:xfrm>
+          <a:prstGeom prst="rect">
+            <a:avLst/>
+          </a:prstGeom>
+          <a:noFill/>
+        </p:spPr>
+        <p:txBody>
+          <a:bodyPr wrap="square" anchor="ctr"/>
+          <a:lstStyle/>
+          <a:p>
+            <a:pPr algn="l" eaLnBrk="0">
+              <a:lnSpc>
+                <a:spcPct val="110000"/>
+              </a:lnSpc>
+            </a:pPr>
+            <a:r>
+              <a:rPr sz="1300" b="1">
+                <a:solidFill>
+                  <a:srgbClr val="FFFFFF"/>
+                </a:solidFill>
+                <a:latin typeface="맑은 고딕"/>
+                <a:ea typeface="맑은 고딕"/>
+                <a:cs typeface="맑은 고딕"/>
+              </a:rPr>
+              <a:t>정답</a:t>
+            </a:r>
+          </a:p>
+        </p:txBody>
+      </p:sp>
+      <p:sp>
+        <p:nvSpPr>
+          <p:cNvPr id="10" name="Rounded Rectangle 9"/>
+          <p:cNvSpPr/>
+          <p:nvPr/>
+        </p:nvSpPr>
+        <p:spPr>
+          <a:xfrm>
+            <a:off x="548640" y="2852927"/>
+            <a:ext cx="11094415" cy="850392"/>
+          </a:xfrm>
+          <a:prstGeom prst="roundRect">
+            <a:avLst>
+              <a:gd name="adj" fmla="val 8000"/>
+            </a:avLst>
+          </a:prstGeom>
+          <a:solidFill>
+            <a:srgbClr val="F3F6F9"/>
+          </a:solidFill>
+          <a:ln>
+            <a:noFill/>
+          </a:ln>
+        </p:spPr>
+        <p:txBody>
+          <a:bodyPr rtlCol="0" anchor="ctr"/>
+          <a:lstStyle/>
+          <a:p>
+            <a:pPr algn="ctr"/>
+          </a:p>
+        </p:txBody>
+      </p:sp>
+      <p:sp>
+        <p:nvSpPr>
+          <p:cNvPr id="11" name="TextBox 10"/>
+          <p:cNvSpPr txBox="1"/>
+          <p:nvPr/>
+        </p:nvSpPr>
+        <p:spPr>
+          <a:xfrm>
+            <a:off x="685800" y="2820923"/>
+            <a:ext cx="2514600" cy="914400"/>
+          </a:xfrm>
+          <a:prstGeom prst="rect">
+            <a:avLst/>
+          </a:prstGeom>
+          <a:noFill/>
+        </p:spPr>
+        <p:txBody>
+          <a:bodyPr wrap="square" anchor="ctr"/>
+          <a:lstStyle/>
+          <a:p>
+            <a:pPr algn="l" eaLnBrk="0">
+              <a:lnSpc>
+                <a:spcPct val="110000"/>
+              </a:lnSpc>
+            </a:pPr>
+            <a:r>
+              <a:rPr sz="1600" b="1">
+                <a:solidFill>
+                  <a:srgbClr val="13294B"/>
+                </a:solidFill>
+                <a:latin typeface="맑은 고딕"/>
+                <a:ea typeface="맑은 고딕"/>
+                <a:cs typeface="맑은 고딕"/>
+              </a:rPr>
+              <a:t>Quiz 1</a:t>
+            </a:r>
+          </a:p>
+        </p:txBody>
+      </p:sp>
+      <p:sp>
+        <p:nvSpPr>
+          <p:cNvPr id="12" name="TextBox 11"/>
+          <p:cNvSpPr txBox="1"/>
+          <p:nvPr/>
+        </p:nvSpPr>
+        <p:spPr>
+          <a:xfrm>
+            <a:off x="3200400" y="2820923"/>
+            <a:ext cx="6156655" cy="914400"/>
+          </a:xfrm>
+          <a:prstGeom prst="rect">
+            <a:avLst/>
+          </a:prstGeom>
+          <a:noFill/>
+        </p:spPr>
+        <p:txBody>
+          <a:bodyPr wrap="square" anchor="ctr"/>
+          <a:lstStyle/>
+          <a:p>
+            <a:pPr algn="l" eaLnBrk="0">
+              <a:lnSpc>
+                <a:spcPct val="110000"/>
+              </a:lnSpc>
+            </a:pPr>
+            <a:r>
+              <a:rPr sz="1400" b="0">
+                <a:solidFill>
+                  <a:srgbClr val="1F2A3A"/>
+                </a:solidFill>
+                <a:latin typeface="맑은 고딕"/>
+                <a:ea typeface="맑은 고딕"/>
+                <a:cs typeface="맑은 고딕"/>
+              </a:rPr>
+              <a:t>서로 다른 도구를 이어 불렀고, 앞 호출의 결과가 뒤 호출의 입력이 되었다. 관찰이 다음 행동을 정한 것이다.</a:t>
+            </a:r>
+          </a:p>
+        </p:txBody>
+      </p:sp>
+      <p:sp>
+        <p:nvSpPr>
+          <p:cNvPr id="13" name="TextBox 12"/>
+          <p:cNvSpPr txBox="1"/>
+          <p:nvPr/>
+        </p:nvSpPr>
+        <p:spPr>
+          <a:xfrm>
+            <a:off x="9448495" y="2820923"/>
+            <a:ext cx="2103120" cy="914400"/>
+          </a:xfrm>
+          <a:prstGeom prst="rect">
+            <a:avLst/>
+          </a:prstGeom>
+          <a:noFill/>
+        </p:spPr>
+        <p:txBody>
+          <a:bodyPr wrap="square" anchor="ctr"/>
+          <a:lstStyle/>
+          <a:p>
+            <a:pPr algn="l" eaLnBrk="0">
+              <a:lnSpc>
+                <a:spcPct val="110000"/>
+              </a:lnSpc>
+            </a:pPr>
+            <a:r>
+              <a:rPr sz="1250" b="1">
+                <a:solidFill>
+                  <a:srgbClr val="556175"/>
+                </a:solidFill>
+                <a:latin typeface="맑은 고딕"/>
+                <a:ea typeface="맑은 고딕"/>
+                <a:cs typeface="맑은 고딕"/>
+              </a:rPr>
+              <a:t>2번</a:t>
+            </a:r>
+          </a:p>
+        </p:txBody>
+      </p:sp>
+      <p:sp>
+        <p:nvSpPr>
+          <p:cNvPr id="14" name="Rounded Rectangle 13"/>
+          <p:cNvSpPr/>
+          <p:nvPr/>
+        </p:nvSpPr>
+        <p:spPr>
+          <a:xfrm>
+            <a:off x="548640" y="3767327"/>
+            <a:ext cx="11094415" cy="850392"/>
+          </a:xfrm>
+          <a:prstGeom prst="roundRect">
+            <a:avLst>
+              <a:gd name="adj" fmla="val 8000"/>
+            </a:avLst>
+          </a:prstGeom>
+          <a:solidFill>
+            <a:srgbClr val="F3F6F9"/>
+          </a:solidFill>
+          <a:ln>
+            <a:noFill/>
+          </a:ln>
+        </p:spPr>
+        <p:txBody>
+          <a:bodyPr rtlCol="0" anchor="ctr"/>
+          <a:lstStyle/>
+          <a:p>
+            <a:pPr algn="ctr"/>
+          </a:p>
+        </p:txBody>
+      </p:sp>
+      <p:sp>
+        <p:nvSpPr>
+          <p:cNvPr id="15" name="TextBox 14"/>
+          <p:cNvSpPr txBox="1"/>
+          <p:nvPr/>
+        </p:nvSpPr>
+        <p:spPr>
+          <a:xfrm>
+            <a:off x="685800" y="3735323"/>
+            <a:ext cx="2514600" cy="914400"/>
+          </a:xfrm>
+          <a:prstGeom prst="rect">
+            <a:avLst/>
+          </a:prstGeom>
+          <a:noFill/>
+        </p:spPr>
+        <p:txBody>
+          <a:bodyPr wrap="square" anchor="ctr"/>
+          <a:lstStyle/>
+          <a:p>
+            <a:pPr algn="l" eaLnBrk="0">
+              <a:lnSpc>
+                <a:spcPct val="110000"/>
+              </a:lnSpc>
+            </a:pPr>
+            <a:r>
+              <a:rPr sz="1600" b="1">
+                <a:solidFill>
+                  <a:srgbClr val="13294B"/>
+                </a:solidFill>
+                <a:latin typeface="맑은 고딕"/>
+                <a:ea typeface="맑은 고딕"/>
+                <a:cs typeface="맑은 고딕"/>
+              </a:rPr>
+              <a:t>Quiz 2</a:t>
+            </a:r>
+          </a:p>
+        </p:txBody>
+      </p:sp>
+      <p:sp>
+        <p:nvSpPr>
+          <p:cNvPr id="16" name="TextBox 15"/>
+          <p:cNvSpPr txBox="1"/>
+          <p:nvPr/>
+        </p:nvSpPr>
+        <p:spPr>
+          <a:xfrm>
+            <a:off x="3200400" y="3735323"/>
+            <a:ext cx="6156655" cy="914400"/>
+          </a:xfrm>
+          <a:prstGeom prst="rect">
+            <a:avLst/>
+          </a:prstGeom>
+          <a:noFill/>
+        </p:spPr>
+        <p:txBody>
+          <a:bodyPr wrap="square" anchor="ctr"/>
+          <a:lstStyle/>
+          <a:p>
+            <a:pPr algn="l" eaLnBrk="0">
+              <a:lnSpc>
+                <a:spcPct val="110000"/>
+              </a:lnSpc>
+            </a:pPr>
+            <a:r>
+              <a:rPr sz="1400" b="0">
+                <a:solidFill>
+                  <a:srgbClr val="1F2A3A"/>
+                </a:solidFill>
+                <a:latin typeface="맑은 고딕"/>
+                <a:ea typeface="맑은 고딕"/>
+                <a:cs typeface="맑은 고딕"/>
+              </a:rPr>
+              <a:t>묵은 값과 실패한 조회로는 근거가 확인되지 않는다. 채우지 않고 이유와 함께 보류한다.</a:t>
+            </a:r>
+          </a:p>
+        </p:txBody>
+      </p:sp>
+      <p:sp>
+        <p:nvSpPr>
+          <p:cNvPr id="17" name="TextBox 16"/>
+          <p:cNvSpPr txBox="1"/>
+          <p:nvPr/>
+        </p:nvSpPr>
+        <p:spPr>
+          <a:xfrm>
+            <a:off x="9448495" y="3735323"/>
+            <a:ext cx="2103120" cy="914400"/>
+          </a:xfrm>
+          <a:prstGeom prst="rect">
+            <a:avLst/>
+          </a:prstGeom>
+          <a:noFill/>
+        </p:spPr>
+        <p:txBody>
+          <a:bodyPr wrap="square" anchor="ctr"/>
+          <a:lstStyle/>
+          <a:p>
+            <a:pPr algn="l" eaLnBrk="0">
+              <a:lnSpc>
+                <a:spcPct val="110000"/>
+              </a:lnSpc>
+            </a:pPr>
+            <a:r>
+              <a:rPr sz="1250" b="1">
+                <a:solidFill>
+                  <a:srgbClr val="556175"/>
+                </a:solidFill>
+                <a:latin typeface="맑은 고딕"/>
+                <a:ea typeface="맑은 고딕"/>
+                <a:cs typeface="맑은 고딕"/>
+              </a:rPr>
+              <a:t>4번</a:t>
+            </a:r>
+          </a:p>
+        </p:txBody>
+      </p:sp>
+      <p:sp>
+        <p:nvSpPr>
+          <p:cNvPr id="18" name="Rounded Rectangle 17"/>
+          <p:cNvSpPr/>
+          <p:nvPr/>
+        </p:nvSpPr>
+        <p:spPr>
+          <a:xfrm>
+            <a:off x="548640" y="4681727"/>
+            <a:ext cx="11094415" cy="850392"/>
+          </a:xfrm>
+          <a:prstGeom prst="roundRect">
+            <a:avLst>
+              <a:gd name="adj" fmla="val 8000"/>
+            </a:avLst>
+          </a:prstGeom>
+          <a:solidFill>
+            <a:srgbClr val="F3F6F9"/>
+          </a:solidFill>
+          <a:ln>
+            <a:noFill/>
+          </a:ln>
+        </p:spPr>
+        <p:txBody>
+          <a:bodyPr rtlCol="0" anchor="ctr"/>
+          <a:lstStyle/>
+          <a:p>
+            <a:pPr algn="ctr"/>
+          </a:p>
+        </p:txBody>
+      </p:sp>
+      <p:sp>
+        <p:nvSpPr>
+          <p:cNvPr id="19" name="TextBox 18"/>
+          <p:cNvSpPr txBox="1"/>
+          <p:nvPr/>
+        </p:nvSpPr>
+        <p:spPr>
+          <a:xfrm>
+            <a:off x="685800" y="4649723"/>
+            <a:ext cx="2514600" cy="914400"/>
+          </a:xfrm>
+          <a:prstGeom prst="rect">
+            <a:avLst/>
+          </a:prstGeom>
+          <a:noFill/>
+        </p:spPr>
+        <p:txBody>
+          <a:bodyPr wrap="square" anchor="ctr"/>
+          <a:lstStyle/>
+          <a:p>
+            <a:pPr algn="l" eaLnBrk="0">
+              <a:lnSpc>
+                <a:spcPct val="110000"/>
+              </a:lnSpc>
+            </a:pPr>
+            <a:r>
+              <a:rPr sz="1600" b="1">
+                <a:solidFill>
+                  <a:srgbClr val="13294B"/>
+                </a:solidFill>
+                <a:latin typeface="맑은 고딕"/>
+                <a:ea typeface="맑은 고딕"/>
+                <a:cs typeface="맑은 고딕"/>
+              </a:rPr>
+              <a:t>Quiz 3</a:t>
+            </a:r>
+          </a:p>
+        </p:txBody>
+      </p:sp>
+      <p:sp>
+        <p:nvSpPr>
+          <p:cNvPr id="20" name="TextBox 19"/>
+          <p:cNvSpPr txBox="1"/>
+          <p:nvPr/>
+        </p:nvSpPr>
+        <p:spPr>
+          <a:xfrm>
+            <a:off x="3200400" y="4649723"/>
+            <a:ext cx="6156655" cy="914400"/>
+          </a:xfrm>
+          <a:prstGeom prst="rect">
+            <a:avLst/>
+          </a:prstGeom>
+          <a:noFill/>
+        </p:spPr>
+        <p:txBody>
+          <a:bodyPr wrap="square" anchor="ctr"/>
+          <a:lstStyle/>
+          <a:p>
+            <a:pPr algn="l" eaLnBrk="0">
+              <a:lnSpc>
+                <a:spcPct val="110000"/>
+              </a:lnSpc>
+            </a:pPr>
+            <a:r>
+              <a:rPr sz="1400" b="0">
+                <a:solidFill>
+                  <a:srgbClr val="1F2A3A"/>
+                </a:solidFill>
+                <a:latin typeface="맑은 고딕"/>
+                <a:ea typeface="맑은 고딕"/>
+                <a:cs typeface="맑은 고딕"/>
+              </a:rPr>
+              <a:t>허용 목록 밖의 도구는 실행되지 않는다. 사람의 답변도 상황의 급함도 실행 권한을 바꾸지 않는다.</a:t>
+            </a:r>
+          </a:p>
+        </p:txBody>
+      </p:sp>
+      <p:sp>
+        <p:nvSpPr>
+          <p:cNvPr id="21" name="TextBox 20"/>
+          <p:cNvSpPr txBox="1"/>
+          <p:nvPr/>
+        </p:nvSpPr>
+        <p:spPr>
+          <a:xfrm>
+            <a:off x="9448495" y="4649723"/>
+            <a:ext cx="2103120" cy="914400"/>
+          </a:xfrm>
+          <a:prstGeom prst="rect">
+            <a:avLst/>
+          </a:prstGeom>
+          <a:noFill/>
+        </p:spPr>
+        <p:txBody>
+          <a:bodyPr wrap="square" anchor="ctr"/>
+          <a:lstStyle/>
+          <a:p>
+            <a:pPr algn="l" eaLnBrk="0">
+              <a:lnSpc>
+                <a:spcPct val="110000"/>
+              </a:lnSpc>
+            </a:pPr>
+            <a:r>
+              <a:rPr sz="1250" b="1">
+                <a:solidFill>
+                  <a:srgbClr val="556175"/>
+                </a:solidFill>
+                <a:latin typeface="맑은 고딕"/>
+                <a:ea typeface="맑은 고딕"/>
+                <a:cs typeface="맑은 고딕"/>
+              </a:rPr>
+              <a:t>3번</a:t>
+            </a:r>
+          </a:p>
+        </p:txBody>
+      </p:sp>
+    </p:spTree>
+  </p:cSld>
+  <p:clrMapOvr>
+    <a:masterClrMapping/>
+  </p:clrMapOvr>
+</p:sld>
+</file>
+
 <file path=ppt/slides/slide4.xml><?xml version="1.0" encoding="utf-8"?>
 <p:sld xmlns:a="http://schemas.openxmlformats.org/drawingml/2006/main" xmlns:p="http://schemas.openxmlformats.org/presentationml/2006/main" xmlns:r="http://schemas.openxmlformats.org/officeDocument/2006/relationships">
   <p:cSld>
@@ -23486,7 +28915,7 @@
       </p:sp>
       <p:pic>
         <p:nvPicPr>
-          <p:cNvPr id="6" name="삽화:경보에서승인까지.svg" descr="illust_296614431074477941_1793113376.png"/>
+          <p:cNvPr id="6" name="삽화:경보에서승인까지.svg" descr="illust_5342703251564295836_1793113376.png"/>
           <p:cNvPicPr>
             <a:picLocks noChangeAspect="1"/>
           </p:cNvPicPr>
@@ -24914,7 +30343,7 @@
       </p:sp>
       <p:pic>
         <p:nvPicPr>
-          <p:cNvPr id="6" name="삽화:세요소.svg" descr="illust_528013563658796988_1793113376.png"/>
+          <p:cNvPr id="6" name="삽화:세요소.svg" descr="illust_5709834208213890638_1793113376.png"/>
           <p:cNvPicPr>
             <a:picLocks noChangeAspect="1"/>
           </p:cNvPicPr>
